--- a/FloodLens_SparkH.pptx
+++ b/FloodLens_SparkH.pptx
@@ -13,9 +13,12 @@
     <p:sldId id="261" r:id="rId7"/>
     <p:sldId id="262" r:id="rId8"/>
     <p:sldId id="263" r:id="rId9"/>
+    <p:sldId id="264" r:id="rId10"/>
+    <p:sldId id="265" r:id="rId11"/>
+    <p:sldId id="266" r:id="rId12"/>
   </p:sldIdLst>
   <p:notesMasterIdLst>
-    <p:notesMasterId r:id="rId10"/>
+    <p:notesMasterId r:id="rId13"/>
   </p:notesMasterIdLst>
   <p:sldSz cx="9144000" cy="5143500"/>
   <p:notesSz cx="5143500" cy="9144000"/>
@@ -114,40 +117,55 @@
   <p:extLst>
     <p:ext uri="{521415D9-36F7-43E2-AB2F-B90AF26B5E84}">
       <p14:sectionLst xmlns:p14="http://schemas.microsoft.com/office/powerpoint/2010/main">
-        <p14:section name="Cover" id="{a0ae0963-0215-3bd5-8d8a-df19ad1513fc}">
+        <p14:section name="Cover" id="{64ef36ff-087d-b00f-1d64-66c18c3a5d94}">
           <p14:sldIdLst>
             <p14:sldId id="256"/>
           </p14:sldIdLst>
         </p14:section>
-        <p14:section name="Problem" id="{265034e2-454f-c014-057e-773e77deb3ac}">
+        <p14:section name="Problem" id="{721bde0a-dfc5-6ba3-6bee-0ee48c060d39}">
           <p14:sldIdLst>
             <p14:sldId id="257"/>
           </p14:sldIdLst>
         </p14:section>
-        <p14:section name="Data" id="{b51a4418-a2fd-f6b7-0283-15d006940f45}">
+        <p14:section name="Data" id="{d4ee5a34-0727-2177-9990-15a1f861dd70}">
           <p14:sldIdLst>
             <p14:sldId id="258"/>
           </p14:sldIdLst>
         </p14:section>
-        <p14:section name="Pipeline" id="{818cae42-45bb-090b-e3cb-d3fe72a09c37}">
+        <p14:section name="Pipeline" id="{9b53a0bf-8061-2988-6c37-25650d17cfe9}">
           <p14:sldIdLst>
             <p14:sldId id="259"/>
             <p14:sldId id="260"/>
           </p14:sldIdLst>
         </p14:section>
-        <p14:section name="Dashboard" id="{f8240ffd-a10d-ad15-ae0c-0b7c31106fa2}">
+        <p14:section name="Agents" id="{ebc3aa7f-fbc4-ddc4-3ade-60aaea9e74a9}">
           <p14:sldIdLst>
             <p14:sldId id="261"/>
           </p14:sldIdLst>
         </p14:section>
-        <p14:section name="Conclusion" id="{b662dd25-c0e5-6a7e-92e1-323946e63b83}">
+        <p14:section name="Dashboard" id="{6be4c50c-9d3b-36e1-aaeb-5a327345e395}">
           <p14:sldIdLst>
             <p14:sldId id="262"/>
           </p14:sldIdLst>
         </p14:section>
-        <p14:section name="Team" id="{8ba537b5-b718-fc1d-d25a-9b02856e3929}">
+        <p14:section name="Results" id="{8ab8d926-3443-cf18-cedd-8ffccba44f7f}">
           <p14:sldIdLst>
             <p14:sldId id="263"/>
+          </p14:sldIdLst>
+        </p14:section>
+        <p14:section name="Impact" id="{1caf43d1-91b9-be80-5f4e-e68196726319}">
+          <p14:sldIdLst>
+            <p14:sldId id="264"/>
+          </p14:sldIdLst>
+        </p14:section>
+        <p14:section name="Conclusion" id="{cbb3e246-414a-c16a-f97b-99a92173ec07}">
+          <p14:sldIdLst>
+            <p14:sldId id="265"/>
+          </p14:sldIdLst>
+        </p14:section>
+        <p14:section name="Team" id="{75ee3073-d013-a9df-974b-0789ef413038}">
+          <p14:sldIdLst>
+            <p14:sldId id="266"/>
           </p14:sldIdLst>
         </p14:section>
       </p14:sectionLst>
@@ -157,6 +175,288 @@
     </p:ext>
   </p:extLst>
 </p:presentation>
+</file>
+
+<file path=ppt/charts/chart1.xml><?xml version="1.0" encoding="utf-8"?>
+<c:chartSpace xmlns:c="http://schemas.openxmlformats.org/drawingml/2006/chart" xmlns:a="http://schemas.openxmlformats.org/drawingml/2006/main" xmlns:r="http://schemas.openxmlformats.org/officeDocument/2006/relationships">
+  <c:date1904 val="0"/>
+  <c:roundedCorners val="1"/>
+  <c:chart>
+    <c:title>
+      <c:tx>
+        <c:rich>
+          <a:bodyPr/>
+          <a:lstStyle/>
+          <a:p>
+            <a:pPr>
+              <a:defRPr sz="1100" b="0" i="0" u="none" strike="noStrike">
+                <a:solidFill>
+                  <a:srgbClr val="0B5D2A"/>
+                </a:solidFill>
+                <a:latin typeface="+mn-lt"/>
+              </a:defRPr>
+            </a:pPr>
+            <a:r>
+              <a:rPr sz="1100" b="0" i="0" u="none" strike="noStrike">
+                <a:solidFill>
+                  <a:srgbClr val="0B5D2A"/>
+                </a:solidFill>
+                <a:latin typeface="+mn-lt"/>
+              </a:rPr>
+              <a:t>Better than climatology in every province (validation, 24 h, %)</a:t>
+            </a:r>
+          </a:p>
+        </c:rich>
+      </c:tx>
+      <c:layout/>
+      <c:overlay val="0"/>
+    </c:title>
+    <c:autoTitleDeleted val="0"/>
+    <c:plotArea>
+      <c:layout/>
+      <c:barChart>
+        <c:barDir val="bar"/>
+        <c:grouping val="clustered"/>
+        <c:varyColors val="0"/>
+        <c:ser>
+          <c:idx val="0"/>
+          <c:order val="0"/>
+          <c:tx>
+            <c:strRef>
+              <c:f>Sheet1!$B$1</c:f>
+              <c:strCache>
+                <c:ptCount val="1"/>
+                <c:pt idx="0">
+                  <c:v>Skill vs climatology (%)</c:v>
+                </c:pt>
+              </c:strCache>
+            </c:strRef>
+          </c:tx>
+          <c:spPr>
+            <a:solidFill>
+              <a:srgbClr val="2E8B57"/>
+            </a:solidFill>
+            <a:effectLst/>
+          </c:spPr>
+          <c:invertIfNegative val="0"/>
+          <c:dLbls>
+            <c:numFmt formatCode="0.0" sourceLinked="0"/>
+            <c:txPr>
+              <a:bodyPr/>
+              <a:lstStyle/>
+              <a:p>
+                <a:pPr>
+                  <a:defRPr b="0" i="0" strike="noStrike" sz="1000" u="none">
+                    <a:solidFill>
+                      <a:srgbClr val="1F2933"/>
+                    </a:solidFill>
+                    <a:latin typeface="+mn-lt"/>
+                  </a:defRPr>
+                </a:pPr>
+              </a:p>
+            </c:txPr>
+            <c:showLegendKey val="0"/>
+            <c:showVal val="1"/>
+            <c:showCatName val="0"/>
+            <c:showSerName val="0"/>
+            <c:showPercent val="0"/>
+            <c:showBubbleSize val="0"/>
+            <c:showLeaderLines val="0"/>
+          </c:dLbls>
+          <c:cat>
+            <c:multiLvlStrRef>
+              <c:f>Sheet1!$A$2:$A$8</c:f>
+              <c:multiLvlStrCache>
+                <c:ptCount val="7"/>
+                <c:lvl>
+                  <c:pt idx="0">
+                    <c:v>Sindh</c:v>
+                  </c:pt>
+                  <c:pt idx="1">
+                    <c:v>Gilgit-Baltistan</c:v>
+                  </c:pt>
+                  <c:pt idx="2">
+                    <c:v>Khyber Pakhtunkhwa</c:v>
+                  </c:pt>
+                  <c:pt idx="3">
+                    <c:v>Punjab</c:v>
+                  </c:pt>
+                  <c:pt idx="4">
+                    <c:v>Balochistan</c:v>
+                  </c:pt>
+                  <c:pt idx="5">
+                    <c:v>Islamabad</c:v>
+                  </c:pt>
+                  <c:pt idx="6">
+                    <c:v>Azad Kashmir</c:v>
+                  </c:pt>
+                </c:lvl>
+              </c:multiLvlStrCache>
+            </c:multiLvlStrRef>
+          </c:cat>
+          <c:val>
+            <c:numRef>
+              <c:f>Sheet1!$B$2:$B$8</c:f>
+              <c:numCache>
+                <c:formatCode>General</c:formatCode>
+                <c:ptCount val="7"/>
+                <c:pt idx="0">
+                  <c:v>12</c:v>
+                </c:pt>
+                <c:pt idx="1">
+                  <c:v>8.4</c:v>
+                </c:pt>
+                <c:pt idx="2">
+                  <c:v>7.6</c:v>
+                </c:pt>
+                <c:pt idx="3">
+                  <c:v>5.9</c:v>
+                </c:pt>
+                <c:pt idx="4">
+                  <c:v>4.5</c:v>
+                </c:pt>
+                <c:pt idx="5">
+                  <c:v>3.2</c:v>
+                </c:pt>
+                <c:pt idx="6">
+                  <c:v>1.5</c:v>
+                </c:pt>
+              </c:numCache>
+            </c:numRef>
+          </c:val>
+        </c:ser>
+        <c:dLbls>
+          <c:numFmt formatCode="0.0" sourceLinked="0"/>
+          <c:txPr>
+            <a:bodyPr/>
+            <a:lstStyle/>
+            <a:p>
+              <a:pPr>
+                <a:defRPr b="0" i="0" strike="noStrike" sz="1000" u="none">
+                  <a:solidFill>
+                    <a:srgbClr val="1F2933"/>
+                  </a:solidFill>
+                  <a:latin typeface="+mn-lt"/>
+                </a:defRPr>
+              </a:pPr>
+            </a:p>
+          </c:txPr>
+          <c:showLegendKey val="0"/>
+          <c:showVal val="1"/>
+          <c:showCatName val="0"/>
+          <c:showSerName val="0"/>
+          <c:showPercent val="0"/>
+          <c:showBubbleSize val="0"/>
+          <c:showLeaderLines val="0"/>
+        </c:dLbls>
+        <c:gapWidth val="150"/>
+        <c:overlap val="0"/>
+        <c:axId val="2094734554"/>
+        <c:axId val="2094734552"/>
+        <c:axId val="2094734556"/>
+      </c:barChart>
+      <c:catAx>
+        <c:axId val="2094734554"/>
+        <c:scaling>
+          <c:orientation val="maxMin"/>
+        </c:scaling>
+        <c:delete val="0"/>
+        <c:axPos val="l"/>
+        <c:numFmt formatCode="General" sourceLinked="1"/>
+        <c:majorTickMark val="out"/>
+        <c:minorTickMark val="none"/>
+        <c:tickLblPos val="nextTo"/>
+        <c:spPr>
+          <a:ln w="12700" cap="flat">
+            <a:solidFill>
+              <a:srgbClr val="888888"/>
+            </a:solidFill>
+            <a:prstDash val="solid"/>
+            <a:round/>
+          </a:ln>
+        </c:spPr>
+        <c:txPr>
+          <a:bodyPr/>
+          <a:lstStyle/>
+          <a:p>
+            <a:pPr>
+              <a:defRPr sz="1000" b="0" i="0" u="none" strike="noStrike">
+                <a:solidFill>
+                  <a:srgbClr val="1F2933"/>
+                </a:solidFill>
+                <a:latin typeface="+mn-lt"/>
+              </a:defRPr>
+            </a:pPr>
+            <a:endParaRPr lang="en-US"/>
+          </a:p>
+        </c:txPr>
+        <c:crossAx val="2094734552"/>
+        <c:crosses val="autoZero"/>
+        <c:auto val="1"/>
+        <c:lblAlgn val="ctr"/>
+        <c:noMultiLvlLbl val="1"/>
+      </c:catAx>
+      <c:valAx>
+        <c:axId val="2094734552"/>
+        <c:scaling>
+          <c:orientation val="minMax"/>
+        </c:scaling>
+        <c:delete val="1"/>
+        <c:axPos val="b"/>
+        <c:numFmt formatCode="General" sourceLinked="0"/>
+        <c:majorTickMark val="out"/>
+        <c:minorTickMark val="none"/>
+        <c:tickLblPos val="low"/>
+        <c:spPr>
+          <a:ln w="12700" cap="flat">
+            <a:solidFill>
+              <a:srgbClr val="888888"/>
+            </a:solidFill>
+            <a:prstDash val="solid"/>
+            <a:round/>
+          </a:ln>
+        </c:spPr>
+        <c:txPr>
+          <a:bodyPr/>
+          <a:lstStyle/>
+          <a:p>
+            <a:pPr>
+              <a:defRPr sz="1200" b="0" i="0" u="none" strike="noStrike">
+                <a:solidFill>
+                  <a:srgbClr val="000000"/>
+                </a:solidFill>
+                <a:latin typeface="Arial"/>
+              </a:defRPr>
+            </a:pPr>
+            <a:endParaRPr lang="en-US"/>
+          </a:p>
+        </c:txPr>
+        <c:crossAx val="2094734554"/>
+        <c:crosses val="autoZero"/>
+        <c:crossBetween val="between"/>
+      </c:valAx>
+      <c:spPr>
+        <a:noFill/>
+        <a:ln>
+          <a:noFill/>
+        </a:ln>
+        <a:effectLst/>
+      </c:spPr>
+    </c:plotArea>
+    <c:plotVisOnly val="1"/>
+    <c:dispBlanksAs val="span"/>
+  </c:chart>
+  <c:spPr>
+    <a:noFill/>
+    <a:ln>
+      <a:noFill/>
+    </a:ln>
+    <a:effectLst/>
+  </c:spPr>
+  <c:externalData r:id="rId1">
+    <c:autoUpdate val="0"/>
+  </c:externalData>
+</c:chartSpace>
 </file>
 
 <file path=ppt/notesMasters/notesMaster1.xml><?xml version="1.0" encoding="utf-8"?>
@@ -596,6 +896,182 @@
 </p:notes>
 </file>
 
+<file path=ppt/notesSlides/notesSlide10.xml><?xml version="1.0" encoding="utf-8"?>
+<p:notes xmlns:a="http://schemas.openxmlformats.org/drawingml/2006/main" xmlns:r="http://schemas.openxmlformats.org/officeDocument/2006/relationships" xmlns:p="http://schemas.openxmlformats.org/presentationml/2006/main">
+  <p:cSld>
+    <p:spTree>
+      <p:nvGrpSpPr>
+        <p:cNvPr id="1" name=""/>
+        <p:cNvGrpSpPr/>
+        <p:nvPr/>
+      </p:nvGrpSpPr>
+      <p:grpSpPr>
+        <a:xfrm>
+          <a:off x="0" y="0"/>
+          <a:ext cx="0" cy="0"/>
+          <a:chOff x="0" y="0"/>
+          <a:chExt cx="0" cy="0"/>
+        </a:xfrm>
+      </p:grpSpPr>
+      <p:sp>
+        <p:nvSpPr>
+          <p:cNvPr id="2" name="Slide Image Placeholder 1"/>
+          <p:cNvSpPr>
+            <a:spLocks noGrp="1" noRot="1" noChangeAspect="1"/>
+          </p:cNvSpPr>
+          <p:nvPr>
+            <p:ph type="sldImg"/>
+          </p:nvPr>
+        </p:nvSpPr>
+        <p:spPr/>
+      </p:sp>
+      <p:sp>
+        <p:nvSpPr>
+          <p:cNvPr id="3" name="Notes Placeholder 2"/>
+          <p:cNvSpPr>
+            <a:spLocks noGrp="1"/>
+          </p:cNvSpPr>
+          <p:nvPr>
+            <p:ph type="body" idx="1"/>
+          </p:nvPr>
+        </p:nvSpPr>
+        <p:spPr/>
+        <p:txBody>
+          <a:bodyPr/>
+          <a:lstStyle/>
+          <a:p>
+            <a:r>
+              <a:rPr lang="en-US" dirty="0"/>
+              <a:t/>
+            </a:r>
+            <a:endParaRPr lang="en-US" dirty="0"/>
+          </a:p>
+        </p:txBody>
+      </p:sp>
+      <p:sp>
+        <p:nvSpPr>
+          <p:cNvPr id="4" name="Slide Number Placeholder 3"/>
+          <p:cNvSpPr>
+            <a:spLocks noGrp="1"/>
+          </p:cNvSpPr>
+          <p:nvPr>
+            <p:ph type="sldNum" sz="quarter" idx="10"/>
+          </p:nvPr>
+        </p:nvSpPr>
+        <p:spPr/>
+        <p:txBody>
+          <a:bodyPr/>
+          <a:lstStyle/>
+          <a:p>
+            <a:fld id="{F7021451-1387-4CA6-816F-3879F97B5CBC}" type="slidenum">
+              <a:rPr lang="en-US"/>
+              <a:t>10</a:t>
+            </a:fld>
+            <a:endParaRPr lang="en-US"/>
+          </a:p>
+        </p:txBody>
+      </p:sp>
+    </p:spTree>
+    <p:extLst>
+      <p:ext uri="{BB962C8B-B14F-4D97-AF65-F5344CB8AC3E}">
+        <p14:creationId xmlns:p14="http://schemas.microsoft.com/office/powerpoint/2010/main" val="1024086991"/>
+      </p:ext>
+    </p:extLst>
+  </p:cSld>
+  <p:clrMapOvr>
+    <a:masterClrMapping/>
+  </p:clrMapOvr>
+</p:notes>
+</file>
+
+<file path=ppt/notesSlides/notesSlide11.xml><?xml version="1.0" encoding="utf-8"?>
+<p:notes xmlns:a="http://schemas.openxmlformats.org/drawingml/2006/main" xmlns:r="http://schemas.openxmlformats.org/officeDocument/2006/relationships" xmlns:p="http://schemas.openxmlformats.org/presentationml/2006/main">
+  <p:cSld>
+    <p:spTree>
+      <p:nvGrpSpPr>
+        <p:cNvPr id="1" name=""/>
+        <p:cNvGrpSpPr/>
+        <p:nvPr/>
+      </p:nvGrpSpPr>
+      <p:grpSpPr>
+        <a:xfrm>
+          <a:off x="0" y="0"/>
+          <a:ext cx="0" cy="0"/>
+          <a:chOff x="0" y="0"/>
+          <a:chExt cx="0" cy="0"/>
+        </a:xfrm>
+      </p:grpSpPr>
+      <p:sp>
+        <p:nvSpPr>
+          <p:cNvPr id="2" name="Slide Image Placeholder 1"/>
+          <p:cNvSpPr>
+            <a:spLocks noGrp="1" noRot="1" noChangeAspect="1"/>
+          </p:cNvSpPr>
+          <p:nvPr>
+            <p:ph type="sldImg"/>
+          </p:nvPr>
+        </p:nvSpPr>
+        <p:spPr/>
+      </p:sp>
+      <p:sp>
+        <p:nvSpPr>
+          <p:cNvPr id="3" name="Notes Placeholder 2"/>
+          <p:cNvSpPr>
+            <a:spLocks noGrp="1"/>
+          </p:cNvSpPr>
+          <p:nvPr>
+            <p:ph type="body" idx="1"/>
+          </p:nvPr>
+        </p:nvSpPr>
+        <p:spPr/>
+        <p:txBody>
+          <a:bodyPr/>
+          <a:lstStyle/>
+          <a:p>
+            <a:r>
+              <a:rPr lang="en-US" dirty="0"/>
+              <a:t/>
+            </a:r>
+            <a:endParaRPr lang="en-US" dirty="0"/>
+          </a:p>
+        </p:txBody>
+      </p:sp>
+      <p:sp>
+        <p:nvSpPr>
+          <p:cNvPr id="4" name="Slide Number Placeholder 3"/>
+          <p:cNvSpPr>
+            <a:spLocks noGrp="1"/>
+          </p:cNvSpPr>
+          <p:nvPr>
+            <p:ph type="sldNum" sz="quarter" idx="10"/>
+          </p:nvPr>
+        </p:nvSpPr>
+        <p:spPr/>
+        <p:txBody>
+          <a:bodyPr/>
+          <a:lstStyle/>
+          <a:p>
+            <a:fld id="{F7021451-1387-4CA6-816F-3879F97B5CBC}" type="slidenum">
+              <a:rPr lang="en-US"/>
+              <a:t>11</a:t>
+            </a:fld>
+            <a:endParaRPr lang="en-US"/>
+          </a:p>
+        </p:txBody>
+      </p:sp>
+    </p:spTree>
+    <p:extLst>
+      <p:ext uri="{BB962C8B-B14F-4D97-AF65-F5344CB8AC3E}">
+        <p14:creationId xmlns:p14="http://schemas.microsoft.com/office/powerpoint/2010/main" val="1024086991"/>
+      </p:ext>
+    </p:extLst>
+  </p:cSld>
+  <p:clrMapOvr>
+    <a:masterClrMapping/>
+  </p:clrMapOvr>
+</p:notes>
+</file>
+
 <file path=ppt/notesSlides/notesSlide2.xml><?xml version="1.0" encoding="utf-8"?>
 <p:notes xmlns:a="http://schemas.openxmlformats.org/drawingml/2006/main" xmlns:r="http://schemas.openxmlformats.org/officeDocument/2006/relationships" xmlns:p="http://schemas.openxmlformats.org/presentationml/2006/main">
   <p:cSld>
@@ -1194,6 +1670,94 @@
             <a:fld id="{F7021451-1387-4CA6-816F-3879F97B5CBC}" type="slidenum">
               <a:rPr lang="en-US"/>
               <a:t>8</a:t>
+            </a:fld>
+            <a:endParaRPr lang="en-US"/>
+          </a:p>
+        </p:txBody>
+      </p:sp>
+    </p:spTree>
+    <p:extLst>
+      <p:ext uri="{BB962C8B-B14F-4D97-AF65-F5344CB8AC3E}">
+        <p14:creationId xmlns:p14="http://schemas.microsoft.com/office/powerpoint/2010/main" val="1024086991"/>
+      </p:ext>
+    </p:extLst>
+  </p:cSld>
+  <p:clrMapOvr>
+    <a:masterClrMapping/>
+  </p:clrMapOvr>
+</p:notes>
+</file>
+
+<file path=ppt/notesSlides/notesSlide9.xml><?xml version="1.0" encoding="utf-8"?>
+<p:notes xmlns:a="http://schemas.openxmlformats.org/drawingml/2006/main" xmlns:r="http://schemas.openxmlformats.org/officeDocument/2006/relationships" xmlns:p="http://schemas.openxmlformats.org/presentationml/2006/main">
+  <p:cSld>
+    <p:spTree>
+      <p:nvGrpSpPr>
+        <p:cNvPr id="1" name=""/>
+        <p:cNvGrpSpPr/>
+        <p:nvPr/>
+      </p:nvGrpSpPr>
+      <p:grpSpPr>
+        <a:xfrm>
+          <a:off x="0" y="0"/>
+          <a:ext cx="0" cy="0"/>
+          <a:chOff x="0" y="0"/>
+          <a:chExt cx="0" cy="0"/>
+        </a:xfrm>
+      </p:grpSpPr>
+      <p:sp>
+        <p:nvSpPr>
+          <p:cNvPr id="2" name="Slide Image Placeholder 1"/>
+          <p:cNvSpPr>
+            <a:spLocks noGrp="1" noRot="1" noChangeAspect="1"/>
+          </p:cNvSpPr>
+          <p:nvPr>
+            <p:ph type="sldImg"/>
+          </p:nvPr>
+        </p:nvSpPr>
+        <p:spPr/>
+      </p:sp>
+      <p:sp>
+        <p:nvSpPr>
+          <p:cNvPr id="3" name="Notes Placeholder 2"/>
+          <p:cNvSpPr>
+            <a:spLocks noGrp="1"/>
+          </p:cNvSpPr>
+          <p:nvPr>
+            <p:ph type="body" idx="1"/>
+          </p:nvPr>
+        </p:nvSpPr>
+        <p:spPr/>
+        <p:txBody>
+          <a:bodyPr/>
+          <a:lstStyle/>
+          <a:p>
+            <a:r>
+              <a:rPr lang="en-US" dirty="0"/>
+              <a:t/>
+            </a:r>
+            <a:endParaRPr lang="en-US" dirty="0"/>
+          </a:p>
+        </p:txBody>
+      </p:sp>
+      <p:sp>
+        <p:nvSpPr>
+          <p:cNvPr id="4" name="Slide Number Placeholder 3"/>
+          <p:cNvSpPr>
+            <a:spLocks noGrp="1"/>
+          </p:cNvSpPr>
+          <p:nvPr>
+            <p:ph type="sldNum" sz="quarter" idx="10"/>
+          </p:nvPr>
+        </p:nvSpPr>
+        <p:spPr/>
+        <p:txBody>
+          <a:bodyPr/>
+          <a:lstStyle/>
+          <a:p>
+            <a:fld id="{F7021451-1387-4CA6-816F-3879F97B5CBC}" type="slidenum">
+              <a:rPr lang="en-US"/>
+              <a:t>9</a:t>
             </a:fld>
             <a:endParaRPr lang="en-US"/>
           </a:p>
@@ -2108,6 +2672,1798 @@
 </p:sld>
 </file>
 
+<file path=ppt/slides/slide10.xml><?xml version="1.0" encoding="utf-8"?>
+<p:sld xmlns:a="http://schemas.openxmlformats.org/drawingml/2006/main" xmlns:r="http://schemas.openxmlformats.org/officeDocument/2006/relationships" xmlns:p="http://schemas.openxmlformats.org/presentationml/2006/main">
+  <p:cSld name="Slide 10">
+    <p:spTree>
+      <p:nvGrpSpPr>
+        <p:cNvPr id="1" name=""/>
+        <p:cNvGrpSpPr/>
+        <p:nvPr/>
+      </p:nvGrpSpPr>
+      <p:grpSpPr>
+        <a:xfrm>
+          <a:off x="0" y="0"/>
+          <a:ext cx="0" cy="0"/>
+          <a:chOff x="0" y="0"/>
+          <a:chExt cx="0" cy="0"/>
+        </a:xfrm>
+      </p:grpSpPr>
+      <p:sp>
+        <p:nvSpPr>
+          <p:cNvPr id="2" name="Text 1"/>
+          <p:cNvSpPr/>
+          <p:nvPr>
+            <p:ph idx="101" type="title" hasCustomPrompt="1"/>
+          </p:nvPr>
+        </p:nvSpPr>
+        <p:spPr>
+          <a:xfrm>
+            <a:off x="457200" y="274320"/>
+            <a:ext cx="8229600" cy="548640"/>
+          </a:xfrm>
+          <a:prstGeom prst="rect">
+            <a:avLst/>
+          </a:prstGeom>
+          <a:noFill/>
+          <a:ln/>
+        </p:spPr>
+        <p:txBody>
+          <a:bodyPr wrap="square" lIns="0" tIns="0" rIns="0" bIns="0" rtlCol="0" anchor="ctr"/>
+          <a:lstStyle/>
+          <a:p>
+            <a:pPr algn="l" indent="0" marL="0">
+              <a:buNone/>
+            </a:pPr>
+            <a:r>
+              <a:rPr lang="en-US" sz="2800" b="1" dirty="0">
+                <a:solidFill>
+                  <a:schemeClr val="tx2"/>
+                </a:solidFill>
+              </a:rPr>
+              <a:t>Conclusion</a:t>
+            </a:r>
+            <a:endParaRPr lang="en-US" sz="2800" dirty="0"/>
+          </a:p>
+        </p:txBody>
+      </p:sp>
+      <p:sp>
+        <p:nvSpPr>
+          <p:cNvPr id="3" name="finding 1"/>
+          <p:cNvSpPr/>
+          <p:nvPr/>
+        </p:nvSpPr>
+        <p:spPr>
+          <a:xfrm>
+            <a:off x="457200" y="1051560"/>
+            <a:ext cx="4937760" cy="1024128"/>
+          </a:xfrm>
+          <a:prstGeom prst="roundRect">
+            <a:avLst>
+              <a:gd name="adj" fmla="val 7143"/>
+            </a:avLst>
+          </a:prstGeom>
+          <a:solidFill>
+            <a:schemeClr val="bg2"/>
+          </a:solidFill>
+          <a:ln w="12700">
+            <a:solidFill>
+              <a:schemeClr val="bg2"/>
+            </a:solidFill>
+            <a:prstDash val="solid"/>
+          </a:ln>
+        </p:spPr>
+      </p:sp>
+      <p:sp>
+        <p:nvSpPr>
+          <p:cNvPr id="4" name="dot 1"/>
+          <p:cNvSpPr/>
+          <p:nvPr/>
+        </p:nvSpPr>
+        <p:spPr>
+          <a:xfrm>
+            <a:off x="640080" y="1234440"/>
+            <a:ext cx="329184" cy="329184"/>
+          </a:xfrm>
+          <a:prstGeom prst="ellipse">
+            <a:avLst/>
+          </a:prstGeom>
+          <a:solidFill>
+            <a:schemeClr val="accent1"/>
+          </a:solidFill>
+          <a:ln w="12700">
+            <a:solidFill>
+              <a:schemeClr val="accent1"/>
+            </a:solidFill>
+            <a:prstDash val="solid"/>
+          </a:ln>
+        </p:spPr>
+      </p:sp>
+      <p:sp>
+        <p:nvSpPr>
+          <p:cNvPr id="5" name="Text 3"/>
+          <p:cNvSpPr txBox="1"/>
+          <p:nvPr/>
+        </p:nvSpPr>
+        <p:spPr>
+          <a:xfrm>
+            <a:off x="640080" y="1234440"/>
+            <a:ext cx="329184" cy="329184"/>
+          </a:xfrm>
+          <a:prstGeom prst="rect">
+            <a:avLst/>
+          </a:prstGeom>
+          <a:noFill/>
+          <a:ln/>
+        </p:spPr>
+        <p:txBody>
+          <a:bodyPr wrap="square" lIns="0" tIns="0" rIns="0" bIns="0" rtlCol="0" anchor="ctr"/>
+          <a:lstStyle/>
+          <a:p>
+            <a:pPr algn="ctr" indent="0" marL="0">
+              <a:buNone/>
+            </a:pPr>
+            <a:r>
+              <a:rPr lang="en-US" sz="1300" b="1" dirty="0">
+                <a:solidFill>
+                  <a:schemeClr val="bg1"/>
+                </a:solidFill>
+              </a:rPr>
+              <a:t>1</a:t>
+            </a:r>
+            <a:endParaRPr lang="en-US" sz="1300" dirty="0"/>
+          </a:p>
+        </p:txBody>
+      </p:sp>
+      <p:sp>
+        <p:nvSpPr>
+          <p:cNvPr id="6" name="Text 4"/>
+          <p:cNvSpPr txBox="1"/>
+          <p:nvPr/>
+        </p:nvSpPr>
+        <p:spPr>
+          <a:xfrm>
+            <a:off x="1143000" y="1188720"/>
+            <a:ext cx="4114800" cy="292608"/>
+          </a:xfrm>
+          <a:prstGeom prst="rect">
+            <a:avLst/>
+          </a:prstGeom>
+          <a:noFill/>
+          <a:ln/>
+        </p:spPr>
+        <p:txBody>
+          <a:bodyPr wrap="square" lIns="0" tIns="0" rIns="0" bIns="0" rtlCol="0" anchor="t"/>
+          <a:lstStyle/>
+          <a:p>
+            <a:pPr indent="0" marL="0">
+              <a:buNone/>
+            </a:pPr>
+            <a:r>
+              <a:rPr lang="en-US" sz="1500" b="1" dirty="0">
+                <a:solidFill>
+                  <a:schemeClr val="tx2"/>
+                </a:solidFill>
+              </a:rPr>
+              <a:t>Beats the baseline on unseen 2026 data</a:t>
+            </a:r>
+            <a:endParaRPr lang="en-US" sz="1500" dirty="0"/>
+          </a:p>
+        </p:txBody>
+      </p:sp>
+      <p:sp>
+        <p:nvSpPr>
+          <p:cNvPr id="7" name="Text 5"/>
+          <p:cNvSpPr txBox="1"/>
+          <p:nvPr/>
+        </p:nvSpPr>
+        <p:spPr>
+          <a:xfrm>
+            <a:off x="1143000" y="1508760"/>
+            <a:ext cx="4114800" cy="530352"/>
+          </a:xfrm>
+          <a:prstGeom prst="rect">
+            <a:avLst/>
+          </a:prstGeom>
+          <a:noFill/>
+          <a:ln/>
+        </p:spPr>
+        <p:txBody>
+          <a:bodyPr wrap="square" lIns="0" tIns="0" rIns="0" bIns="0" rtlCol="0" anchor="t"/>
+          <a:lstStyle/>
+          <a:p>
+            <a:pPr indent="0" marL="0">
+              <a:buNone/>
+            </a:pPr>
+            <a:r>
+              <a:rPr lang="en-US" sz="1200" dirty="0">
+                <a:solidFill>
+                  <a:schemeClr val="tx1"/>
+                </a:solidFill>
+              </a:rPr>
+              <a:t>Brier 0.0177 vs climatology 0.0192 (about 7% better); the 95% interval of the gain excludes zero</a:t>
+            </a:r>
+            <a:endParaRPr lang="en-US" sz="1200" dirty="0"/>
+          </a:p>
+        </p:txBody>
+      </p:sp>
+      <p:sp>
+        <p:nvSpPr>
+          <p:cNvPr id="8" name="finding 2"/>
+          <p:cNvSpPr/>
+          <p:nvPr/>
+        </p:nvSpPr>
+        <p:spPr>
+          <a:xfrm>
+            <a:off x="457200" y="2212848"/>
+            <a:ext cx="4937760" cy="1024128"/>
+          </a:xfrm>
+          <a:prstGeom prst="roundRect">
+            <a:avLst>
+              <a:gd name="adj" fmla="val 7143"/>
+            </a:avLst>
+          </a:prstGeom>
+          <a:solidFill>
+            <a:schemeClr val="bg2"/>
+          </a:solidFill>
+          <a:ln w="12700">
+            <a:solidFill>
+              <a:schemeClr val="bg2"/>
+            </a:solidFill>
+            <a:prstDash val="solid"/>
+          </a:ln>
+        </p:spPr>
+      </p:sp>
+      <p:sp>
+        <p:nvSpPr>
+          <p:cNvPr id="9" name="dot 2"/>
+          <p:cNvSpPr/>
+          <p:nvPr/>
+        </p:nvSpPr>
+        <p:spPr>
+          <a:xfrm>
+            <a:off x="640080" y="2395728"/>
+            <a:ext cx="329184" cy="329184"/>
+          </a:xfrm>
+          <a:prstGeom prst="ellipse">
+            <a:avLst/>
+          </a:prstGeom>
+          <a:solidFill>
+            <a:schemeClr val="accent1"/>
+          </a:solidFill>
+          <a:ln w="12700">
+            <a:solidFill>
+              <a:schemeClr val="accent1"/>
+            </a:solidFill>
+            <a:prstDash val="solid"/>
+          </a:ln>
+        </p:spPr>
+      </p:sp>
+      <p:sp>
+        <p:nvSpPr>
+          <p:cNvPr id="10" name="Text 8"/>
+          <p:cNvSpPr txBox="1"/>
+          <p:nvPr/>
+        </p:nvSpPr>
+        <p:spPr>
+          <a:xfrm>
+            <a:off x="640080" y="2395728"/>
+            <a:ext cx="329184" cy="329184"/>
+          </a:xfrm>
+          <a:prstGeom prst="rect">
+            <a:avLst/>
+          </a:prstGeom>
+          <a:noFill/>
+          <a:ln/>
+        </p:spPr>
+        <p:txBody>
+          <a:bodyPr wrap="square" lIns="0" tIns="0" rIns="0" bIns="0" rtlCol="0" anchor="ctr"/>
+          <a:lstStyle/>
+          <a:p>
+            <a:pPr algn="ctr" indent="0" marL="0">
+              <a:buNone/>
+            </a:pPr>
+            <a:r>
+              <a:rPr lang="en-US" sz="1300" b="1" dirty="0">
+                <a:solidFill>
+                  <a:schemeClr val="bg1"/>
+                </a:solidFill>
+              </a:rPr>
+              <a:t>2</a:t>
+            </a:r>
+            <a:endParaRPr lang="en-US" sz="1300" dirty="0"/>
+          </a:p>
+        </p:txBody>
+      </p:sp>
+      <p:sp>
+        <p:nvSpPr>
+          <p:cNvPr id="11" name="Text 9"/>
+          <p:cNvSpPr txBox="1"/>
+          <p:nvPr/>
+        </p:nvSpPr>
+        <p:spPr>
+          <a:xfrm>
+            <a:off x="1143000" y="2350008"/>
+            <a:ext cx="4114800" cy="292608"/>
+          </a:xfrm>
+          <a:prstGeom prst="rect">
+            <a:avLst/>
+          </a:prstGeom>
+          <a:noFill/>
+          <a:ln/>
+        </p:spPr>
+        <p:txBody>
+          <a:bodyPr wrap="square" lIns="0" tIns="0" rIns="0" bIns="0" rtlCol="0" anchor="t"/>
+          <a:lstStyle/>
+          <a:p>
+            <a:pPr indent="0" marL="0">
+              <a:buNone/>
+            </a:pPr>
+            <a:r>
+              <a:rPr lang="en-US" sz="1500" b="1" dirty="0">
+                <a:solidFill>
+                  <a:schemeClr val="tx2"/>
+                </a:solidFill>
+              </a:rPr>
+              <a:t>Better everywhere we checked</a:t>
+            </a:r>
+            <a:endParaRPr lang="en-US" sz="1500" dirty="0"/>
+          </a:p>
+        </p:txBody>
+      </p:sp>
+      <p:sp>
+        <p:nvSpPr>
+          <p:cNvPr id="12" name="Text 10"/>
+          <p:cNvSpPr txBox="1"/>
+          <p:nvPr/>
+        </p:nvSpPr>
+        <p:spPr>
+          <a:xfrm>
+            <a:off x="1143000" y="2670048"/>
+            <a:ext cx="4114800" cy="530352"/>
+          </a:xfrm>
+          <a:prstGeom prst="rect">
+            <a:avLst/>
+          </a:prstGeom>
+          <a:noFill/>
+          <a:ln/>
+        </p:spPr>
+        <p:txBody>
+          <a:bodyPr wrap="square" lIns="0" tIns="0" rIns="0" bIns="0" rtlCol="0" anchor="t"/>
+          <a:lstStyle/>
+          <a:p>
+            <a:pPr indent="0" marL="0">
+              <a:buNone/>
+            </a:pPr>
+            <a:r>
+              <a:rPr lang="en-US" sz="1200" dirty="0">
+                <a:solidFill>
+                  <a:schemeClr val="tx1"/>
+                </a:solidFill>
+              </a:rPr>
+              <a:t>Ahead of climatology in every province and terrain group and in monsoon months; weakest in Azad Kashmir</a:t>
+            </a:r>
+            <a:endParaRPr lang="en-US" sz="1200" dirty="0"/>
+          </a:p>
+        </p:txBody>
+      </p:sp>
+      <p:sp>
+        <p:nvSpPr>
+          <p:cNvPr id="13" name="finding 3"/>
+          <p:cNvSpPr/>
+          <p:nvPr/>
+        </p:nvSpPr>
+        <p:spPr>
+          <a:xfrm>
+            <a:off x="457200" y="3374136"/>
+            <a:ext cx="4937760" cy="1024128"/>
+          </a:xfrm>
+          <a:prstGeom prst="roundRect">
+            <a:avLst>
+              <a:gd name="adj" fmla="val 7143"/>
+            </a:avLst>
+          </a:prstGeom>
+          <a:solidFill>
+            <a:schemeClr val="bg2"/>
+          </a:solidFill>
+          <a:ln w="12700">
+            <a:solidFill>
+              <a:schemeClr val="bg2"/>
+            </a:solidFill>
+            <a:prstDash val="solid"/>
+          </a:ln>
+        </p:spPr>
+      </p:sp>
+      <p:sp>
+        <p:nvSpPr>
+          <p:cNvPr id="14" name="dot 3"/>
+          <p:cNvSpPr/>
+          <p:nvPr/>
+        </p:nvSpPr>
+        <p:spPr>
+          <a:xfrm>
+            <a:off x="640080" y="3557016"/>
+            <a:ext cx="329184" cy="329184"/>
+          </a:xfrm>
+          <a:prstGeom prst="ellipse">
+            <a:avLst/>
+          </a:prstGeom>
+          <a:solidFill>
+            <a:schemeClr val="accent1"/>
+          </a:solidFill>
+          <a:ln w="12700">
+            <a:solidFill>
+              <a:schemeClr val="accent1"/>
+            </a:solidFill>
+            <a:prstDash val="solid"/>
+          </a:ln>
+        </p:spPr>
+      </p:sp>
+      <p:sp>
+        <p:nvSpPr>
+          <p:cNvPr id="15" name="Text 13"/>
+          <p:cNvSpPr txBox="1"/>
+          <p:nvPr/>
+        </p:nvSpPr>
+        <p:spPr>
+          <a:xfrm>
+            <a:off x="640080" y="3557016"/>
+            <a:ext cx="329184" cy="329184"/>
+          </a:xfrm>
+          <a:prstGeom prst="rect">
+            <a:avLst/>
+          </a:prstGeom>
+          <a:noFill/>
+          <a:ln/>
+        </p:spPr>
+        <p:txBody>
+          <a:bodyPr wrap="square" lIns="0" tIns="0" rIns="0" bIns="0" rtlCol="0" anchor="ctr"/>
+          <a:lstStyle/>
+          <a:p>
+            <a:pPr algn="ctr" indent="0" marL="0">
+              <a:buNone/>
+            </a:pPr>
+            <a:r>
+              <a:rPr lang="en-US" sz="1300" b="1" dirty="0">
+                <a:solidFill>
+                  <a:schemeClr val="bg1"/>
+                </a:solidFill>
+              </a:rPr>
+              <a:t>3</a:t>
+            </a:r>
+            <a:endParaRPr lang="en-US" sz="1300" dirty="0"/>
+          </a:p>
+        </p:txBody>
+      </p:sp>
+      <p:sp>
+        <p:nvSpPr>
+          <p:cNvPr id="16" name="Text 14"/>
+          <p:cNvSpPr txBox="1"/>
+          <p:nvPr/>
+        </p:nvSpPr>
+        <p:spPr>
+          <a:xfrm>
+            <a:off x="1143000" y="3511296"/>
+            <a:ext cx="4114800" cy="292608"/>
+          </a:xfrm>
+          <a:prstGeom prst="rect">
+            <a:avLst/>
+          </a:prstGeom>
+          <a:noFill/>
+          <a:ln/>
+        </p:spPr>
+        <p:txBody>
+          <a:bodyPr wrap="square" lIns="0" tIns="0" rIns="0" bIns="0" rtlCol="0" anchor="t"/>
+          <a:lstStyle/>
+          <a:p>
+            <a:pPr indent="0" marL="0">
+              <a:buNone/>
+            </a:pPr>
+            <a:r>
+              <a:rPr lang="en-US" sz="1500" b="1" dirty="0">
+                <a:solidFill>
+                  <a:schemeClr val="tx2"/>
+                </a:solidFill>
+              </a:rPr>
+              <a:t>Right when it mattered</a:t>
+            </a:r>
+            <a:endParaRPr lang="en-US" sz="1500" dirty="0"/>
+          </a:p>
+        </p:txBody>
+      </p:sp>
+      <p:sp>
+        <p:nvSpPr>
+          <p:cNvPr id="17" name="Text 15"/>
+          <p:cNvSpPr txBox="1"/>
+          <p:nvPr/>
+        </p:nvSpPr>
+        <p:spPr>
+          <a:xfrm>
+            <a:off x="1143000" y="3831336"/>
+            <a:ext cx="4114800" cy="530352"/>
+          </a:xfrm>
+          <a:prstGeom prst="rect">
+            <a:avLst/>
+          </a:prstGeom>
+          <a:noFill/>
+          <a:ln/>
+        </p:spPr>
+        <p:txBody>
+          <a:bodyPr wrap="square" lIns="0" tIns="0" rIns="0" bIns="0" rtlCol="0" anchor="t"/>
+          <a:lstStyle/>
+          <a:p>
+            <a:pPr indent="0" marL="0">
+              <a:buNone/>
+            </a:pPr>
+            <a:r>
+              <a:rPr lang="en-US" sz="1200" dirty="0">
+                <a:solidFill>
+                  <a:schemeClr val="tx1"/>
+                </a:solidFill>
+              </a:rPr>
+              <a:t>Replaying Aug 2025: on 14 Aug, 8 of the 10 districts we ranked highest really had heavy rain</a:t>
+            </a:r>
+            <a:endParaRPr lang="en-US" sz="1200" dirty="0"/>
+          </a:p>
+        </p:txBody>
+      </p:sp>
+      <p:sp>
+        <p:nvSpPr>
+          <p:cNvPr id="18" name="impact"/>
+          <p:cNvSpPr/>
+          <p:nvPr/>
+        </p:nvSpPr>
+        <p:spPr>
+          <a:xfrm>
+            <a:off x="5669280" y="1051560"/>
+            <a:ext cx="3017520" cy="1691640"/>
+          </a:xfrm>
+          <a:prstGeom prst="roundRect">
+            <a:avLst>
+              <a:gd name="adj" fmla="val 4324"/>
+            </a:avLst>
+          </a:prstGeom>
+          <a:solidFill>
+            <a:schemeClr val="tx2"/>
+          </a:solidFill>
+          <a:ln w="12700">
+            <a:solidFill>
+              <a:schemeClr val="tx2"/>
+            </a:solidFill>
+            <a:prstDash val="solid"/>
+          </a:ln>
+        </p:spPr>
+      </p:sp>
+      <p:sp>
+        <p:nvSpPr>
+          <p:cNvPr id="19" name="Text 17"/>
+          <p:cNvSpPr txBox="1"/>
+          <p:nvPr/>
+        </p:nvSpPr>
+        <p:spPr>
+          <a:xfrm>
+            <a:off x="5870448" y="1216152"/>
+            <a:ext cx="2651760" cy="274320"/>
+          </a:xfrm>
+          <a:prstGeom prst="rect">
+            <a:avLst/>
+          </a:prstGeom>
+          <a:noFill/>
+          <a:ln/>
+        </p:spPr>
+        <p:txBody>
+          <a:bodyPr wrap="square" lIns="0" tIns="0" rIns="0" bIns="0" rtlCol="0" anchor="t"/>
+          <a:lstStyle/>
+          <a:p>
+            <a:pPr indent="0" marL="0">
+              <a:buNone/>
+            </a:pPr>
+            <a:r>
+              <a:rPr lang="en-US" sz="1200" b="1" spc="200" kern="0" dirty="0">
+                <a:solidFill>
+                  <a:schemeClr val="bg1"/>
+                </a:solidFill>
+              </a:rPr>
+              <a:t>IMPACT</a:t>
+            </a:r>
+            <a:endParaRPr lang="en-US" sz="1200" dirty="0"/>
+          </a:p>
+        </p:txBody>
+      </p:sp>
+      <p:sp>
+        <p:nvSpPr>
+          <p:cNvPr id="20" name="Text 18"/>
+          <p:cNvSpPr txBox="1"/>
+          <p:nvPr/>
+        </p:nvSpPr>
+        <p:spPr>
+          <a:xfrm>
+            <a:off x="5870448" y="1490472"/>
+            <a:ext cx="2697480" cy="1216152"/>
+          </a:xfrm>
+          <a:prstGeom prst="rect">
+            <a:avLst/>
+          </a:prstGeom>
+          <a:noFill/>
+          <a:ln/>
+        </p:spPr>
+        <p:txBody>
+          <a:bodyPr wrap="square" lIns="0" tIns="0" rIns="0" bIns="0" rtlCol="0" anchor="t"/>
+          <a:lstStyle/>
+          <a:p>
+            <a:pPr indent="0" marL="0">
+              <a:spcAft>
+                <a:spcPts val="400"/>
+              </a:spcAft>
+              <a:buNone/>
+            </a:pPr>
+            <a:r>
+              <a:rPr lang="en-US" sz="1100" dirty="0">
+                <a:solidFill>
+                  <a:schemeClr val="bg1"/>
+                </a:solidFill>
+              </a:rPr>
+              <a:t>160 district offices get a free, hourly, per-district signal with reasons and NDMA sources.</a:t>
+            </a:r>
+            <a:endParaRPr lang="en-US" sz="1100" dirty="0"/>
+          </a:p>
+          <a:p>
+            <a:pPr indent="0" marL="0">
+              <a:spcAft>
+                <a:spcPts val="400"/>
+              </a:spcAft>
+              <a:buNone/>
+            </a:pPr>
+            <a:r>
+              <a:rPr lang="en-US" sz="1100" b="1" dirty="0">
+                <a:solidFill>
+                  <a:schemeClr val="bg1"/>
+                </a:solidFill>
+              </a:rPr>
+              <a:t>Payer: PDMA preparedness budgets or donors' anticipatory-action funds. Runs on 1 CPU, free-tier data.</a:t>
+            </a:r>
+            <a:endParaRPr lang="en-US" sz="1100" dirty="0"/>
+          </a:p>
+        </p:txBody>
+      </p:sp>
+      <p:sp>
+        <p:nvSpPr>
+          <p:cNvPr id="21" name="future work"/>
+          <p:cNvSpPr/>
+          <p:nvPr/>
+        </p:nvSpPr>
+        <p:spPr>
+          <a:xfrm>
+            <a:off x="5669280" y="2907792"/>
+            <a:ext cx="3017520" cy="1572768"/>
+          </a:xfrm>
+          <a:prstGeom prst="roundRect">
+            <a:avLst>
+              <a:gd name="adj" fmla="val 4651"/>
+            </a:avLst>
+          </a:prstGeom>
+          <a:solidFill>
+            <a:schemeClr val="bg2"/>
+          </a:solidFill>
+          <a:ln w="12700">
+            <a:solidFill>
+              <a:schemeClr val="bg2"/>
+            </a:solidFill>
+            <a:prstDash val="solid"/>
+          </a:ln>
+        </p:spPr>
+      </p:sp>
+      <p:sp>
+        <p:nvSpPr>
+          <p:cNvPr id="22" name="Text 20"/>
+          <p:cNvSpPr txBox="1"/>
+          <p:nvPr/>
+        </p:nvSpPr>
+        <p:spPr>
+          <a:xfrm>
+            <a:off x="5870448" y="3072384"/>
+            <a:ext cx="2651760" cy="274320"/>
+          </a:xfrm>
+          <a:prstGeom prst="rect">
+            <a:avLst/>
+          </a:prstGeom>
+          <a:noFill/>
+          <a:ln/>
+        </p:spPr>
+        <p:txBody>
+          <a:bodyPr wrap="square" lIns="0" tIns="0" rIns="0" bIns="0" rtlCol="0" anchor="t"/>
+          <a:lstStyle/>
+          <a:p>
+            <a:pPr indent="0" marL="0">
+              <a:buNone/>
+            </a:pPr>
+            <a:r>
+              <a:rPr lang="en-US" sz="1200" b="1" spc="200" kern="0" dirty="0">
+                <a:solidFill>
+                  <a:schemeClr val="accent2"/>
+                </a:solidFill>
+              </a:rPr>
+              <a:t>FUTURE WORK</a:t>
+            </a:r>
+            <a:endParaRPr lang="en-US" sz="1200" dirty="0"/>
+          </a:p>
+        </p:txBody>
+      </p:sp>
+      <p:sp>
+        <p:nvSpPr>
+          <p:cNvPr id="23" name="Text 21"/>
+          <p:cNvSpPr txBox="1"/>
+          <p:nvPr/>
+        </p:nvSpPr>
+        <p:spPr>
+          <a:xfrm>
+            <a:off x="5870448" y="3383280"/>
+            <a:ext cx="2697480" cy="1051560"/>
+          </a:xfrm>
+          <a:prstGeom prst="rect">
+            <a:avLst/>
+          </a:prstGeom>
+          <a:noFill/>
+          <a:ln/>
+        </p:spPr>
+        <p:txBody>
+          <a:bodyPr wrap="square" lIns="0" tIns="0" rIns="0" bIns="0" rtlCol="0" anchor="t"/>
+          <a:lstStyle/>
+          <a:p>
+            <a:pPr marL="342900" indent="-342900">
+              <a:spcAft>
+                <a:spcPts val="300"/>
+              </a:spcAft>
+              <a:buSzPct val="100000"/>
+              <a:buChar char="•"/>
+            </a:pPr>
+            <a:r>
+              <a:rPr lang="en-US" sz="1200" dirty="0">
+                <a:solidFill>
+                  <a:schemeClr val="tx1"/>
+                </a:solidFill>
+              </a:rPr>
+              <a:t>Sub-daily rain to catch cloudbursts like Buner</a:t>
+            </a:r>
+            <a:endParaRPr lang="en-US" sz="1200" dirty="0"/>
+          </a:p>
+          <a:p>
+            <a:pPr marL="342900" indent="-342900">
+              <a:spcAft>
+                <a:spcPts val="300"/>
+              </a:spcAft>
+              <a:buSzPct val="100000"/>
+              <a:buChar char="•"/>
+            </a:pPr>
+            <a:r>
+              <a:rPr lang="en-US" sz="1200" dirty="0">
+                <a:solidFill>
+                  <a:schemeClr val="tx1"/>
+                </a:solidFill>
+              </a:rPr>
+              <a:t>Flood and damage targets, not only rain</a:t>
+            </a:r>
+            <a:endParaRPr lang="en-US" sz="1200" dirty="0"/>
+          </a:p>
+          <a:p>
+            <a:pPr marL="342900" indent="-342900">
+              <a:spcAft>
+                <a:spcPts val="300"/>
+              </a:spcAft>
+              <a:buSzPct val="100000"/>
+              <a:buChar char="•"/>
+            </a:pPr>
+            <a:r>
+              <a:rPr lang="en-US" sz="1200" dirty="0">
+                <a:solidFill>
+                  <a:schemeClr val="tx1"/>
+                </a:solidFill>
+              </a:rPr>
+              <a:t>A price model that beats “no change”</a:t>
+            </a:r>
+            <a:endParaRPr lang="en-US" sz="1200" dirty="0"/>
+          </a:p>
+        </p:txBody>
+      </p:sp>
+      <p:sp>
+        <p:nvSpPr>
+          <p:cNvPr id="25" name="Slide Number Placeholder 0"/>
+          <p:cNvSpPr>
+            <a:spLocks noGrp="1"/>
+          </p:cNvSpPr>
+          <p:nvPr>
+            <p:ph type="sldNum" sz="quarter" idx="4294967295"/>
+          </p:nvPr>
+        </p:nvSpPr>
+        <p:spPr>
+          <a:xfrm>
+            <a:off x="8321040" y="4754880"/>
+            <a:ext cx="365760" cy="228600"/>
+          </a:xfrm>
+          <a:prstGeom prst="rect">
+            <a:avLst/>
+          </a:prstGeom>
+          <a:extLst>
+            <a:ext uri="{C572A759-6A51-4108-AA02-DFA0A04FC94B}">
+              <ma14:wrappingTextBoxFlag xmlns:ma14="http://schemas.microsoft.com/office/mac/drawingml/2011/main" val="0"/>
+            </a:ext>
+          </a:extLst>
+        </p:spPr>
+        <p:txBody>
+          <a:bodyPr/>
+          <a:lstStyle>
+            <a:lvl1pPr>
+              <a:defRPr sz="900">
+                <a:solidFill>
+                  <a:schemeClr val="accent6"/>
+                </a:solidFill>
+              </a:defRPr>
+            </a:lvl1pPr>
+          </a:lstStyle>
+          <a:p>
+            <a:pPr algn="r"/>
+            <a:fld id="{F7021451-1387-4CA6-816F-3879F97B5CBC}" type="slidenum">
+              <a:rPr b="0" lang="en-US"/>
+              <a:t>10</a:t>
+            </a:fld>
+            <a:endParaRPr lang="en-US"/>
+          </a:p>
+        </p:txBody>
+      </p:sp>
+    </p:spTree>
+  </p:cSld>
+  <p:clrMapOvr>
+    <a:masterClrMapping/>
+  </p:clrMapOvr>
+</p:sld>
+</file>
+
+<file path=ppt/slides/slide11.xml><?xml version="1.0" encoding="utf-8"?>
+<p:sld xmlns:a="http://schemas.openxmlformats.org/drawingml/2006/main" xmlns:r="http://schemas.openxmlformats.org/officeDocument/2006/relationships" xmlns:p="http://schemas.openxmlformats.org/presentationml/2006/main">
+  <p:cSld name="Slide 11">
+    <p:spTree>
+      <p:nvGrpSpPr>
+        <p:cNvPr id="1" name=""/>
+        <p:cNvGrpSpPr/>
+        <p:nvPr/>
+      </p:nvGrpSpPr>
+      <p:grpSpPr>
+        <a:xfrm>
+          <a:off x="0" y="0"/>
+          <a:ext cx="0" cy="0"/>
+          <a:chOff x="0" y="0"/>
+          <a:chExt cx="0" cy="0"/>
+        </a:xfrm>
+      </p:grpSpPr>
+      <p:sp>
+        <p:nvSpPr>
+          <p:cNvPr id="2" name="Text 1"/>
+          <p:cNvSpPr/>
+          <p:nvPr>
+            <p:ph idx="101" type="title" hasCustomPrompt="1"/>
+          </p:nvPr>
+        </p:nvSpPr>
+        <p:spPr>
+          <a:xfrm>
+            <a:off x="457200" y="274320"/>
+            <a:ext cx="8229600" cy="548640"/>
+          </a:xfrm>
+          <a:prstGeom prst="rect">
+            <a:avLst/>
+          </a:prstGeom>
+          <a:noFill/>
+          <a:ln/>
+        </p:spPr>
+        <p:txBody>
+          <a:bodyPr wrap="square" lIns="0" tIns="0" rIns="0" bIns="0" rtlCol="0" anchor="ctr"/>
+          <a:lstStyle/>
+          <a:p>
+            <a:pPr algn="l" indent="0" marL="0">
+              <a:buNone/>
+            </a:pPr>
+            <a:r>
+              <a:rPr lang="en-US" sz="2800" b="1" dirty="0">
+                <a:solidFill>
+                  <a:schemeClr val="tx2"/>
+                </a:solidFill>
+              </a:rPr>
+              <a:t>Team &amp; Credits</a:t>
+            </a:r>
+            <a:endParaRPr lang="en-US" sz="2800" dirty="0"/>
+          </a:p>
+        </p:txBody>
+      </p:sp>
+      <p:sp>
+        <p:nvSpPr>
+          <p:cNvPr id="3" name="Text 1"/>
+          <p:cNvSpPr txBox="1"/>
+          <p:nvPr/>
+        </p:nvSpPr>
+        <p:spPr>
+          <a:xfrm>
+            <a:off x="457200" y="914400"/>
+            <a:ext cx="5486400" cy="365760"/>
+          </a:xfrm>
+          <a:prstGeom prst="rect">
+            <a:avLst/>
+          </a:prstGeom>
+          <a:noFill/>
+          <a:ln/>
+        </p:spPr>
+        <p:txBody>
+          <a:bodyPr wrap="square" lIns="0" tIns="0" rIns="0" bIns="0" rtlCol="0" anchor="t"/>
+          <a:lstStyle/>
+          <a:p>
+            <a:pPr indent="0" marL="0">
+              <a:buNone/>
+            </a:pPr>
+            <a:r>
+              <a:rPr lang="en-US" sz="1800" b="1" spc="200" kern="0" dirty="0">
+                <a:solidFill>
+                  <a:schemeClr val="accent2"/>
+                </a:solidFill>
+              </a:rPr>
+              <a:t>TEAM SPARK H</a:t>
+            </a:r>
+            <a:endParaRPr lang="en-US" sz="1800" dirty="0"/>
+          </a:p>
+        </p:txBody>
+      </p:sp>
+      <p:sp>
+        <p:nvSpPr>
+          <p:cNvPr id="4" name="member 1"/>
+          <p:cNvSpPr/>
+          <p:nvPr/>
+        </p:nvSpPr>
+        <p:spPr>
+          <a:xfrm>
+            <a:off x="457200" y="914400"/>
+            <a:ext cx="2560320" cy="2880360"/>
+          </a:xfrm>
+          <a:prstGeom prst="roundRect">
+            <a:avLst>
+              <a:gd name="adj" fmla="val 2857"/>
+            </a:avLst>
+          </a:prstGeom>
+          <a:solidFill>
+            <a:schemeClr val="bg2"/>
+          </a:solidFill>
+          <a:ln w="12700">
+            <a:solidFill>
+              <a:schemeClr val="bg2"/>
+            </a:solidFill>
+            <a:prstDash val="solid"/>
+          </a:ln>
+        </p:spPr>
+      </p:sp>
+      <p:sp>
+        <p:nvSpPr>
+          <p:cNvPr id="5" name="avatar 1"/>
+          <p:cNvSpPr/>
+          <p:nvPr/>
+        </p:nvSpPr>
+        <p:spPr>
+          <a:xfrm>
+            <a:off x="1463040" y="1051560"/>
+            <a:ext cx="548640" cy="548640"/>
+          </a:xfrm>
+          <a:prstGeom prst="ellipse">
+            <a:avLst/>
+          </a:prstGeom>
+          <a:solidFill>
+            <a:schemeClr val="accent1"/>
+          </a:solidFill>
+          <a:ln w="12700">
+            <a:solidFill>
+              <a:schemeClr val="accent1"/>
+            </a:solidFill>
+            <a:prstDash val="solid"/>
+          </a:ln>
+        </p:spPr>
+      </p:sp>
+      <p:sp>
+        <p:nvSpPr>
+          <p:cNvPr id="6" name="Text 4"/>
+          <p:cNvSpPr txBox="1"/>
+          <p:nvPr/>
+        </p:nvSpPr>
+        <p:spPr>
+          <a:xfrm>
+            <a:off x="1463040" y="1051560"/>
+            <a:ext cx="548640" cy="548640"/>
+          </a:xfrm>
+          <a:prstGeom prst="rect">
+            <a:avLst/>
+          </a:prstGeom>
+          <a:noFill/>
+          <a:ln/>
+        </p:spPr>
+        <p:txBody>
+          <a:bodyPr wrap="square" lIns="0" tIns="0" rIns="0" bIns="0" rtlCol="0" anchor="ctr"/>
+          <a:lstStyle/>
+          <a:p>
+            <a:pPr algn="ctr" indent="0" marL="0">
+              <a:buNone/>
+            </a:pPr>
+            <a:r>
+              <a:rPr lang="en-US" sz="1600" b="1" dirty="0">
+                <a:solidFill>
+                  <a:schemeClr val="bg1"/>
+                </a:solidFill>
+              </a:rPr>
+              <a:t>RT</a:t>
+            </a:r>
+            <a:endParaRPr lang="en-US" sz="1600" dirty="0"/>
+          </a:p>
+        </p:txBody>
+      </p:sp>
+      <p:sp>
+        <p:nvSpPr>
+          <p:cNvPr id="7" name="Text 5"/>
+          <p:cNvSpPr txBox="1"/>
+          <p:nvPr/>
+        </p:nvSpPr>
+        <p:spPr>
+          <a:xfrm>
+            <a:off x="548640" y="1691640"/>
+            <a:ext cx="2377440" cy="292608"/>
+          </a:xfrm>
+          <a:prstGeom prst="rect">
+            <a:avLst/>
+          </a:prstGeom>
+          <a:noFill/>
+          <a:ln/>
+        </p:spPr>
+        <p:txBody>
+          <a:bodyPr wrap="square" lIns="0" tIns="0" rIns="0" bIns="0" rtlCol="0" anchor="t"/>
+          <a:lstStyle/>
+          <a:p>
+            <a:pPr algn="ctr" indent="0" marL="0">
+              <a:buNone/>
+            </a:pPr>
+            <a:r>
+              <a:rPr lang="en-US" sz="1600" b="1" dirty="0">
+                <a:solidFill>
+                  <a:schemeClr val="tx2"/>
+                </a:solidFill>
+              </a:rPr>
+              <a:t>Roshaan Tahir</a:t>
+            </a:r>
+            <a:endParaRPr lang="en-US" sz="1600" dirty="0"/>
+          </a:p>
+        </p:txBody>
+      </p:sp>
+      <p:sp>
+        <p:nvSpPr>
+          <p:cNvPr id="8" name="Text 6"/>
+          <p:cNvSpPr txBox="1"/>
+          <p:nvPr/>
+        </p:nvSpPr>
+        <p:spPr>
+          <a:xfrm>
+            <a:off x="548640" y="1984248"/>
+            <a:ext cx="2377440" cy="256032"/>
+          </a:xfrm>
+          <a:prstGeom prst="rect">
+            <a:avLst/>
+          </a:prstGeom>
+          <a:noFill/>
+          <a:ln/>
+        </p:spPr>
+        <p:txBody>
+          <a:bodyPr wrap="square" lIns="0" tIns="0" rIns="0" bIns="0" rtlCol="0" anchor="t"/>
+          <a:lstStyle/>
+          <a:p>
+            <a:pPr algn="ctr" indent="0" marL="0">
+              <a:buNone/>
+            </a:pPr>
+            <a:r>
+              <a:rPr lang="en-US" sz="1200" b="1" dirty="0">
+                <a:solidFill>
+                  <a:schemeClr val="accent2"/>
+                </a:solidFill>
+              </a:rPr>
+              <a:t>Forecast data, models &amp; dashboard</a:t>
+            </a:r>
+            <a:endParaRPr lang="en-US" sz="1200" dirty="0"/>
+          </a:p>
+        </p:txBody>
+      </p:sp>
+      <p:sp>
+        <p:nvSpPr>
+          <p:cNvPr id="9" name="Text 7"/>
+          <p:cNvSpPr txBox="1"/>
+          <p:nvPr/>
+        </p:nvSpPr>
+        <p:spPr>
+          <a:xfrm>
+            <a:off x="640080" y="2331720"/>
+            <a:ext cx="2240280" cy="1371600"/>
+          </a:xfrm>
+          <a:prstGeom prst="rect">
+            <a:avLst/>
+          </a:prstGeom>
+          <a:noFill/>
+          <a:ln/>
+        </p:spPr>
+        <p:txBody>
+          <a:bodyPr wrap="square" lIns="0" tIns="0" rIns="0" bIns="0" rtlCol="0" anchor="t"/>
+          <a:lstStyle/>
+          <a:p>
+            <a:pPr marL="342900" indent="-342900">
+              <a:spcAft>
+                <a:spcPts val="400"/>
+              </a:spcAft>
+              <a:buSzPct val="100000"/>
+              <a:buChar char="•"/>
+            </a:pPr>
+            <a:r>
+              <a:rPr lang="en-US" sz="1200" dirty="0">
+                <a:solidFill>
+                  <a:schemeClr val="tx1"/>
+                </a:solidFill>
+              </a:rPr>
+              <a:t>Open-Meteo forecast pipeline</a:t>
+            </a:r>
+            <a:endParaRPr lang="en-US" sz="1200" dirty="0"/>
+          </a:p>
+          <a:p>
+            <a:pPr marL="342900" indent="-342900">
+              <a:spcAft>
+                <a:spcPts val="400"/>
+              </a:spcAft>
+              <a:buSzPct val="100000"/>
+              <a:buChar char="•"/>
+            </a:pPr>
+            <a:r>
+              <a:rPr lang="en-US" sz="1200" dirty="0">
+                <a:solidFill>
+                  <a:schemeClr val="tx1"/>
+                </a:solidFill>
+              </a:rPr>
+              <a:t>Model A training and calibration</a:t>
+            </a:r>
+            <a:endParaRPr lang="en-US" sz="1200" dirty="0"/>
+          </a:p>
+          <a:p>
+            <a:pPr marL="342900" indent="-342900">
+              <a:spcAft>
+                <a:spcPts val="400"/>
+              </a:spcAft>
+              <a:buSzPct val="100000"/>
+              <a:buChar char="•"/>
+            </a:pPr>
+            <a:r>
+              <a:rPr lang="en-US" sz="1200" dirty="0">
+                <a:solidFill>
+                  <a:schemeClr val="tx1"/>
+                </a:solidFill>
+              </a:rPr>
+              <a:t>Insight Agent and live dashboard</a:t>
+            </a:r>
+            <a:endParaRPr lang="en-US" sz="1200" dirty="0"/>
+          </a:p>
+        </p:txBody>
+      </p:sp>
+      <p:sp>
+        <p:nvSpPr>
+          <p:cNvPr id="10" name="member 2"/>
+          <p:cNvSpPr/>
+          <p:nvPr/>
+        </p:nvSpPr>
+        <p:spPr>
+          <a:xfrm>
+            <a:off x="3291840" y="914400"/>
+            <a:ext cx="2560320" cy="2880360"/>
+          </a:xfrm>
+          <a:prstGeom prst="roundRect">
+            <a:avLst>
+              <a:gd name="adj" fmla="val 2857"/>
+            </a:avLst>
+          </a:prstGeom>
+          <a:solidFill>
+            <a:schemeClr val="bg2"/>
+          </a:solidFill>
+          <a:ln w="12700">
+            <a:solidFill>
+              <a:schemeClr val="bg2"/>
+            </a:solidFill>
+            <a:prstDash val="solid"/>
+          </a:ln>
+        </p:spPr>
+      </p:sp>
+      <p:sp>
+        <p:nvSpPr>
+          <p:cNvPr id="11" name="avatar 2"/>
+          <p:cNvSpPr/>
+          <p:nvPr/>
+        </p:nvSpPr>
+        <p:spPr>
+          <a:xfrm>
+            <a:off x="4297680" y="1051560"/>
+            <a:ext cx="548640" cy="548640"/>
+          </a:xfrm>
+          <a:prstGeom prst="ellipse">
+            <a:avLst/>
+          </a:prstGeom>
+          <a:solidFill>
+            <a:schemeClr val="accent1"/>
+          </a:solidFill>
+          <a:ln w="12700">
+            <a:solidFill>
+              <a:schemeClr val="accent1"/>
+            </a:solidFill>
+            <a:prstDash val="solid"/>
+          </a:ln>
+        </p:spPr>
+      </p:sp>
+      <p:sp>
+        <p:nvSpPr>
+          <p:cNvPr id="12" name="Text 10"/>
+          <p:cNvSpPr txBox="1"/>
+          <p:nvPr/>
+        </p:nvSpPr>
+        <p:spPr>
+          <a:xfrm>
+            <a:off x="4297680" y="1051560"/>
+            <a:ext cx="548640" cy="548640"/>
+          </a:xfrm>
+          <a:prstGeom prst="rect">
+            <a:avLst/>
+          </a:prstGeom>
+          <a:noFill/>
+          <a:ln/>
+        </p:spPr>
+        <p:txBody>
+          <a:bodyPr wrap="square" lIns="0" tIns="0" rIns="0" bIns="0" rtlCol="0" anchor="ctr"/>
+          <a:lstStyle/>
+          <a:p>
+            <a:pPr algn="ctr" indent="0" marL="0">
+              <a:buNone/>
+            </a:pPr>
+            <a:r>
+              <a:rPr lang="en-US" sz="1600" b="1" dirty="0">
+                <a:solidFill>
+                  <a:schemeClr val="bg1"/>
+                </a:solidFill>
+              </a:rPr>
+              <a:t>HK</a:t>
+            </a:r>
+            <a:endParaRPr lang="en-US" sz="1600" dirty="0"/>
+          </a:p>
+        </p:txBody>
+      </p:sp>
+      <p:sp>
+        <p:nvSpPr>
+          <p:cNvPr id="13" name="Text 11"/>
+          <p:cNvSpPr txBox="1"/>
+          <p:nvPr/>
+        </p:nvSpPr>
+        <p:spPr>
+          <a:xfrm>
+            <a:off x="3383280" y="1691640"/>
+            <a:ext cx="2377440" cy="292608"/>
+          </a:xfrm>
+          <a:prstGeom prst="rect">
+            <a:avLst/>
+          </a:prstGeom>
+          <a:noFill/>
+          <a:ln/>
+        </p:spPr>
+        <p:txBody>
+          <a:bodyPr wrap="square" lIns="0" tIns="0" rIns="0" bIns="0" rtlCol="0" anchor="t"/>
+          <a:lstStyle/>
+          <a:p>
+            <a:pPr algn="ctr" indent="0" marL="0">
+              <a:buNone/>
+            </a:pPr>
+            <a:r>
+              <a:rPr lang="en-US" sz="1600" b="1" dirty="0">
+                <a:solidFill>
+                  <a:schemeClr val="tx2"/>
+                </a:solidFill>
+              </a:rPr>
+              <a:t>Hammad Khan</a:t>
+            </a:r>
+            <a:endParaRPr lang="en-US" sz="1600" dirty="0"/>
+          </a:p>
+        </p:txBody>
+      </p:sp>
+      <p:sp>
+        <p:nvSpPr>
+          <p:cNvPr id="14" name="Text 12"/>
+          <p:cNvSpPr txBox="1"/>
+          <p:nvPr/>
+        </p:nvSpPr>
+        <p:spPr>
+          <a:xfrm>
+            <a:off x="3383280" y="1984248"/>
+            <a:ext cx="2377440" cy="256032"/>
+          </a:xfrm>
+          <a:prstGeom prst="rect">
+            <a:avLst/>
+          </a:prstGeom>
+          <a:noFill/>
+          <a:ln/>
+        </p:spPr>
+        <p:txBody>
+          <a:bodyPr wrap="square" lIns="0" tIns="0" rIns="0" bIns="0" rtlCol="0" anchor="t"/>
+          <a:lstStyle/>
+          <a:p>
+            <a:pPr algn="ctr" indent="0" marL="0">
+              <a:buNone/>
+            </a:pPr>
+            <a:r>
+              <a:rPr lang="en-US" sz="1200" b="1" dirty="0">
+                <a:solidFill>
+                  <a:schemeClr val="accent2"/>
+                </a:solidFill>
+              </a:rPr>
+              <a:t>Satellite rain &amp; ground truth</a:t>
+            </a:r>
+            <a:endParaRPr lang="en-US" sz="1200" dirty="0"/>
+          </a:p>
+        </p:txBody>
+      </p:sp>
+      <p:sp>
+        <p:nvSpPr>
+          <p:cNvPr id="15" name="Text 13"/>
+          <p:cNvSpPr txBox="1"/>
+          <p:nvPr/>
+        </p:nvSpPr>
+        <p:spPr>
+          <a:xfrm>
+            <a:off x="3474720" y="2331720"/>
+            <a:ext cx="2240280" cy="1371600"/>
+          </a:xfrm>
+          <a:prstGeom prst="rect">
+            <a:avLst/>
+          </a:prstGeom>
+          <a:noFill/>
+          <a:ln/>
+        </p:spPr>
+        <p:txBody>
+          <a:bodyPr wrap="square" lIns="0" tIns="0" rIns="0" bIns="0" rtlCol="0" anchor="t"/>
+          <a:lstStyle/>
+          <a:p>
+            <a:pPr marL="342900" indent="-342900">
+              <a:spcAft>
+                <a:spcPts val="400"/>
+              </a:spcAft>
+              <a:buSzPct val="100000"/>
+              <a:buChar char="•"/>
+            </a:pPr>
+            <a:r>
+              <a:rPr lang="en-US" sz="1200" dirty="0">
+                <a:solidFill>
+                  <a:schemeClr val="tx1"/>
+                </a:solidFill>
+              </a:rPr>
+              <a:t>NASA IMERG satellite rain fetcher</a:t>
+            </a:r>
+            <a:endParaRPr lang="en-US" sz="1200" dirty="0"/>
+          </a:p>
+          <a:p>
+            <a:pPr marL="342900" indent="-342900">
+              <a:spcAft>
+                <a:spcPts val="400"/>
+              </a:spcAft>
+              <a:buSzPct val="100000"/>
+              <a:buChar char="•"/>
+            </a:pPr>
+            <a:r>
+              <a:rPr lang="en-US" sz="1200" dirty="0">
+                <a:solidFill>
+                  <a:schemeClr val="tx1"/>
+                </a:solidFill>
+              </a:rPr>
+              <a:t>District rain, 95th-pct thresholds, labels</a:t>
+            </a:r>
+            <a:endParaRPr lang="en-US" sz="1200" dirty="0"/>
+          </a:p>
+          <a:p>
+            <a:pPr marL="342900" indent="-342900">
+              <a:spcAft>
+                <a:spcPts val="400"/>
+              </a:spcAft>
+              <a:buSzPct val="100000"/>
+              <a:buChar char="•"/>
+            </a:pPr>
+            <a:r>
+              <a:rPr lang="en-US" sz="1200" dirty="0">
+                <a:solidFill>
+                  <a:schemeClr val="tx1"/>
+                </a:solidFill>
+              </a:rPr>
+              <a:t>Data quality checks + 26 tests</a:t>
+            </a:r>
+            <a:endParaRPr lang="en-US" sz="1200" dirty="0"/>
+          </a:p>
+        </p:txBody>
+      </p:sp>
+      <p:sp>
+        <p:nvSpPr>
+          <p:cNvPr id="16" name="member 3"/>
+          <p:cNvSpPr/>
+          <p:nvPr/>
+        </p:nvSpPr>
+        <p:spPr>
+          <a:xfrm>
+            <a:off x="6126480" y="914400"/>
+            <a:ext cx="2560320" cy="2880360"/>
+          </a:xfrm>
+          <a:prstGeom prst="roundRect">
+            <a:avLst>
+              <a:gd name="adj" fmla="val 2857"/>
+            </a:avLst>
+          </a:prstGeom>
+          <a:solidFill>
+            <a:schemeClr val="bg2"/>
+          </a:solidFill>
+          <a:ln w="12700">
+            <a:solidFill>
+              <a:schemeClr val="bg2"/>
+            </a:solidFill>
+            <a:prstDash val="solid"/>
+          </a:ln>
+        </p:spPr>
+      </p:sp>
+      <p:sp>
+        <p:nvSpPr>
+          <p:cNvPr id="17" name="avatar 3"/>
+          <p:cNvSpPr/>
+          <p:nvPr/>
+        </p:nvSpPr>
+        <p:spPr>
+          <a:xfrm>
+            <a:off x="7132320" y="1051560"/>
+            <a:ext cx="548640" cy="548640"/>
+          </a:xfrm>
+          <a:prstGeom prst="ellipse">
+            <a:avLst/>
+          </a:prstGeom>
+          <a:solidFill>
+            <a:schemeClr val="accent1"/>
+          </a:solidFill>
+          <a:ln w="12700">
+            <a:solidFill>
+              <a:schemeClr val="accent1"/>
+            </a:solidFill>
+            <a:prstDash val="solid"/>
+          </a:ln>
+        </p:spPr>
+      </p:sp>
+      <p:sp>
+        <p:nvSpPr>
+          <p:cNvPr id="18" name="Text 16"/>
+          <p:cNvSpPr txBox="1"/>
+          <p:nvPr/>
+        </p:nvSpPr>
+        <p:spPr>
+          <a:xfrm>
+            <a:off x="7132320" y="1051560"/>
+            <a:ext cx="548640" cy="548640"/>
+          </a:xfrm>
+          <a:prstGeom prst="rect">
+            <a:avLst/>
+          </a:prstGeom>
+          <a:noFill/>
+          <a:ln/>
+        </p:spPr>
+        <p:txBody>
+          <a:bodyPr wrap="square" lIns="0" tIns="0" rIns="0" bIns="0" rtlCol="0" anchor="ctr"/>
+          <a:lstStyle/>
+          <a:p>
+            <a:pPr algn="ctr" indent="0" marL="0">
+              <a:buNone/>
+            </a:pPr>
+            <a:r>
+              <a:rPr lang="en-US" sz="1600" b="1" dirty="0">
+                <a:solidFill>
+                  <a:schemeClr val="bg1"/>
+                </a:solidFill>
+              </a:rPr>
+              <a:t>MH</a:t>
+            </a:r>
+            <a:endParaRPr lang="en-US" sz="1600" dirty="0"/>
+          </a:p>
+        </p:txBody>
+      </p:sp>
+      <p:sp>
+        <p:nvSpPr>
+          <p:cNvPr id="19" name="Text 17"/>
+          <p:cNvSpPr txBox="1"/>
+          <p:nvPr/>
+        </p:nvSpPr>
+        <p:spPr>
+          <a:xfrm>
+            <a:off x="6217920" y="1691640"/>
+            <a:ext cx="2377440" cy="292608"/>
+          </a:xfrm>
+          <a:prstGeom prst="rect">
+            <a:avLst/>
+          </a:prstGeom>
+          <a:noFill/>
+          <a:ln/>
+        </p:spPr>
+        <p:txBody>
+          <a:bodyPr wrap="square" lIns="0" tIns="0" rIns="0" bIns="0" rtlCol="0" anchor="t"/>
+          <a:lstStyle/>
+          <a:p>
+            <a:pPr algn="ctr" indent="0" marL="0">
+              <a:buNone/>
+            </a:pPr>
+            <a:r>
+              <a:rPr lang="en-US" sz="1600" b="1" dirty="0">
+                <a:solidFill>
+                  <a:schemeClr val="tx2"/>
+                </a:solidFill>
+              </a:rPr>
+              <a:t>Muhammad Huzaifa</a:t>
+            </a:r>
+            <a:endParaRPr lang="en-US" sz="1600" dirty="0"/>
+          </a:p>
+        </p:txBody>
+      </p:sp>
+      <p:sp>
+        <p:nvSpPr>
+          <p:cNvPr id="20" name="Text 18"/>
+          <p:cNvSpPr txBox="1"/>
+          <p:nvPr/>
+        </p:nvSpPr>
+        <p:spPr>
+          <a:xfrm>
+            <a:off x="6217920" y="1984248"/>
+            <a:ext cx="2377440" cy="256032"/>
+          </a:xfrm>
+          <a:prstGeom prst="rect">
+            <a:avLst/>
+          </a:prstGeom>
+          <a:noFill/>
+          <a:ln/>
+        </p:spPr>
+        <p:txBody>
+          <a:bodyPr wrap="square" lIns="0" tIns="0" rIns="0" bIns="0" rtlCol="0" anchor="t"/>
+          <a:lstStyle/>
+          <a:p>
+            <a:pPr algn="ctr" indent="0" marL="0">
+              <a:buNone/>
+            </a:pPr>
+            <a:r>
+              <a:rPr lang="en-US" sz="1200" b="1" dirty="0">
+                <a:solidFill>
+                  <a:schemeClr val="accent2"/>
+                </a:solidFill>
+              </a:rPr>
+              <a:t>Deployment &amp; delivery</a:t>
+            </a:r>
+            <a:endParaRPr lang="en-US" sz="1200" dirty="0"/>
+          </a:p>
+        </p:txBody>
+      </p:sp>
+      <p:sp>
+        <p:nvSpPr>
+          <p:cNvPr id="21" name="Text 19"/>
+          <p:cNvSpPr txBox="1"/>
+          <p:nvPr/>
+        </p:nvSpPr>
+        <p:spPr>
+          <a:xfrm>
+            <a:off x="6309360" y="2331720"/>
+            <a:ext cx="2240280" cy="1371600"/>
+          </a:xfrm>
+          <a:prstGeom prst="rect">
+            <a:avLst/>
+          </a:prstGeom>
+          <a:noFill/>
+          <a:ln/>
+        </p:spPr>
+        <p:txBody>
+          <a:bodyPr wrap="square" lIns="0" tIns="0" rIns="0" bIns="0" rtlCol="0" anchor="t"/>
+          <a:lstStyle/>
+          <a:p>
+            <a:pPr marL="342900" indent="-342900">
+              <a:spcAft>
+                <a:spcPts val="400"/>
+              </a:spcAft>
+              <a:buSzPct val="100000"/>
+              <a:buChar char="•"/>
+            </a:pPr>
+            <a:r>
+              <a:rPr lang="en-US" sz="1200" dirty="0">
+                <a:solidFill>
+                  <a:schemeClr val="tx1"/>
+                </a:solidFill>
+              </a:rPr>
+              <a:t>Hugging Face Space (Docker server)</a:t>
+            </a:r>
+            <a:endParaRPr lang="en-US" sz="1200" dirty="0"/>
+          </a:p>
+          <a:p>
+            <a:pPr marL="342900" indent="-342900">
+              <a:spcAft>
+                <a:spcPts val="400"/>
+              </a:spcAft>
+              <a:buSzPct val="100000"/>
+              <a:buChar char="•"/>
+            </a:pPr>
+            <a:r>
+              <a:rPr lang="en-US" sz="1200" dirty="0">
+                <a:solidFill>
+                  <a:schemeClr val="tx1"/>
+                </a:solidFill>
+              </a:rPr>
+              <a:t>Build-and-assemble deploy script</a:t>
+            </a:r>
+            <a:endParaRPr lang="en-US" sz="1200" dirty="0"/>
+          </a:p>
+          <a:p>
+            <a:pPr marL="342900" indent="-342900">
+              <a:spcAft>
+                <a:spcPts val="400"/>
+              </a:spcAft>
+              <a:buSzPct val="100000"/>
+              <a:buChar char="•"/>
+            </a:pPr>
+            <a:r>
+              <a:rPr lang="en-US" sz="1200" dirty="0">
+                <a:solidFill>
+                  <a:schemeClr val="tx1"/>
+                </a:solidFill>
+              </a:rPr>
+              <a:t>Deploy checklist and AI-use records</a:t>
+            </a:r>
+            <a:endParaRPr lang="en-US" sz="1200" dirty="0"/>
+          </a:p>
+        </p:txBody>
+      </p:sp>
+      <p:sp>
+        <p:nvSpPr>
+          <p:cNvPr id="22" name="Text 20"/>
+          <p:cNvSpPr txBox="1"/>
+          <p:nvPr/>
+        </p:nvSpPr>
+        <p:spPr>
+          <a:xfrm>
+            <a:off x="457200" y="3931920"/>
+            <a:ext cx="8229600" cy="274320"/>
+          </a:xfrm>
+          <a:prstGeom prst="rect">
+            <a:avLst/>
+          </a:prstGeom>
+          <a:noFill/>
+          <a:ln/>
+        </p:spPr>
+        <p:txBody>
+          <a:bodyPr wrap="square" lIns="0" tIns="0" rIns="0" bIns="0" rtlCol="0" anchor="t"/>
+          <a:lstStyle/>
+          <a:p>
+            <a:pPr indent="0" marL="0">
+              <a:buNone/>
+            </a:pPr>
+            <a:r>
+              <a:rPr lang="en-US" sz="1100" b="1" dirty="0">
+                <a:solidFill>
+                  <a:schemeClr val="tx1"/>
+                </a:solidFill>
+              </a:rPr>
+              <a:t>Contact: </a:t>
+            </a:r>
+            <a:pPr indent="0" marL="0">
+              <a:buNone/>
+            </a:pPr>
+            <a:r>
+              <a:rPr lang="en-US" sz="1100" dirty="0">
+                <a:solidFill>
+                  <a:schemeClr val="accent5"/>
+                </a:solidFill>
+              </a:rPr>
+              <a:t>github.com/RoshaanT1/floodlens-pakistan</a:t>
+            </a:r>
+            <a:pPr indent="0" marL="0">
+              <a:buNone/>
+            </a:pPr>
+            <a:r>
+              <a:rPr lang="en-US" sz="1100" dirty="0">
+                <a:solidFill>
+                  <a:schemeClr val="tx1"/>
+                </a:solidFill>
+              </a:rPr>
+              <a:t>   ·   Data: Open-Meteo, NASA, OCHA, PBS, NDMA</a:t>
+            </a:r>
+            <a:endParaRPr lang="en-US" sz="1100" dirty="0"/>
+          </a:p>
+        </p:txBody>
+      </p:sp>
+      <p:sp>
+        <p:nvSpPr>
+          <p:cNvPr id="23" name="Text 21"/>
+          <p:cNvSpPr txBox="1"/>
+          <p:nvPr/>
+        </p:nvSpPr>
+        <p:spPr>
+          <a:xfrm>
+            <a:off x="457200" y="4224528"/>
+            <a:ext cx="5486400" cy="411480"/>
+          </a:xfrm>
+          <a:prstGeom prst="rect">
+            <a:avLst/>
+          </a:prstGeom>
+          <a:noFill/>
+          <a:ln/>
+        </p:spPr>
+        <p:txBody>
+          <a:bodyPr wrap="square" lIns="0" tIns="0" rIns="0" bIns="0" rtlCol="0" anchor="t"/>
+          <a:lstStyle/>
+          <a:p>
+            <a:pPr indent="0" marL="0">
+              <a:buNone/>
+            </a:pPr>
+            <a:r>
+              <a:rPr lang="en-US" sz="2400" b="1" dirty="0">
+                <a:solidFill>
+                  <a:schemeClr val="tx2"/>
+                </a:solidFill>
+              </a:rPr>
+              <a:t>Thank you!</a:t>
+            </a:r>
+            <a:endParaRPr lang="en-US" sz="2400" dirty="0"/>
+          </a:p>
+        </p:txBody>
+      </p:sp>
+      <p:sp>
+        <p:nvSpPr>
+          <p:cNvPr id="25" name="Slide Number Placeholder 0"/>
+          <p:cNvSpPr>
+            <a:spLocks noGrp="1"/>
+          </p:cNvSpPr>
+          <p:nvPr>
+            <p:ph type="sldNum" sz="quarter" idx="4294967295"/>
+          </p:nvPr>
+        </p:nvSpPr>
+        <p:spPr>
+          <a:xfrm>
+            <a:off x="8321040" y="4754880"/>
+            <a:ext cx="365760" cy="228600"/>
+          </a:xfrm>
+          <a:prstGeom prst="rect">
+            <a:avLst/>
+          </a:prstGeom>
+          <a:extLst>
+            <a:ext uri="{C572A759-6A51-4108-AA02-DFA0A04FC94B}">
+              <ma14:wrappingTextBoxFlag xmlns:ma14="http://schemas.microsoft.com/office/mac/drawingml/2011/main" val="0"/>
+            </a:ext>
+          </a:extLst>
+        </p:spPr>
+        <p:txBody>
+          <a:bodyPr/>
+          <a:lstStyle>
+            <a:lvl1pPr>
+              <a:defRPr sz="900">
+                <a:solidFill>
+                  <a:schemeClr val="accent6"/>
+                </a:solidFill>
+              </a:defRPr>
+            </a:lvl1pPr>
+          </a:lstStyle>
+          <a:p>
+            <a:pPr algn="r"/>
+            <a:fld id="{F7021451-1387-4CA6-816F-3879F97B5CBC}" type="slidenum">
+              <a:rPr b="0" lang="en-US"/>
+              <a:t>11</a:t>
+            </a:fld>
+            <a:endParaRPr lang="en-US"/>
+          </a:p>
+        </p:txBody>
+      </p:sp>
+    </p:spTree>
+  </p:cSld>
+  <p:clrMapOvr>
+    <a:masterClrMapping/>
+  </p:clrMapOvr>
+</p:sld>
+</file>
+
 <file path=ppt/slides/slide2.xml><?xml version="1.0" encoding="utf-8"?>
 <p:sld xmlns:a="http://schemas.openxmlformats.org/drawingml/2006/main" xmlns:r="http://schemas.openxmlformats.org/officeDocument/2006/relationships" xmlns:p="http://schemas.openxmlformats.org/presentationml/2006/main">
   <p:cSld name="Slide 2">
@@ -3368,7 +5724,7 @@
                             <a:srgbClr val="1F2933"/>
                           </a:solidFill>
                         </a:rPr>
-                        <a:t>Rain 2015–2026 · forecasts Jul 2024–Oct 2026 · prices Jan 2023–Oct 2026</a:t>
+                        <a:t>Satellite rain 2015–2026 · forecasts Feb 2024–Oct 2026 · prices Jan 2023–Oct 2026</a:t>
                       </a:r>
                       <a:endParaRPr lang="en-US" sz="1100" dirty="0"/>
                     </a:p>
@@ -3489,7 +5845,7 @@
                             <a:srgbClr val="1F2933"/>
                           </a:solidFill>
                         </a:rPr>
-                        <a:t>Raw files + SHA-256 manifest → Parquet / DuckDB · CC BY 4.0, NASA open data, public govt. statistics</a:t>
+                        <a:t>4,856 raw files in manifest.csv (source, query, UTC time, SHA-256, licence) → Parquet / DuckDB · CC BY 4.0, NASA open data, public govt. statistics</a:t>
                       </a:r>
                       <a:endParaRPr lang="en-US" sz="1100" dirty="0"/>
                     </a:p>
@@ -6333,7 +8689,7 @@
                   <a:schemeClr val="tx2"/>
                 </a:solidFill>
               </a:rPr>
-              <a:t>Dashboard / App Views</a:t>
+              <a:t>Agents &amp; Automation</a:t>
             </a:r>
             <a:endParaRPr lang="en-US" sz="2800" dirty="0"/>
           </a:p>
@@ -6348,7 +8704,7 @@
         <p:spPr>
           <a:xfrm>
             <a:off x="457200" y="914400"/>
-            <a:ext cx="5212080" cy="228600"/>
+            <a:ext cx="5120640" cy="274320"/>
           </a:xfrm>
           <a:prstGeom prst="rect">
             <a:avLst/>
@@ -6366,56 +8722,1089 @@
             <a:r>
               <a:rPr lang="en-US" sz="1200" b="1" dirty="0">
                 <a:solidFill>
+                  <a:schemeClr val="accent2"/>
+                </a:solidFill>
+              </a:rPr>
+              <a:t>DATA QUALITY AGENT · runs pandera checks, decides fix / fill / flag, logs why</a:t>
+            </a:r>
+            <a:endParaRPr lang="en-US" sz="1200" dirty="0"/>
+          </a:p>
+        </p:txBody>
+      </p:sp>
+      <p:graphicFrame>
+        <p:nvGraphicFramePr>
+          <p:cNvPr id="7" name="Table 0"/>
+          <p:cNvGraphicFramePr>
+            <a:graphicFrameLocks noGrp="1"/>
+          </p:cNvGraphicFramePr>
+          <p:nvPr>
+            <p:extLst>
+              <p:ext uri="{D42A27DB-BD31-4B8C-83A1-F6EECF244321}">
+                <p14:modId xmlns:p14="http://schemas.microsoft.com/office/powerpoint/2010/main" val="1579011935"/>
+              </p:ext>
+            </p:extLst>
+          </p:nvPr>
+        </p:nvGraphicFramePr>
+        <p:xfrm>
+          <a:off x="457200" y="1234440"/>
+          <a:ext cx="5120640" cy="914400"/>
+        </p:xfrm>
+        <a:graphic>
+          <a:graphicData uri="http://schemas.openxmlformats.org/drawingml/2006/table">
+            <a:tbl>
+              <a:tblPr/>
+              <a:tblGrid>
+                <a:gridCol w="1600200"/>
+                <a:gridCol w="640080"/>
+                <a:gridCol w="548640"/>
+                <a:gridCol w="2331720"/>
+              </a:tblGrid>
+              <a:tr h="329184">
+                <a:tc>
+                  <a:txBody>
+                    <a:bodyPr/>
+                    <a:lstStyle/>
+                    <a:p>
+                      <a:pPr indent="0" marL="0">
+                        <a:buNone/>
+                      </a:pPr>
+                      <a:r>
+                        <a:rPr lang="en-US" sz="1100" b="1" dirty="0">
+                          <a:solidFill>
+                            <a:srgbClr val="FFFFFF"/>
+                          </a:solidFill>
+                        </a:rPr>
+                        <a:t>Rule</a:t>
+                      </a:r>
+                      <a:endParaRPr lang="en-US" sz="1100" dirty="0"/>
+                    </a:p>
+                  </a:txBody>
+                  <a:tcPr marL="73152" marR="73152" marT="36576" marB="36576" anchor="ctr">
+                    <a:lnL w="9525" cap="flat" cmpd="sng" algn="ctr">
+                      <a:solidFill>
+                        <a:srgbClr val="D0D5DD"/>
+                      </a:solidFill>
+                      <a:prstDash val="solid"/>
+                      <a:round/>
+                      <a:headEnd type="none" w="med" len="med"/>
+                      <a:tailEnd type="none" w="med" len="med"/>
+                    </a:lnL>
+                    <a:lnR w="9525" cap="flat" cmpd="sng" algn="ctr">
+                      <a:solidFill>
+                        <a:srgbClr val="D0D5DD"/>
+                      </a:solidFill>
+                      <a:prstDash val="solid"/>
+                      <a:round/>
+                      <a:headEnd type="none" w="med" len="med"/>
+                      <a:tailEnd type="none" w="med" len="med"/>
+                    </a:lnR>
+                    <a:lnT w="9525" cap="flat" cmpd="sng" algn="ctr">
+                      <a:solidFill>
+                        <a:srgbClr val="D0D5DD"/>
+                      </a:solidFill>
+                      <a:prstDash val="solid"/>
+                      <a:round/>
+                      <a:headEnd type="none" w="med" len="med"/>
+                      <a:tailEnd type="none" w="med" len="med"/>
+                    </a:lnT>
+                    <a:lnB w="9525" cap="flat" cmpd="sng" algn="ctr">
+                      <a:solidFill>
+                        <a:srgbClr val="D0D5DD"/>
+                      </a:solidFill>
+                      <a:prstDash val="solid"/>
+                      <a:round/>
+                      <a:headEnd type="none" w="med" len="med"/>
+                      <a:tailEnd type="none" w="med" len="med"/>
+                    </a:lnB>
+                    <a:solidFill>
+                      <a:srgbClr val="0B5D2A"/>
+                    </a:solidFill>
+                  </a:tcPr>
+                </a:tc>
+                <a:tc>
+                  <a:txBody>
+                    <a:bodyPr/>
+                    <a:lstStyle/>
+                    <a:p>
+                      <a:pPr indent="0" marL="0">
+                        <a:buNone/>
+                      </a:pPr>
+                      <a:r>
+                        <a:rPr lang="en-US" sz="1100" b="1" dirty="0">
+                          <a:solidFill>
+                            <a:srgbClr val="FFFFFF"/>
+                          </a:solidFill>
+                        </a:rPr>
+                        <a:t>Action</a:t>
+                      </a:r>
+                      <a:endParaRPr lang="en-US" sz="1100" dirty="0"/>
+                    </a:p>
+                  </a:txBody>
+                  <a:tcPr marL="73152" marR="73152" marT="36576" marB="36576" anchor="ctr">
+                    <a:lnL w="9525" cap="flat" cmpd="sng" algn="ctr">
+                      <a:solidFill>
+                        <a:srgbClr val="D0D5DD"/>
+                      </a:solidFill>
+                      <a:prstDash val="solid"/>
+                      <a:round/>
+                      <a:headEnd type="none" w="med" len="med"/>
+                      <a:tailEnd type="none" w="med" len="med"/>
+                    </a:lnL>
+                    <a:lnR w="9525" cap="flat" cmpd="sng" algn="ctr">
+                      <a:solidFill>
+                        <a:srgbClr val="D0D5DD"/>
+                      </a:solidFill>
+                      <a:prstDash val="solid"/>
+                      <a:round/>
+                      <a:headEnd type="none" w="med" len="med"/>
+                      <a:tailEnd type="none" w="med" len="med"/>
+                    </a:lnR>
+                    <a:lnT w="9525" cap="flat" cmpd="sng" algn="ctr">
+                      <a:solidFill>
+                        <a:srgbClr val="D0D5DD"/>
+                      </a:solidFill>
+                      <a:prstDash val="solid"/>
+                      <a:round/>
+                      <a:headEnd type="none" w="med" len="med"/>
+                      <a:tailEnd type="none" w="med" len="med"/>
+                    </a:lnT>
+                    <a:lnB w="9525" cap="flat" cmpd="sng" algn="ctr">
+                      <a:solidFill>
+                        <a:srgbClr val="D0D5DD"/>
+                      </a:solidFill>
+                      <a:prstDash val="solid"/>
+                      <a:round/>
+                      <a:headEnd type="none" w="med" len="med"/>
+                      <a:tailEnd type="none" w="med" len="med"/>
+                    </a:lnB>
+                    <a:solidFill>
+                      <a:srgbClr val="0B5D2A"/>
+                    </a:solidFill>
+                  </a:tcPr>
+                </a:tc>
+                <a:tc>
+                  <a:txBody>
+                    <a:bodyPr/>
+                    <a:lstStyle/>
+                    <a:p>
+                      <a:pPr indent="0" marL="0">
+                        <a:buNone/>
+                      </a:pPr>
+                      <a:r>
+                        <a:rPr lang="en-US" sz="1100" b="1" dirty="0">
+                          <a:solidFill>
+                            <a:srgbClr val="FFFFFF"/>
+                          </a:solidFill>
+                        </a:rPr>
+                        <a:t>Rows</a:t>
+                      </a:r>
+                      <a:endParaRPr lang="en-US" sz="1100" dirty="0"/>
+                    </a:p>
+                  </a:txBody>
+                  <a:tcPr marL="73152" marR="73152" marT="36576" marB="36576" anchor="ctr">
+                    <a:lnL w="9525" cap="flat" cmpd="sng" algn="ctr">
+                      <a:solidFill>
+                        <a:srgbClr val="D0D5DD"/>
+                      </a:solidFill>
+                      <a:prstDash val="solid"/>
+                      <a:round/>
+                      <a:headEnd type="none" w="med" len="med"/>
+                      <a:tailEnd type="none" w="med" len="med"/>
+                    </a:lnL>
+                    <a:lnR w="9525" cap="flat" cmpd="sng" algn="ctr">
+                      <a:solidFill>
+                        <a:srgbClr val="D0D5DD"/>
+                      </a:solidFill>
+                      <a:prstDash val="solid"/>
+                      <a:round/>
+                      <a:headEnd type="none" w="med" len="med"/>
+                      <a:tailEnd type="none" w="med" len="med"/>
+                    </a:lnR>
+                    <a:lnT w="9525" cap="flat" cmpd="sng" algn="ctr">
+                      <a:solidFill>
+                        <a:srgbClr val="D0D5DD"/>
+                      </a:solidFill>
+                      <a:prstDash val="solid"/>
+                      <a:round/>
+                      <a:headEnd type="none" w="med" len="med"/>
+                      <a:tailEnd type="none" w="med" len="med"/>
+                    </a:lnT>
+                    <a:lnB w="9525" cap="flat" cmpd="sng" algn="ctr">
+                      <a:solidFill>
+                        <a:srgbClr val="D0D5DD"/>
+                      </a:solidFill>
+                      <a:prstDash val="solid"/>
+                      <a:round/>
+                      <a:headEnd type="none" w="med" len="med"/>
+                      <a:tailEnd type="none" w="med" len="med"/>
+                    </a:lnB>
+                    <a:solidFill>
+                      <a:srgbClr val="0B5D2A"/>
+                    </a:solidFill>
+                  </a:tcPr>
+                </a:tc>
+                <a:tc>
+                  <a:txBody>
+                    <a:bodyPr/>
+                    <a:lstStyle/>
+                    <a:p>
+                      <a:pPr indent="0" marL="0">
+                        <a:buNone/>
+                      </a:pPr>
+                      <a:r>
+                        <a:rPr lang="en-US" sz="1100" b="1" dirty="0">
+                          <a:solidFill>
+                            <a:srgbClr val="FFFFFF"/>
+                          </a:solidFill>
+                        </a:rPr>
+                        <a:t>Reason (from quality_log)</a:t>
+                      </a:r>
+                      <a:endParaRPr lang="en-US" sz="1100" dirty="0"/>
+                    </a:p>
+                  </a:txBody>
+                  <a:tcPr marL="73152" marR="73152" marT="36576" marB="36576" anchor="ctr">
+                    <a:lnL w="9525" cap="flat" cmpd="sng" algn="ctr">
+                      <a:solidFill>
+                        <a:srgbClr val="D0D5DD"/>
+                      </a:solidFill>
+                      <a:prstDash val="solid"/>
+                      <a:round/>
+                      <a:headEnd type="none" w="med" len="med"/>
+                      <a:tailEnd type="none" w="med" len="med"/>
+                    </a:lnL>
+                    <a:lnR w="9525" cap="flat" cmpd="sng" algn="ctr">
+                      <a:solidFill>
+                        <a:srgbClr val="D0D5DD"/>
+                      </a:solidFill>
+                      <a:prstDash val="solid"/>
+                      <a:round/>
+                      <a:headEnd type="none" w="med" len="med"/>
+                      <a:tailEnd type="none" w="med" len="med"/>
+                    </a:lnR>
+                    <a:lnT w="9525" cap="flat" cmpd="sng" algn="ctr">
+                      <a:solidFill>
+                        <a:srgbClr val="D0D5DD"/>
+                      </a:solidFill>
+                      <a:prstDash val="solid"/>
+                      <a:round/>
+                      <a:headEnd type="none" w="med" len="med"/>
+                      <a:tailEnd type="none" w="med" len="med"/>
+                    </a:lnT>
+                    <a:lnB w="9525" cap="flat" cmpd="sng" algn="ctr">
+                      <a:solidFill>
+                        <a:srgbClr val="D0D5DD"/>
+                      </a:solidFill>
+                      <a:prstDash val="solid"/>
+                      <a:round/>
+                      <a:headEnd type="none" w="med" len="med"/>
+                      <a:tailEnd type="none" w="med" len="med"/>
+                    </a:lnB>
+                    <a:solidFill>
+                      <a:srgbClr val="0B5D2A"/>
+                    </a:solidFill>
+                  </a:tcPr>
+                </a:tc>
+              </a:tr>
+              <a:tr h="502920">
+                <a:tc>
+                  <a:txBody>
+                    <a:bodyPr/>
+                    <a:lstStyle/>
+                    <a:p>
+                      <a:pPr indent="0" marL="0">
+                        <a:buNone/>
+                      </a:pPr>
+                      <a:r>
+                        <a:rPr lang="en-US" sz="1100" b="1" dirty="0">
+                          <a:solidFill>
+                            <a:srgbClr val="0B5D2A"/>
+                          </a:solidFill>
+                        </a:rPr>
+                        <a:t>spi_price_collected</a:t>
+                      </a:r>
+                      <a:endParaRPr lang="en-US" sz="1100" dirty="0"/>
+                    </a:p>
+                  </a:txBody>
+                  <a:tcPr marL="73152" marR="73152" marT="36576" marB="36576" anchor="ctr">
+                    <a:lnL w="9525" cap="flat" cmpd="sng" algn="ctr">
+                      <a:solidFill>
+                        <a:srgbClr val="D0D5DD"/>
+                      </a:solidFill>
+                      <a:prstDash val="solid"/>
+                      <a:round/>
+                      <a:headEnd type="none" w="med" len="med"/>
+                      <a:tailEnd type="none" w="med" len="med"/>
+                    </a:lnL>
+                    <a:lnR w="9525" cap="flat" cmpd="sng" algn="ctr">
+                      <a:solidFill>
+                        <a:srgbClr val="D0D5DD"/>
+                      </a:solidFill>
+                      <a:prstDash val="solid"/>
+                      <a:round/>
+                      <a:headEnd type="none" w="med" len="med"/>
+                      <a:tailEnd type="none" w="med" len="med"/>
+                    </a:lnR>
+                    <a:lnT w="9525" cap="flat" cmpd="sng" algn="ctr">
+                      <a:solidFill>
+                        <a:srgbClr val="D0D5DD"/>
+                      </a:solidFill>
+                      <a:prstDash val="solid"/>
+                      <a:round/>
+                      <a:headEnd type="none" w="med" len="med"/>
+                      <a:tailEnd type="none" w="med" len="med"/>
+                    </a:lnT>
+                    <a:lnB w="9525" cap="flat" cmpd="sng" algn="ctr">
+                      <a:solidFill>
+                        <a:srgbClr val="D0D5DD"/>
+                      </a:solidFill>
+                      <a:prstDash val="solid"/>
+                      <a:round/>
+                      <a:headEnd type="none" w="med" len="med"/>
+                      <a:tailEnd type="none" w="med" len="med"/>
+                    </a:lnB>
+                  </a:tcPr>
+                </a:tc>
+                <a:tc>
+                  <a:txBody>
+                    <a:bodyPr/>
+                    <a:lstStyle/>
+                    <a:p>
+                      <a:pPr indent="0" marL="0">
+                        <a:buNone/>
+                      </a:pPr>
+                      <a:r>
+                        <a:rPr lang="en-US" sz="1100" dirty="0">
+                          <a:solidFill>
+                            <a:srgbClr val="1F2933"/>
+                          </a:solidFill>
+                        </a:rPr>
+                        <a:t>FLAG</a:t>
+                      </a:r>
+                      <a:endParaRPr lang="en-US" sz="1100" dirty="0"/>
+                    </a:p>
+                  </a:txBody>
+                  <a:tcPr marL="73152" marR="73152" marT="36576" marB="36576" anchor="ctr">
+                    <a:lnL w="9525" cap="flat" cmpd="sng" algn="ctr">
+                      <a:solidFill>
+                        <a:srgbClr val="D0D5DD"/>
+                      </a:solidFill>
+                      <a:prstDash val="solid"/>
+                      <a:round/>
+                      <a:headEnd type="none" w="med" len="med"/>
+                      <a:tailEnd type="none" w="med" len="med"/>
+                    </a:lnL>
+                    <a:lnR w="9525" cap="flat" cmpd="sng" algn="ctr">
+                      <a:solidFill>
+                        <a:srgbClr val="D0D5DD"/>
+                      </a:solidFill>
+                      <a:prstDash val="solid"/>
+                      <a:round/>
+                      <a:headEnd type="none" w="med" len="med"/>
+                      <a:tailEnd type="none" w="med" len="med"/>
+                    </a:lnR>
+                    <a:lnT w="9525" cap="flat" cmpd="sng" algn="ctr">
+                      <a:solidFill>
+                        <a:srgbClr val="D0D5DD"/>
+                      </a:solidFill>
+                      <a:prstDash val="solid"/>
+                      <a:round/>
+                      <a:headEnd type="none" w="med" len="med"/>
+                      <a:tailEnd type="none" w="med" len="med"/>
+                    </a:lnT>
+                    <a:lnB w="9525" cap="flat" cmpd="sng" algn="ctr">
+                      <a:solidFill>
+                        <a:srgbClr val="D0D5DD"/>
+                      </a:solidFill>
+                      <a:prstDash val="solid"/>
+                      <a:round/>
+                      <a:headEnd type="none" w="med" len="med"/>
+                      <a:tailEnd type="none" w="med" len="med"/>
+                    </a:lnB>
+                  </a:tcPr>
+                </a:tc>
+                <a:tc>
+                  <a:txBody>
+                    <a:bodyPr/>
+                    <a:lstStyle/>
+                    <a:p>
+                      <a:pPr indent="0" marL="0">
+                        <a:buNone/>
+                      </a:pPr>
+                      <a:r>
+                        <a:rPr lang="en-US" sz="1100" dirty="0">
+                          <a:solidFill>
+                            <a:srgbClr val="1F2933"/>
+                          </a:solidFill>
+                        </a:rPr>
+                        <a:t>1,279</a:t>
+                      </a:r>
+                      <a:endParaRPr lang="en-US" sz="1100" dirty="0"/>
+                    </a:p>
+                  </a:txBody>
+                  <a:tcPr marL="73152" marR="73152" marT="36576" marB="36576" anchor="ctr">
+                    <a:lnL w="9525" cap="flat" cmpd="sng" algn="ctr">
+                      <a:solidFill>
+                        <a:srgbClr val="D0D5DD"/>
+                      </a:solidFill>
+                      <a:prstDash val="solid"/>
+                      <a:round/>
+                      <a:headEnd type="none" w="med" len="med"/>
+                      <a:tailEnd type="none" w="med" len="med"/>
+                    </a:lnL>
+                    <a:lnR w="9525" cap="flat" cmpd="sng" algn="ctr">
+                      <a:solidFill>
+                        <a:srgbClr val="D0D5DD"/>
+                      </a:solidFill>
+                      <a:prstDash val="solid"/>
+                      <a:round/>
+                      <a:headEnd type="none" w="med" len="med"/>
+                      <a:tailEnd type="none" w="med" len="med"/>
+                    </a:lnR>
+                    <a:lnT w="9525" cap="flat" cmpd="sng" algn="ctr">
+                      <a:solidFill>
+                        <a:srgbClr val="D0D5DD"/>
+                      </a:solidFill>
+                      <a:prstDash val="solid"/>
+                      <a:round/>
+                      <a:headEnd type="none" w="med" len="med"/>
+                      <a:tailEnd type="none" w="med" len="med"/>
+                    </a:lnT>
+                    <a:lnB w="9525" cap="flat" cmpd="sng" algn="ctr">
+                      <a:solidFill>
+                        <a:srgbClr val="D0D5DD"/>
+                      </a:solidFill>
+                      <a:prstDash val="solid"/>
+                      <a:round/>
+                      <a:headEnd type="none" w="med" len="med"/>
+                      <a:tailEnd type="none" w="med" len="med"/>
+                    </a:lnB>
+                  </a:tcPr>
+                </a:tc>
+                <a:tc>
+                  <a:txBody>
+                    <a:bodyPr/>
+                    <a:lstStyle/>
+                    <a:p>
+                      <a:pPr indent="0" marL="0">
+                        <a:buNone/>
+                      </a:pPr>
+                      <a:r>
+                        <a:rPr lang="en-US" sz="1100" dirty="0">
+                          <a:solidFill>
+                            <a:srgbClr val="1F2933"/>
+                          </a:solidFill>
+                        </a:rPr>
+                        <a:t>PBS published 0 or nothing: kept NULL, never filled</a:t>
+                      </a:r>
+                      <a:endParaRPr lang="en-US" sz="1100" dirty="0"/>
+                    </a:p>
+                  </a:txBody>
+                  <a:tcPr marL="73152" marR="73152" marT="36576" marB="36576" anchor="ctr">
+                    <a:lnL w="9525" cap="flat" cmpd="sng" algn="ctr">
+                      <a:solidFill>
+                        <a:srgbClr val="D0D5DD"/>
+                      </a:solidFill>
+                      <a:prstDash val="solid"/>
+                      <a:round/>
+                      <a:headEnd type="none" w="med" len="med"/>
+                      <a:tailEnd type="none" w="med" len="med"/>
+                    </a:lnL>
+                    <a:lnR w="9525" cap="flat" cmpd="sng" algn="ctr">
+                      <a:solidFill>
+                        <a:srgbClr val="D0D5DD"/>
+                      </a:solidFill>
+                      <a:prstDash val="solid"/>
+                      <a:round/>
+                      <a:headEnd type="none" w="med" len="med"/>
+                      <a:tailEnd type="none" w="med" len="med"/>
+                    </a:lnR>
+                    <a:lnT w="9525" cap="flat" cmpd="sng" algn="ctr">
+                      <a:solidFill>
+                        <a:srgbClr val="D0D5DD"/>
+                      </a:solidFill>
+                      <a:prstDash val="solid"/>
+                      <a:round/>
+                      <a:headEnd type="none" w="med" len="med"/>
+                      <a:tailEnd type="none" w="med" len="med"/>
+                    </a:lnT>
+                    <a:lnB w="9525" cap="flat" cmpd="sng" algn="ctr">
+                      <a:solidFill>
+                        <a:srgbClr val="D0D5DD"/>
+                      </a:solidFill>
+                      <a:prstDash val="solid"/>
+                      <a:round/>
+                      <a:headEnd type="none" w="med" len="med"/>
+                      <a:tailEnd type="none" w="med" len="med"/>
+                    </a:lnB>
+                  </a:tcPr>
+                </a:tc>
+              </a:tr>
+              <a:tr h="502920">
+                <a:tc>
+                  <a:txBody>
+                    <a:bodyPr/>
+                    <a:lstStyle/>
+                    <a:p>
+                      <a:pPr indent="0" marL="0">
+                        <a:buNone/>
+                      </a:pPr>
+                      <a:r>
+                        <a:rPr lang="en-US" sz="1100" b="1" dirty="0">
+                          <a:solidFill>
+                            <a:srgbClr val="0B5D2A"/>
+                          </a:solidFill>
+                        </a:rPr>
+                        <a:t>spi_min_le_avg_le_max</a:t>
+                      </a:r>
+                      <a:endParaRPr lang="en-US" sz="1100" dirty="0"/>
+                    </a:p>
+                  </a:txBody>
+                  <a:tcPr marL="73152" marR="73152" marT="36576" marB="36576" anchor="ctr">
+                    <a:lnL w="9525" cap="flat" cmpd="sng" algn="ctr">
+                      <a:solidFill>
+                        <a:srgbClr val="D0D5DD"/>
+                      </a:solidFill>
+                      <a:prstDash val="solid"/>
+                      <a:round/>
+                      <a:headEnd type="none" w="med" len="med"/>
+                      <a:tailEnd type="none" w="med" len="med"/>
+                    </a:lnL>
+                    <a:lnR w="9525" cap="flat" cmpd="sng" algn="ctr">
+                      <a:solidFill>
+                        <a:srgbClr val="D0D5DD"/>
+                      </a:solidFill>
+                      <a:prstDash val="solid"/>
+                      <a:round/>
+                      <a:headEnd type="none" w="med" len="med"/>
+                      <a:tailEnd type="none" w="med" len="med"/>
+                    </a:lnR>
+                    <a:lnT w="9525" cap="flat" cmpd="sng" algn="ctr">
+                      <a:solidFill>
+                        <a:srgbClr val="D0D5DD"/>
+                      </a:solidFill>
+                      <a:prstDash val="solid"/>
+                      <a:round/>
+                      <a:headEnd type="none" w="med" len="med"/>
+                      <a:tailEnd type="none" w="med" len="med"/>
+                    </a:lnT>
+                    <a:lnB w="9525" cap="flat" cmpd="sng" algn="ctr">
+                      <a:solidFill>
+                        <a:srgbClr val="D0D5DD"/>
+                      </a:solidFill>
+                      <a:prstDash val="solid"/>
+                      <a:round/>
+                      <a:headEnd type="none" w="med" len="med"/>
+                      <a:tailEnd type="none" w="med" len="med"/>
+                    </a:lnB>
+                  </a:tcPr>
+                </a:tc>
+                <a:tc>
+                  <a:txBody>
+                    <a:bodyPr/>
+                    <a:lstStyle/>
+                    <a:p>
+                      <a:pPr indent="0" marL="0">
+                        <a:buNone/>
+                      </a:pPr>
+                      <a:r>
+                        <a:rPr lang="en-US" sz="1100" dirty="0">
+                          <a:solidFill>
+                            <a:srgbClr val="1F2933"/>
+                          </a:solidFill>
+                        </a:rPr>
+                        <a:t>FLAG</a:t>
+                      </a:r>
+                      <a:endParaRPr lang="en-US" sz="1100" dirty="0"/>
+                    </a:p>
+                  </a:txBody>
+                  <a:tcPr marL="73152" marR="73152" marT="36576" marB="36576" anchor="ctr">
+                    <a:lnL w="9525" cap="flat" cmpd="sng" algn="ctr">
+                      <a:solidFill>
+                        <a:srgbClr val="D0D5DD"/>
+                      </a:solidFill>
+                      <a:prstDash val="solid"/>
+                      <a:round/>
+                      <a:headEnd type="none" w="med" len="med"/>
+                      <a:tailEnd type="none" w="med" len="med"/>
+                    </a:lnL>
+                    <a:lnR w="9525" cap="flat" cmpd="sng" algn="ctr">
+                      <a:solidFill>
+                        <a:srgbClr val="D0D5DD"/>
+                      </a:solidFill>
+                      <a:prstDash val="solid"/>
+                      <a:round/>
+                      <a:headEnd type="none" w="med" len="med"/>
+                      <a:tailEnd type="none" w="med" len="med"/>
+                    </a:lnR>
+                    <a:lnT w="9525" cap="flat" cmpd="sng" algn="ctr">
+                      <a:solidFill>
+                        <a:srgbClr val="D0D5DD"/>
+                      </a:solidFill>
+                      <a:prstDash val="solid"/>
+                      <a:round/>
+                      <a:headEnd type="none" w="med" len="med"/>
+                      <a:tailEnd type="none" w="med" len="med"/>
+                    </a:lnT>
+                    <a:lnB w="9525" cap="flat" cmpd="sng" algn="ctr">
+                      <a:solidFill>
+                        <a:srgbClr val="D0D5DD"/>
+                      </a:solidFill>
+                      <a:prstDash val="solid"/>
+                      <a:round/>
+                      <a:headEnd type="none" w="med" len="med"/>
+                      <a:tailEnd type="none" w="med" len="med"/>
+                    </a:lnB>
+                  </a:tcPr>
+                </a:tc>
+                <a:tc>
+                  <a:txBody>
+                    <a:bodyPr/>
+                    <a:lstStyle/>
+                    <a:p>
+                      <a:pPr indent="0" marL="0">
+                        <a:buNone/>
+                      </a:pPr>
+                      <a:r>
+                        <a:rPr lang="en-US" sz="1100" dirty="0">
+                          <a:solidFill>
+                            <a:srgbClr val="1F2933"/>
+                          </a:solidFill>
+                        </a:rPr>
+                        <a:t>822</a:t>
+                      </a:r>
+                      <a:endParaRPr lang="en-US" sz="1100" dirty="0"/>
+                    </a:p>
+                  </a:txBody>
+                  <a:tcPr marL="73152" marR="73152" marT="36576" marB="36576" anchor="ctr">
+                    <a:lnL w="9525" cap="flat" cmpd="sng" algn="ctr">
+                      <a:solidFill>
+                        <a:srgbClr val="D0D5DD"/>
+                      </a:solidFill>
+                      <a:prstDash val="solid"/>
+                      <a:round/>
+                      <a:headEnd type="none" w="med" len="med"/>
+                      <a:tailEnd type="none" w="med" len="med"/>
+                    </a:lnL>
+                    <a:lnR w="9525" cap="flat" cmpd="sng" algn="ctr">
+                      <a:solidFill>
+                        <a:srgbClr val="D0D5DD"/>
+                      </a:solidFill>
+                      <a:prstDash val="solid"/>
+                      <a:round/>
+                      <a:headEnd type="none" w="med" len="med"/>
+                      <a:tailEnd type="none" w="med" len="med"/>
+                    </a:lnR>
+                    <a:lnT w="9525" cap="flat" cmpd="sng" algn="ctr">
+                      <a:solidFill>
+                        <a:srgbClr val="D0D5DD"/>
+                      </a:solidFill>
+                      <a:prstDash val="solid"/>
+                      <a:round/>
+                      <a:headEnd type="none" w="med" len="med"/>
+                      <a:tailEnd type="none" w="med" len="med"/>
+                    </a:lnT>
+                    <a:lnB w="9525" cap="flat" cmpd="sng" algn="ctr">
+                      <a:solidFill>
+                        <a:srgbClr val="D0D5DD"/>
+                      </a:solidFill>
+                      <a:prstDash val="solid"/>
+                      <a:round/>
+                      <a:headEnd type="none" w="med" len="med"/>
+                      <a:tailEnd type="none" w="med" len="med"/>
+                    </a:lnB>
+                  </a:tcPr>
+                </a:tc>
+                <a:tc>
+                  <a:txBody>
+                    <a:bodyPr/>
+                    <a:lstStyle/>
+                    <a:p>
+                      <a:pPr indent="0" marL="0">
+                        <a:buNone/>
+                      </a:pPr>
+                      <a:r>
+                        <a:rPr lang="en-US" sz="1100" dirty="0">
+                          <a:solidFill>
+                            <a:srgbClr val="1F2933"/>
+                          </a:solidFill>
+                        </a:rPr>
+                        <a:t>min / avg / max out of order as published: kept as printed</a:t>
+                      </a:r>
+                      <a:endParaRPr lang="en-US" sz="1100" dirty="0"/>
+                    </a:p>
+                  </a:txBody>
+                  <a:tcPr marL="73152" marR="73152" marT="36576" marB="36576" anchor="ctr">
+                    <a:lnL w="9525" cap="flat" cmpd="sng" algn="ctr">
+                      <a:solidFill>
+                        <a:srgbClr val="D0D5DD"/>
+                      </a:solidFill>
+                      <a:prstDash val="solid"/>
+                      <a:round/>
+                      <a:headEnd type="none" w="med" len="med"/>
+                      <a:tailEnd type="none" w="med" len="med"/>
+                    </a:lnL>
+                    <a:lnR w="9525" cap="flat" cmpd="sng" algn="ctr">
+                      <a:solidFill>
+                        <a:srgbClr val="D0D5DD"/>
+                      </a:solidFill>
+                      <a:prstDash val="solid"/>
+                      <a:round/>
+                      <a:headEnd type="none" w="med" len="med"/>
+                      <a:tailEnd type="none" w="med" len="med"/>
+                    </a:lnR>
+                    <a:lnT w="9525" cap="flat" cmpd="sng" algn="ctr">
+                      <a:solidFill>
+                        <a:srgbClr val="D0D5DD"/>
+                      </a:solidFill>
+                      <a:prstDash val="solid"/>
+                      <a:round/>
+                      <a:headEnd type="none" w="med" len="med"/>
+                      <a:tailEnd type="none" w="med" len="med"/>
+                    </a:lnT>
+                    <a:lnB w="9525" cap="flat" cmpd="sng" algn="ctr">
+                      <a:solidFill>
+                        <a:srgbClr val="D0D5DD"/>
+                      </a:solidFill>
+                      <a:prstDash val="solid"/>
+                      <a:round/>
+                      <a:headEnd type="none" w="med" len="med"/>
+                      <a:tailEnd type="none" w="med" len="med"/>
+                    </a:lnB>
+                  </a:tcPr>
+                </a:tc>
+              </a:tr>
+              <a:tr h="502920">
+                <a:tc>
+                  <a:txBody>
+                    <a:bodyPr/>
+                    <a:lstStyle/>
+                    <a:p>
+                      <a:pPr indent="0" marL="0">
+                        <a:buNone/>
+                      </a:pPr>
+                      <a:r>
+                        <a:rPr lang="en-US" sz="1100" b="1" dirty="0">
+                          <a:solidFill>
+                            <a:srgbClr val="0B5D2A"/>
+                          </a:solidFill>
+                        </a:rPr>
+                        <a:t>spi_weekly_jump</a:t>
+                      </a:r>
+                      <a:endParaRPr lang="en-US" sz="1100" dirty="0"/>
+                    </a:p>
+                  </a:txBody>
+                  <a:tcPr marL="73152" marR="73152" marT="36576" marB="36576" anchor="ctr">
+                    <a:lnL w="9525" cap="flat" cmpd="sng" algn="ctr">
+                      <a:solidFill>
+                        <a:srgbClr val="D0D5DD"/>
+                      </a:solidFill>
+                      <a:prstDash val="solid"/>
+                      <a:round/>
+                      <a:headEnd type="none" w="med" len="med"/>
+                      <a:tailEnd type="none" w="med" len="med"/>
+                    </a:lnL>
+                    <a:lnR w="9525" cap="flat" cmpd="sng" algn="ctr">
+                      <a:solidFill>
+                        <a:srgbClr val="D0D5DD"/>
+                      </a:solidFill>
+                      <a:prstDash val="solid"/>
+                      <a:round/>
+                      <a:headEnd type="none" w="med" len="med"/>
+                      <a:tailEnd type="none" w="med" len="med"/>
+                    </a:lnR>
+                    <a:lnT w="9525" cap="flat" cmpd="sng" algn="ctr">
+                      <a:solidFill>
+                        <a:srgbClr val="D0D5DD"/>
+                      </a:solidFill>
+                      <a:prstDash val="solid"/>
+                      <a:round/>
+                      <a:headEnd type="none" w="med" len="med"/>
+                      <a:tailEnd type="none" w="med" len="med"/>
+                    </a:lnT>
+                    <a:lnB w="9525" cap="flat" cmpd="sng" algn="ctr">
+                      <a:solidFill>
+                        <a:srgbClr val="D0D5DD"/>
+                      </a:solidFill>
+                      <a:prstDash val="solid"/>
+                      <a:round/>
+                      <a:headEnd type="none" w="med" len="med"/>
+                      <a:tailEnd type="none" w="med" len="med"/>
+                    </a:lnB>
+                  </a:tcPr>
+                </a:tc>
+                <a:tc>
+                  <a:txBody>
+                    <a:bodyPr/>
+                    <a:lstStyle/>
+                    <a:p>
+                      <a:pPr indent="0" marL="0">
+                        <a:buNone/>
+                      </a:pPr>
+                      <a:r>
+                        <a:rPr lang="en-US" sz="1100" dirty="0">
+                          <a:solidFill>
+                            <a:srgbClr val="1F2933"/>
+                          </a:solidFill>
+                        </a:rPr>
+                        <a:t>FLAG</a:t>
+                      </a:r>
+                      <a:endParaRPr lang="en-US" sz="1100" dirty="0"/>
+                    </a:p>
+                  </a:txBody>
+                  <a:tcPr marL="73152" marR="73152" marT="36576" marB="36576" anchor="ctr">
+                    <a:lnL w="9525" cap="flat" cmpd="sng" algn="ctr">
+                      <a:solidFill>
+                        <a:srgbClr val="D0D5DD"/>
+                      </a:solidFill>
+                      <a:prstDash val="solid"/>
+                      <a:round/>
+                      <a:headEnd type="none" w="med" len="med"/>
+                      <a:tailEnd type="none" w="med" len="med"/>
+                    </a:lnL>
+                    <a:lnR w="9525" cap="flat" cmpd="sng" algn="ctr">
+                      <a:solidFill>
+                        <a:srgbClr val="D0D5DD"/>
+                      </a:solidFill>
+                      <a:prstDash val="solid"/>
+                      <a:round/>
+                      <a:headEnd type="none" w="med" len="med"/>
+                      <a:tailEnd type="none" w="med" len="med"/>
+                    </a:lnR>
+                    <a:lnT w="9525" cap="flat" cmpd="sng" algn="ctr">
+                      <a:solidFill>
+                        <a:srgbClr val="D0D5DD"/>
+                      </a:solidFill>
+                      <a:prstDash val="solid"/>
+                      <a:round/>
+                      <a:headEnd type="none" w="med" len="med"/>
+                      <a:tailEnd type="none" w="med" len="med"/>
+                    </a:lnT>
+                    <a:lnB w="9525" cap="flat" cmpd="sng" algn="ctr">
+                      <a:solidFill>
+                        <a:srgbClr val="D0D5DD"/>
+                      </a:solidFill>
+                      <a:prstDash val="solid"/>
+                      <a:round/>
+                      <a:headEnd type="none" w="med" len="med"/>
+                      <a:tailEnd type="none" w="med" len="med"/>
+                    </a:lnB>
+                  </a:tcPr>
+                </a:tc>
+                <a:tc>
+                  <a:txBody>
+                    <a:bodyPr/>
+                    <a:lstStyle/>
+                    <a:p>
+                      <a:pPr indent="0" marL="0">
+                        <a:buNone/>
+                      </a:pPr>
+                      <a:r>
+                        <a:rPr lang="en-US" sz="1100" dirty="0">
+                          <a:solidFill>
+                            <a:srgbClr val="1F2933"/>
+                          </a:solidFill>
+                        </a:rPr>
+                        <a:t>399</a:t>
+                      </a:r>
+                      <a:endParaRPr lang="en-US" sz="1100" dirty="0"/>
+                    </a:p>
+                  </a:txBody>
+                  <a:tcPr marL="73152" marR="73152" marT="36576" marB="36576" anchor="ctr">
+                    <a:lnL w="9525" cap="flat" cmpd="sng" algn="ctr">
+                      <a:solidFill>
+                        <a:srgbClr val="D0D5DD"/>
+                      </a:solidFill>
+                      <a:prstDash val="solid"/>
+                      <a:round/>
+                      <a:headEnd type="none" w="med" len="med"/>
+                      <a:tailEnd type="none" w="med" len="med"/>
+                    </a:lnL>
+                    <a:lnR w="9525" cap="flat" cmpd="sng" algn="ctr">
+                      <a:solidFill>
+                        <a:srgbClr val="D0D5DD"/>
+                      </a:solidFill>
+                      <a:prstDash val="solid"/>
+                      <a:round/>
+                      <a:headEnd type="none" w="med" len="med"/>
+                      <a:tailEnd type="none" w="med" len="med"/>
+                    </a:lnR>
+                    <a:lnT w="9525" cap="flat" cmpd="sng" algn="ctr">
+                      <a:solidFill>
+                        <a:srgbClr val="D0D5DD"/>
+                      </a:solidFill>
+                      <a:prstDash val="solid"/>
+                      <a:round/>
+                      <a:headEnd type="none" w="med" len="med"/>
+                      <a:tailEnd type="none" w="med" len="med"/>
+                    </a:lnT>
+                    <a:lnB w="9525" cap="flat" cmpd="sng" algn="ctr">
+                      <a:solidFill>
+                        <a:srgbClr val="D0D5DD"/>
+                      </a:solidFill>
+                      <a:prstDash val="solid"/>
+                      <a:round/>
+                      <a:headEnd type="none" w="med" len="med"/>
+                      <a:tailEnd type="none" w="med" len="med"/>
+                    </a:lnB>
+                  </a:tcPr>
+                </a:tc>
+                <a:tc>
+                  <a:txBody>
+                    <a:bodyPr/>
+                    <a:lstStyle/>
+                    <a:p>
+                      <a:pPr indent="0" marL="0">
+                        <a:buNone/>
+                      </a:pPr>
+                      <a:r>
+                        <a:rPr lang="en-US" sz="1100" dirty="0">
+                          <a:solidFill>
+                            <a:srgbClr val="1F2933"/>
+                          </a:solidFill>
+                        </a:rPr>
+                        <a:t>moved &gt;50% in a week: possible typo, not corrected</a:t>
+                      </a:r>
+                      <a:endParaRPr lang="en-US" sz="1100" dirty="0"/>
+                    </a:p>
+                  </a:txBody>
+                  <a:tcPr marL="73152" marR="73152" marT="36576" marB="36576" anchor="ctr">
+                    <a:lnL w="9525" cap="flat" cmpd="sng" algn="ctr">
+                      <a:solidFill>
+                        <a:srgbClr val="D0D5DD"/>
+                      </a:solidFill>
+                      <a:prstDash val="solid"/>
+                      <a:round/>
+                      <a:headEnd type="none" w="med" len="med"/>
+                      <a:tailEnd type="none" w="med" len="med"/>
+                    </a:lnL>
+                    <a:lnR w="9525" cap="flat" cmpd="sng" algn="ctr">
+                      <a:solidFill>
+                        <a:srgbClr val="D0D5DD"/>
+                      </a:solidFill>
+                      <a:prstDash val="solid"/>
+                      <a:round/>
+                      <a:headEnd type="none" w="med" len="med"/>
+                      <a:tailEnd type="none" w="med" len="med"/>
+                    </a:lnR>
+                    <a:lnT w="9525" cap="flat" cmpd="sng" algn="ctr">
+                      <a:solidFill>
+                        <a:srgbClr val="D0D5DD"/>
+                      </a:solidFill>
+                      <a:prstDash val="solid"/>
+                      <a:round/>
+                      <a:headEnd type="none" w="med" len="med"/>
+                      <a:tailEnd type="none" w="med" len="med"/>
+                    </a:lnT>
+                    <a:lnB w="9525" cap="flat" cmpd="sng" algn="ctr">
+                      <a:solidFill>
+                        <a:srgbClr val="D0D5DD"/>
+                      </a:solidFill>
+                      <a:prstDash val="solid"/>
+                      <a:round/>
+                      <a:headEnd type="none" w="med" len="med"/>
+                      <a:tailEnd type="none" w="med" len="med"/>
+                    </a:lnB>
+                  </a:tcPr>
+                </a:tc>
+              </a:tr>
+            </a:tbl>
+          </a:graphicData>
+        </a:graphic>
+      </p:graphicFrame>
+      <p:sp>
+        <p:nvSpPr>
+          <p:cNvPr id="5" name="Text 2"/>
+          <p:cNvSpPr txBox="1"/>
+          <p:nvPr/>
+        </p:nvSpPr>
+        <p:spPr>
+          <a:xfrm>
+            <a:off x="457200" y="3200400"/>
+            <a:ext cx="5120640" cy="457200"/>
+          </a:xfrm>
+          <a:prstGeom prst="rect">
+            <a:avLst/>
+          </a:prstGeom>
+          <a:noFill/>
+          <a:ln/>
+        </p:spPr>
+        <p:txBody>
+          <a:bodyPr wrap="square" lIns="0" tIns="0" rIns="0" bIns="0" rtlCol="0" anchor="t"/>
+          <a:lstStyle/>
+          <a:p>
+            <a:pPr indent="0" marL="0">
+              <a:buNone/>
+            </a:pPr>
+            <a:r>
+              <a:rPr lang="en-US" sz="1200" dirty="0">
+                <a:solidFill>
+                  <a:schemeClr val="tx1"/>
+                </a:solidFill>
+              </a:rPr>
+              <a:t>Every decision is stored with a timestamp and replayed on each rebuild; we flag rather than invent prices.</a:t>
+            </a:r>
+            <a:endParaRPr lang="en-US" sz="1200" dirty="0"/>
+          </a:p>
+        </p:txBody>
+      </p:sp>
+      <p:sp>
+        <p:nvSpPr>
+          <p:cNvPr id="6" name="Text 3"/>
+          <p:cNvSpPr txBox="1"/>
+          <p:nvPr/>
+        </p:nvSpPr>
+        <p:spPr>
+          <a:xfrm>
+            <a:off x="457200" y="3749040"/>
+            <a:ext cx="5120640" cy="685800"/>
+          </a:xfrm>
+          <a:prstGeom prst="rect">
+            <a:avLst/>
+          </a:prstGeom>
+          <a:noFill/>
+          <a:ln/>
+        </p:spPr>
+        <p:txBody>
+          <a:bodyPr wrap="square" lIns="0" tIns="0" rIns="0" bIns="0" rtlCol="0" anchor="t"/>
+          <a:lstStyle/>
+          <a:p>
+            <a:pPr indent="0" marL="0">
+              <a:buNone/>
+            </a:pPr>
+            <a:r>
+              <a:rPr lang="en-US" sz="1200" b="1" dirty="0">
+                <a:solidFill>
                   <a:schemeClr val="tx2"/>
                 </a:solidFill>
               </a:rPr>
-              <a:t>Page 1 – Situation Room: risk vs each district's normal</a:t>
+              <a:t>Insight Agent · retrieves NDMA sections (FAISS, multilingual) and gold-table rows; says “I don't know” below threshold.</a:t>
             </a:r>
             <a:endParaRPr lang="en-US" sz="1200" dirty="0"/>
           </a:p>
         </p:txBody>
       </p:sp>
-      <p:pic>
-        <p:nvPicPr>
-          <p:cNvPr id="4" name="Page 1 – Situation Room: risk vs each district's normal" descr="Page 1 – Situation Room: risk vs each district's normal">    </p:cNvPr>
-          <p:cNvPicPr>
-            <a:picLocks noChangeAspect="1"/>
-          </p:cNvPicPr>
-          <p:nvPr/>
-        </p:nvPicPr>
-        <p:blipFill>
-          <a:blip r:embed="rId1"/>
-          <a:stretch>
-            <a:fillRect/>
-          </a:stretch>
-        </p:blipFill>
-        <p:spPr>
-          <a:xfrm>
-            <a:off x="457200" y="1188720"/>
-            <a:ext cx="5212080" cy="2931795"/>
-          </a:xfrm>
-          <a:prstGeom prst="rect">
-            <a:avLst/>
-          </a:prstGeom>
-        </p:spPr>
-      </p:pic>
-      <p:sp>
-        <p:nvSpPr>
-          <p:cNvPr id="5" name="Page 1 – Situation Room: risk vs each district's normal frame"/>
+      <p:sp>
+        <p:nvSpPr>
+          <p:cNvPr id="7" name="prefect"/>
           <p:cNvSpPr/>
           <p:nvPr/>
         </p:nvSpPr>
         <p:spPr>
           <a:xfrm>
-            <a:off x="457200" y="1188720"/>
-            <a:ext cx="5212080" cy="2931795"/>
-          </a:xfrm>
-          <a:prstGeom prst="rect">
-            <a:avLst/>
-          </a:prstGeom>
-          <a:ln w="9525">
+            <a:off x="5852160" y="914400"/>
+            <a:ext cx="2834640" cy="3566160"/>
+          </a:xfrm>
+          <a:prstGeom prst="roundRect">
+            <a:avLst>
+              <a:gd name="adj" fmla="val 2581"/>
+            </a:avLst>
+          </a:prstGeom>
+          <a:solidFill>
+            <a:schemeClr val="bg2"/>
+          </a:solidFill>
+          <a:ln w="12700">
             <a:solidFill>
-              <a:srgbClr val="D0D5DD"/>
+              <a:schemeClr val="bg2"/>
             </a:solidFill>
             <a:prstDash val="solid"/>
           </a:ln>
@@ -6423,14 +9812,14 @@
       </p:sp>
       <p:sp>
         <p:nvSpPr>
-          <p:cNvPr id="6" name="Text 3"/>
+          <p:cNvPr id="8" name="Text 5"/>
           <p:cNvSpPr txBox="1"/>
           <p:nvPr/>
         </p:nvSpPr>
         <p:spPr>
           <a:xfrm>
-            <a:off x="5943600" y="914400"/>
-            <a:ext cx="2377440" cy="228600"/>
+            <a:off x="6035040" y="1051560"/>
+            <a:ext cx="2560320" cy="274320"/>
           </a:xfrm>
           <a:prstGeom prst="rect">
             <a:avLst/>
@@ -6448,71 +9837,25 @@
             <a:r>
               <a:rPr lang="en-US" sz="1200" b="1" dirty="0">
                 <a:solidFill>
-                  <a:schemeClr val="tx2"/>
+                  <a:schemeClr val="accent2"/>
                 </a:solidFill>
               </a:rPr>
-              <a:t>Page 2 – Ask (Insight Agent)</a:t>
+              <a:t>HOURLY PREFECT FLOW</a:t>
             </a:r>
             <a:endParaRPr lang="en-US" sz="1200" dirty="0"/>
           </a:p>
         </p:txBody>
       </p:sp>
-      <p:pic>
-        <p:nvPicPr>
-          <p:cNvPr id="7" name="Page 2 – Ask (Insight Agent)" descr="Page 2 – Ask (Insight Agent)">    </p:cNvPr>
-          <p:cNvPicPr>
-            <a:picLocks noChangeAspect="1"/>
-          </p:cNvPicPr>
-          <p:nvPr/>
-        </p:nvPicPr>
-        <p:blipFill>
-          <a:blip r:embed="rId2"/>
-          <a:stretch>
-            <a:fillRect/>
-          </a:stretch>
-        </p:blipFill>
-        <p:spPr>
-          <a:xfrm>
-            <a:off x="5943600" y="1188720"/>
-            <a:ext cx="2377440" cy="1337310"/>
-          </a:xfrm>
-          <a:prstGeom prst="rect">
-            <a:avLst/>
-          </a:prstGeom>
-        </p:spPr>
-      </p:pic>
-      <p:sp>
-        <p:nvSpPr>
-          <p:cNvPr id="8" name="Page 2 – Ask (Insight Agent) frame"/>
-          <p:cNvSpPr/>
-          <p:nvPr/>
-        </p:nvSpPr>
-        <p:spPr>
-          <a:xfrm>
-            <a:off x="5943600" y="1188720"/>
-            <a:ext cx="2377440" cy="1337310"/>
-          </a:xfrm>
-          <a:prstGeom prst="rect">
-            <a:avLst/>
-          </a:prstGeom>
-          <a:ln w="9525">
-            <a:solidFill>
-              <a:srgbClr val="D0D5DD"/>
-            </a:solidFill>
-            <a:prstDash val="solid"/>
-          </a:ln>
-        </p:spPr>
-      </p:sp>
-      <p:sp>
-        <p:nvSpPr>
-          <p:cNvPr id="9" name="Text 5"/>
+      <p:sp>
+        <p:nvSpPr>
+          <p:cNvPr id="9" name="Text 6"/>
           <p:cNvSpPr txBox="1"/>
           <p:nvPr/>
         </p:nvSpPr>
         <p:spPr>
           <a:xfrm>
-            <a:off x="5943600" y="2651760"/>
-            <a:ext cx="2377440" cy="228600"/>
+            <a:off x="6035040" y="1325880"/>
+            <a:ext cx="2560320" cy="274320"/>
           </a:xfrm>
           <a:prstGeom prst="rect">
             <a:avLst/>
@@ -6528,73 +9871,27 @@
               <a:buNone/>
             </a:pPr>
             <a:r>
-              <a:rPr lang="en-US" sz="1200" b="1" dirty="0">
-                <a:solidFill>
-                  <a:schemeClr val="tx2"/>
+              <a:rPr lang="en-US" sz="1200" dirty="0">
+                <a:solidFill>
+                  <a:schemeClr val="accent6"/>
                 </a:solidFill>
               </a:rPr>
-              <a:t>Page 3 – Live data</a:t>
+              <a:t>cron  5 * * * *</a:t>
             </a:r>
             <a:endParaRPr lang="en-US" sz="1200" dirty="0"/>
           </a:p>
         </p:txBody>
       </p:sp>
-      <p:pic>
-        <p:nvPicPr>
-          <p:cNvPr id="10" name="Page 3 – Live data" descr="Page 3 – Live data">    </p:cNvPr>
-          <p:cNvPicPr>
-            <a:picLocks noChangeAspect="1"/>
-          </p:cNvPicPr>
-          <p:nvPr/>
-        </p:nvPicPr>
-        <p:blipFill>
-          <a:blip r:embed="rId3"/>
-          <a:stretch>
-            <a:fillRect/>
-          </a:stretch>
-        </p:blipFill>
-        <p:spPr>
-          <a:xfrm>
-            <a:off x="5943600" y="2926080"/>
-            <a:ext cx="2377440" cy="1337310"/>
-          </a:xfrm>
-          <a:prstGeom prst="rect">
-            <a:avLst/>
-          </a:prstGeom>
-        </p:spPr>
-      </p:pic>
-      <p:sp>
-        <p:nvSpPr>
-          <p:cNvPr id="11" name="Page 3 – Live data frame"/>
-          <p:cNvSpPr/>
-          <p:nvPr/>
-        </p:nvSpPr>
-        <p:spPr>
-          <a:xfrm>
-            <a:off x="5943600" y="2926080"/>
-            <a:ext cx="2377440" cy="1337310"/>
-          </a:xfrm>
-          <a:prstGeom prst="rect">
-            <a:avLst/>
-          </a:prstGeom>
-          <a:ln w="9525">
-            <a:solidFill>
-              <a:srgbClr val="D0D5DD"/>
-            </a:solidFill>
-            <a:prstDash val="solid"/>
-          </a:ln>
-        </p:spPr>
-      </p:sp>
-      <p:sp>
-        <p:nvSpPr>
-          <p:cNvPr id="12" name="Text 7"/>
+      <p:sp>
+        <p:nvSpPr>
+          <p:cNvPr id="10" name="Text 7"/>
           <p:cNvSpPr txBox="1"/>
           <p:nvPr/>
         </p:nvSpPr>
         <p:spPr>
           <a:xfrm>
-            <a:off x="457200" y="4370832"/>
-            <a:ext cx="8229600" cy="274320"/>
+            <a:off x="6035040" y="1691640"/>
+            <a:ext cx="731520" cy="548640"/>
           </a:xfrm>
           <a:prstGeom prst="rect">
             <a:avLst/>
@@ -6610,47 +9907,194 @@
               <a:buNone/>
             </a:pPr>
             <a:r>
-              <a:rPr lang="en-US" sz="1200" b="1" dirty="0">
-                <a:solidFill>
-                  <a:schemeClr val="tx1"/>
+              <a:rPr lang="en-US" sz="3000" b="1" dirty="0">
+                <a:solidFill>
+                  <a:schemeClr val="tx2"/>
                 </a:solidFill>
               </a:rPr>
-              <a:t>Live demo: </a:t>
-            </a:r>
+              <a:t>15</a:t>
+            </a:r>
+            <a:endParaRPr lang="en-US" sz="3000" dirty="0"/>
+          </a:p>
+        </p:txBody>
+      </p:sp>
+      <p:sp>
+        <p:nvSpPr>
+          <p:cNvPr id="11" name="Text 8"/>
+          <p:cNvSpPr txBox="1"/>
+          <p:nvPr/>
+        </p:nvSpPr>
+        <p:spPr>
+          <a:xfrm>
+            <a:off x="6720840" y="1737360"/>
+            <a:ext cx="1874520" cy="777240"/>
+          </a:xfrm>
+          <a:prstGeom prst="rect">
+            <a:avLst/>
+          </a:prstGeom>
+          <a:noFill/>
+          <a:ln/>
+        </p:spPr>
+        <p:txBody>
+          <a:bodyPr wrap="square" lIns="0" tIns="0" rIns="0" bIns="0" rtlCol="0" anchor="t"/>
+          <a:lstStyle/>
+          <a:p>
             <a:pPr indent="0" marL="0">
               <a:buNone/>
             </a:pPr>
             <a:r>
-              <a:rPr lang="en-US" sz="1200" dirty="0">
-                <a:solidFill>
-                  <a:schemeClr val="accent5"/>
+              <a:rPr lang="en-US" sz="1100" dirty="0">
+                <a:solidFill>
+                  <a:schemeClr val="tx1"/>
                 </a:solidFill>
               </a:rPr>
-              <a:t>huggingface.co/spaces/RoshaanT1/floodlens-pakistan</a:t>
-            </a:r>
+              <a:t>runs in the Tue 4 PM – Wed 4 PM window</a:t>
+            </a:r>
+            <a:endParaRPr lang="en-US" sz="1100" dirty="0"/>
+          </a:p>
+        </p:txBody>
+      </p:sp>
+      <p:sp>
+        <p:nvSpPr>
+          <p:cNvPr id="12" name="Text 9"/>
+          <p:cNvSpPr txBox="1"/>
+          <p:nvPr/>
+        </p:nvSpPr>
+        <p:spPr>
+          <a:xfrm>
+            <a:off x="6035040" y="2560320"/>
+            <a:ext cx="731520" cy="548640"/>
+          </a:xfrm>
+          <a:prstGeom prst="rect">
+            <a:avLst/>
+          </a:prstGeom>
+          <a:noFill/>
+          <a:ln/>
+        </p:spPr>
+        <p:txBody>
+          <a:bodyPr wrap="square" lIns="0" tIns="0" rIns="0" bIns="0" rtlCol="0" anchor="t"/>
+          <a:lstStyle/>
+          <a:p>
             <a:pPr indent="0" marL="0">
               <a:buNone/>
             </a:pPr>
             <a:r>
-              <a:rPr lang="en-US" sz="1200" b="1" dirty="0">
-                <a:solidFill>
-                  <a:schemeClr val="tx1"/>
+              <a:rPr lang="en-US" sz="3000" b="1" dirty="0">
+                <a:solidFill>
+                  <a:schemeClr val="tx2"/>
                 </a:solidFill>
               </a:rPr>
-              <a:t>   ·   Repo: </a:t>
-            </a:r>
+              <a:t>14</a:t>
+            </a:r>
+            <a:endParaRPr lang="en-US" sz="3000" dirty="0"/>
+          </a:p>
+        </p:txBody>
+      </p:sp>
+      <p:sp>
+        <p:nvSpPr>
+          <p:cNvPr id="13" name="Text 10"/>
+          <p:cNvSpPr txBox="1"/>
+          <p:nvPr/>
+        </p:nvSpPr>
+        <p:spPr>
+          <a:xfrm>
+            <a:off x="6720840" y="2606040"/>
+            <a:ext cx="1874520" cy="777240"/>
+          </a:xfrm>
+          <a:prstGeom prst="rect">
+            <a:avLst/>
+          </a:prstGeom>
+          <a:noFill/>
+          <a:ln/>
+        </p:spPr>
+        <p:txBody>
+          <a:bodyPr wrap="square" lIns="0" tIns="0" rIns="0" bIns="0" rtlCol="0" anchor="t"/>
+          <a:lstStyle/>
+          <a:p>
             <a:pPr indent="0" marL="0">
               <a:buNone/>
             </a:pPr>
             <a:r>
-              <a:rPr lang="en-US" sz="1200" dirty="0">
-                <a:solidFill>
-                  <a:schemeClr val="accent5"/>
+              <a:rPr lang="en-US" sz="1100" dirty="0">
+                <a:solidFill>
+                  <a:schemeClr val="tx1"/>
                 </a:solidFill>
               </a:rPr>
-              <a:t>github.com/RoshaanT1/floodlens-pakistan</a:t>
-            </a:r>
-            <a:endParaRPr lang="en-US" sz="1200" dirty="0"/>
+              <a:t>completed</a:t>
+            </a:r>
+            <a:endParaRPr lang="en-US" sz="1100" dirty="0"/>
+          </a:p>
+        </p:txBody>
+      </p:sp>
+      <p:sp>
+        <p:nvSpPr>
+          <p:cNvPr id="14" name="Text 11"/>
+          <p:cNvSpPr txBox="1"/>
+          <p:nvPr/>
+        </p:nvSpPr>
+        <p:spPr>
+          <a:xfrm>
+            <a:off x="6035040" y="3429000"/>
+            <a:ext cx="731520" cy="548640"/>
+          </a:xfrm>
+          <a:prstGeom prst="rect">
+            <a:avLst/>
+          </a:prstGeom>
+          <a:noFill/>
+          <a:ln/>
+        </p:spPr>
+        <p:txBody>
+          <a:bodyPr wrap="square" lIns="0" tIns="0" rIns="0" bIns="0" rtlCol="0" anchor="t"/>
+          <a:lstStyle/>
+          <a:p>
+            <a:pPr indent="0" marL="0">
+              <a:buNone/>
+            </a:pPr>
+            <a:r>
+              <a:rPr lang="en-US" sz="3000" b="1" dirty="0">
+                <a:solidFill>
+                  <a:schemeClr val="accent3"/>
+                </a:solidFill>
+              </a:rPr>
+              <a:t>1</a:t>
+            </a:r>
+            <a:endParaRPr lang="en-US" sz="3000" dirty="0"/>
+          </a:p>
+        </p:txBody>
+      </p:sp>
+      <p:sp>
+        <p:nvSpPr>
+          <p:cNvPr id="15" name="Text 12"/>
+          <p:cNvSpPr txBox="1"/>
+          <p:nvPr/>
+        </p:nvSpPr>
+        <p:spPr>
+          <a:xfrm>
+            <a:off x="6720840" y="3474720"/>
+            <a:ext cx="1874520" cy="777240"/>
+          </a:xfrm>
+          <a:prstGeom prst="rect">
+            <a:avLst/>
+          </a:prstGeom>
+          <a:noFill/>
+          <a:ln/>
+        </p:spPr>
+        <p:txBody>
+          <a:bodyPr wrap="square" lIns="0" tIns="0" rIns="0" bIns="0" rtlCol="0" anchor="t"/>
+          <a:lstStyle/>
+          <a:p>
+            <a:pPr indent="0" marL="0">
+              <a:buNone/>
+            </a:pPr>
+            <a:r>
+              <a:rPr lang="en-US" sz="1100" dirty="0">
+                <a:solidFill>
+                  <a:schemeClr val="tx1"/>
+                </a:solidFill>
+              </a:rPr>
+              <a:t>failed: NASA server refused us; IMERG step now isolated, switched to NASA cloud</a:t>
+            </a:r>
+            <a:endParaRPr lang="en-US" sz="1100" dirty="0"/>
           </a:p>
         </p:txBody>
       </p:sp>
@@ -6756,7 +10200,7 @@
                   <a:schemeClr val="tx2"/>
                 </a:solidFill>
               </a:rPr>
-              <a:t>Conclusion</a:t>
+              <a:t>Dashboard / App Views</a:t>
             </a:r>
             <a:endParaRPr lang="en-US" sz="2800" dirty="0"/>
           </a:p>
@@ -6764,26 +10208,81 @@
       </p:sp>
       <p:sp>
         <p:nvSpPr>
-          <p:cNvPr id="3" name="finding 1"/>
+          <p:cNvPr id="3" name="Text 1"/>
+          <p:cNvSpPr txBox="1"/>
+          <p:nvPr/>
+        </p:nvSpPr>
+        <p:spPr>
+          <a:xfrm>
+            <a:off x="457200" y="914400"/>
+            <a:ext cx="5212080" cy="228600"/>
+          </a:xfrm>
+          <a:prstGeom prst="rect">
+            <a:avLst/>
+          </a:prstGeom>
+          <a:noFill/>
+          <a:ln/>
+        </p:spPr>
+        <p:txBody>
+          <a:bodyPr wrap="square" lIns="0" tIns="0" rIns="0" bIns="0" rtlCol="0" anchor="t"/>
+          <a:lstStyle/>
+          <a:p>
+            <a:pPr indent="0" marL="0">
+              <a:buNone/>
+            </a:pPr>
+            <a:r>
+              <a:rPr lang="en-US" sz="1200" b="1" dirty="0">
+                <a:solidFill>
+                  <a:schemeClr val="tx2"/>
+                </a:solidFill>
+              </a:rPr>
+              <a:t>Page 1 – Situation Room: risk vs each district's normal</a:t>
+            </a:r>
+            <a:endParaRPr lang="en-US" sz="1200" dirty="0"/>
+          </a:p>
+        </p:txBody>
+      </p:sp>
+      <p:pic>
+        <p:nvPicPr>
+          <p:cNvPr id="4" name="Page 1 – Situation Room: risk vs each district's normal" descr="Page 1 – Situation Room: risk vs each district's normal">    </p:cNvPr>
+          <p:cNvPicPr>
+            <a:picLocks noChangeAspect="1"/>
+          </p:cNvPicPr>
+          <p:nvPr/>
+        </p:nvPicPr>
+        <p:blipFill>
+          <a:blip r:embed="rId1"/>
+          <a:stretch>
+            <a:fillRect/>
+          </a:stretch>
+        </p:blipFill>
+        <p:spPr>
+          <a:xfrm>
+            <a:off x="457200" y="1188720"/>
+            <a:ext cx="5212080" cy="2931795"/>
+          </a:xfrm>
+          <a:prstGeom prst="rect">
+            <a:avLst/>
+          </a:prstGeom>
+        </p:spPr>
+      </p:pic>
+      <p:sp>
+        <p:nvSpPr>
+          <p:cNvPr id="5" name="Page 1 – Situation Room: risk vs each district's normal frame"/>
           <p:cNvSpPr/>
           <p:nvPr/>
         </p:nvSpPr>
         <p:spPr>
           <a:xfrm>
-            <a:off x="457200" y="1051560"/>
-            <a:ext cx="4937760" cy="1024128"/>
-          </a:xfrm>
-          <a:prstGeom prst="roundRect">
-            <a:avLst>
-              <a:gd name="adj" fmla="val 7143"/>
-            </a:avLst>
-          </a:prstGeom>
-          <a:solidFill>
-            <a:schemeClr val="bg2"/>
-          </a:solidFill>
-          <a:ln w="12700">
+            <a:off x="457200" y="1188720"/>
+            <a:ext cx="5212080" cy="2931795"/>
+          </a:xfrm>
+          <a:prstGeom prst="rect">
+            <a:avLst/>
+          </a:prstGeom>
+          <a:ln w="9525">
             <a:solidFill>
-              <a:schemeClr val="bg2"/>
+              <a:srgbClr val="D0D5DD"/>
             </a:solidFill>
             <a:prstDash val="solid"/>
           </a:ln>
@@ -6791,24 +10290,81 @@
       </p:sp>
       <p:sp>
         <p:nvSpPr>
-          <p:cNvPr id="4" name="dot 1"/>
+          <p:cNvPr id="6" name="Text 3"/>
+          <p:cNvSpPr txBox="1"/>
+          <p:nvPr/>
+        </p:nvSpPr>
+        <p:spPr>
+          <a:xfrm>
+            <a:off x="5943600" y="914400"/>
+            <a:ext cx="2743200" cy="228600"/>
+          </a:xfrm>
+          <a:prstGeom prst="rect">
+            <a:avLst/>
+          </a:prstGeom>
+          <a:noFill/>
+          <a:ln/>
+        </p:spPr>
+        <p:txBody>
+          <a:bodyPr wrap="square" lIns="0" tIns="0" rIns="0" bIns="0" rtlCol="0" anchor="t"/>
+          <a:lstStyle/>
+          <a:p>
+            <a:pPr indent="0" marL="0">
+              <a:buNone/>
+            </a:pPr>
+            <a:r>
+              <a:rPr lang="en-US" sz="1200" b="1" dirty="0">
+                <a:solidFill>
+                  <a:schemeClr val="tx2"/>
+                </a:solidFill>
+              </a:rPr>
+              <a:t>Page 2 – Ask (Insight Agent)</a:t>
+            </a:r>
+            <a:endParaRPr lang="en-US" sz="1200" dirty="0"/>
+          </a:p>
+        </p:txBody>
+      </p:sp>
+      <p:pic>
+        <p:nvPicPr>
+          <p:cNvPr id="7" name="Page 2 – Ask (Insight Agent)" descr="Page 2 – Ask (Insight Agent)">    </p:cNvPr>
+          <p:cNvPicPr>
+            <a:picLocks noChangeAspect="1"/>
+          </p:cNvPicPr>
+          <p:nvPr/>
+        </p:nvPicPr>
+        <p:blipFill>
+          <a:blip r:embed="rId2"/>
+          <a:stretch>
+            <a:fillRect/>
+          </a:stretch>
+        </p:blipFill>
+        <p:spPr>
+          <a:xfrm>
+            <a:off x="5943600" y="1188720"/>
+            <a:ext cx="2743200" cy="719328"/>
+          </a:xfrm>
+          <a:prstGeom prst="rect">
+            <a:avLst/>
+          </a:prstGeom>
+        </p:spPr>
+      </p:pic>
+      <p:sp>
+        <p:nvSpPr>
+          <p:cNvPr id="8" name="Page 2 – Ask (Insight Agent) frame"/>
           <p:cNvSpPr/>
           <p:nvPr/>
         </p:nvSpPr>
         <p:spPr>
           <a:xfrm>
-            <a:off x="640080" y="1234440"/>
-            <a:ext cx="329184" cy="329184"/>
-          </a:xfrm>
-          <a:prstGeom prst="ellipse">
-            <a:avLst/>
-          </a:prstGeom>
-          <a:solidFill>
-            <a:schemeClr val="accent1"/>
-          </a:solidFill>
-          <a:ln w="12700">
+            <a:off x="5943600" y="1188720"/>
+            <a:ext cx="2743200" cy="719328"/>
+          </a:xfrm>
+          <a:prstGeom prst="rect">
+            <a:avLst/>
+          </a:prstGeom>
+          <a:ln w="9525">
             <a:solidFill>
-              <a:schemeClr val="accent1"/>
+              <a:srgbClr val="D0D5DD"/>
             </a:solidFill>
             <a:prstDash val="solid"/>
           </a:ln>
@@ -6816,14 +10372,14 @@
       </p:sp>
       <p:sp>
         <p:nvSpPr>
-          <p:cNvPr id="5" name="Text 3"/>
+          <p:cNvPr id="9" name="Text 5"/>
           <p:cNvSpPr txBox="1"/>
           <p:nvPr/>
         </p:nvSpPr>
         <p:spPr>
           <a:xfrm>
-            <a:off x="640080" y="1234440"/>
-            <a:ext cx="329184" cy="329184"/>
+            <a:off x="5943600" y="2103120"/>
+            <a:ext cx="2743200" cy="228600"/>
           </a:xfrm>
           <a:prstGeom prst="rect">
             <a:avLst/>
@@ -6832,42 +10388,6 @@
           <a:ln/>
         </p:spPr>
         <p:txBody>
-          <a:bodyPr wrap="square" lIns="0" tIns="0" rIns="0" bIns="0" rtlCol="0" anchor="ctr"/>
-          <a:lstStyle/>
-          <a:p>
-            <a:pPr algn="ctr" indent="0" marL="0">
-              <a:buNone/>
-            </a:pPr>
-            <a:r>
-              <a:rPr lang="en-US" sz="1300" b="1" dirty="0">
-                <a:solidFill>
-                  <a:schemeClr val="bg1"/>
-                </a:solidFill>
-              </a:rPr>
-              <a:t>1</a:t>
-            </a:r>
-            <a:endParaRPr lang="en-US" sz="1300" dirty="0"/>
-          </a:p>
-        </p:txBody>
-      </p:sp>
-      <p:sp>
-        <p:nvSpPr>
-          <p:cNvPr id="6" name="Text 4"/>
-          <p:cNvSpPr txBox="1"/>
-          <p:nvPr/>
-        </p:nvSpPr>
-        <p:spPr>
-          <a:xfrm>
-            <a:off x="1143000" y="1188720"/>
-            <a:ext cx="4114800" cy="292608"/>
-          </a:xfrm>
-          <a:prstGeom prst="rect">
-            <a:avLst/>
-          </a:prstGeom>
-          <a:noFill/>
-          <a:ln/>
-        </p:spPr>
-        <p:txBody>
           <a:bodyPr wrap="square" lIns="0" tIns="0" rIns="0" bIns="0" rtlCol="0" anchor="t"/>
           <a:lstStyle/>
           <a:p>
@@ -6875,75 +10395,58 @@
               <a:buNone/>
             </a:pPr>
             <a:r>
-              <a:rPr lang="en-US" sz="1500" b="1" dirty="0">
+              <a:rPr lang="en-US" sz="1200" b="1" dirty="0">
                 <a:solidFill>
                   <a:schemeClr val="tx2"/>
                 </a:solidFill>
               </a:rPr>
-              <a:t>Beats the baseline on unseen 2026 data</a:t>
-            </a:r>
-            <a:endParaRPr lang="en-US" sz="1500" dirty="0"/>
-          </a:p>
-        </p:txBody>
-      </p:sp>
-      <p:sp>
-        <p:nvSpPr>
-          <p:cNvPr id="7" name="Text 5"/>
-          <p:cNvSpPr txBox="1"/>
-          <p:nvPr/>
-        </p:nvSpPr>
-        <p:spPr>
-          <a:xfrm>
-            <a:off x="1143000" y="1508760"/>
-            <a:ext cx="4114800" cy="530352"/>
-          </a:xfrm>
-          <a:prstGeom prst="rect">
-            <a:avLst/>
-          </a:prstGeom>
-          <a:noFill/>
-          <a:ln/>
-        </p:spPr>
-        <p:txBody>
-          <a:bodyPr wrap="square" lIns="0" tIns="0" rIns="0" bIns="0" rtlCol="0" anchor="t"/>
-          <a:lstStyle/>
-          <a:p>
-            <a:pPr indent="0" marL="0">
-              <a:buNone/>
-            </a:pPr>
-            <a:r>
-              <a:rPr lang="en-US" sz="1200" dirty="0">
-                <a:solidFill>
-                  <a:schemeClr val="tx1"/>
-                </a:solidFill>
-              </a:rPr>
-              <a:t>Brier 0.0177 vs climatology 0.0192 (about 7% better); the 95% interval of the gain excludes zero</a:t>
+              <a:t>Page 3 – Live data</a:t>
             </a:r>
             <a:endParaRPr lang="en-US" sz="1200" dirty="0"/>
           </a:p>
         </p:txBody>
       </p:sp>
-      <p:sp>
-        <p:nvSpPr>
-          <p:cNvPr id="8" name="finding 2"/>
+      <p:pic>
+        <p:nvPicPr>
+          <p:cNvPr id="10" name="Page 3 – Live data" descr="Page 3 – Live data">    </p:cNvPr>
+          <p:cNvPicPr>
+            <a:picLocks noChangeAspect="1"/>
+          </p:cNvPicPr>
+          <p:nvPr/>
+        </p:nvPicPr>
+        <p:blipFill>
+          <a:blip r:embed="rId3"/>
+          <a:stretch>
+            <a:fillRect/>
+          </a:stretch>
+        </p:blipFill>
+        <p:spPr>
+          <a:xfrm>
+            <a:off x="5943600" y="2377440"/>
+            <a:ext cx="2743200" cy="1543050"/>
+          </a:xfrm>
+          <a:prstGeom prst="rect">
+            <a:avLst/>
+          </a:prstGeom>
+        </p:spPr>
+      </p:pic>
+      <p:sp>
+        <p:nvSpPr>
+          <p:cNvPr id="11" name="Page 3 – Live data frame"/>
           <p:cNvSpPr/>
           <p:nvPr/>
         </p:nvSpPr>
         <p:spPr>
           <a:xfrm>
-            <a:off x="457200" y="2212848"/>
-            <a:ext cx="4937760" cy="1024128"/>
-          </a:xfrm>
-          <a:prstGeom prst="roundRect">
-            <a:avLst>
-              <a:gd name="adj" fmla="val 7143"/>
-            </a:avLst>
-          </a:prstGeom>
-          <a:solidFill>
-            <a:schemeClr val="bg2"/>
-          </a:solidFill>
-          <a:ln w="12700">
+            <a:off x="5943600" y="2377440"/>
+            <a:ext cx="2743200" cy="1543050"/>
+          </a:xfrm>
+          <a:prstGeom prst="rect">
+            <a:avLst/>
+          </a:prstGeom>
+          <a:ln w="9525">
             <a:solidFill>
-              <a:schemeClr val="bg2"/>
+              <a:srgbClr val="D0D5DD"/>
             </a:solidFill>
             <a:prstDash val="solid"/>
           </a:ln>
@@ -6951,39 +10454,14 @@
       </p:sp>
       <p:sp>
         <p:nvSpPr>
-          <p:cNvPr id="9" name="dot 2"/>
-          <p:cNvSpPr/>
-          <p:nvPr/>
-        </p:nvSpPr>
-        <p:spPr>
-          <a:xfrm>
-            <a:off x="640080" y="2395728"/>
-            <a:ext cx="329184" cy="329184"/>
-          </a:xfrm>
-          <a:prstGeom prst="ellipse">
-            <a:avLst/>
-          </a:prstGeom>
-          <a:solidFill>
-            <a:schemeClr val="accent1"/>
-          </a:solidFill>
-          <a:ln w="12700">
-            <a:solidFill>
-              <a:schemeClr val="accent1"/>
-            </a:solidFill>
-            <a:prstDash val="solid"/>
-          </a:ln>
-        </p:spPr>
-      </p:sp>
-      <p:sp>
-        <p:nvSpPr>
-          <p:cNvPr id="10" name="Text 8"/>
+          <p:cNvPr id="12" name="Text 7"/>
           <p:cNvSpPr txBox="1"/>
           <p:nvPr/>
         </p:nvSpPr>
         <p:spPr>
           <a:xfrm>
-            <a:off x="640080" y="2395728"/>
-            <a:ext cx="329184" cy="329184"/>
+            <a:off x="457200" y="4370832"/>
+            <a:ext cx="8229600" cy="274320"/>
           </a:xfrm>
           <a:prstGeom prst="rect">
             <a:avLst/>
@@ -6992,42 +10470,6 @@
           <a:ln/>
         </p:spPr>
         <p:txBody>
-          <a:bodyPr wrap="square" lIns="0" tIns="0" rIns="0" bIns="0" rtlCol="0" anchor="ctr"/>
-          <a:lstStyle/>
-          <a:p>
-            <a:pPr algn="ctr" indent="0" marL="0">
-              <a:buNone/>
-            </a:pPr>
-            <a:r>
-              <a:rPr lang="en-US" sz="1300" b="1" dirty="0">
-                <a:solidFill>
-                  <a:schemeClr val="bg1"/>
-                </a:solidFill>
-              </a:rPr>
-              <a:t>2</a:t>
-            </a:r>
-            <a:endParaRPr lang="en-US" sz="1300" dirty="0"/>
-          </a:p>
-        </p:txBody>
-      </p:sp>
-      <p:sp>
-        <p:nvSpPr>
-          <p:cNvPr id="11" name="Text 9"/>
-          <p:cNvSpPr txBox="1"/>
-          <p:nvPr/>
-        </p:nvSpPr>
-        <p:spPr>
-          <a:xfrm>
-            <a:off x="1143000" y="2350008"/>
-            <a:ext cx="4114800" cy="292608"/>
-          </a:xfrm>
-          <a:prstGeom prst="rect">
-            <a:avLst/>
-          </a:prstGeom>
-          <a:noFill/>
-          <a:ln/>
-        </p:spPr>
-        <p:txBody>
           <a:bodyPr wrap="square" lIns="0" tIns="0" rIns="0" bIns="0" rtlCol="0" anchor="t"/>
           <a:lstStyle/>
           <a:p>
@@ -7035,446 +10477,45 @@
               <a:buNone/>
             </a:pPr>
             <a:r>
-              <a:rPr lang="en-US" sz="1500" b="1" dirty="0">
-                <a:solidFill>
-                  <a:schemeClr val="tx2"/>
+              <a:rPr lang="en-US" sz="1200" b="1" dirty="0">
+                <a:solidFill>
+                  <a:schemeClr val="tx1"/>
                 </a:solidFill>
               </a:rPr>
-              <a:t>Better everywhere we checked</a:t>
-            </a:r>
-            <a:endParaRPr lang="en-US" sz="1500" dirty="0"/>
-          </a:p>
-        </p:txBody>
-      </p:sp>
-      <p:sp>
-        <p:nvSpPr>
-          <p:cNvPr id="12" name="Text 10"/>
-          <p:cNvSpPr txBox="1"/>
-          <p:nvPr/>
-        </p:nvSpPr>
-        <p:spPr>
-          <a:xfrm>
-            <a:off x="1143000" y="2670048"/>
-            <a:ext cx="4114800" cy="530352"/>
-          </a:xfrm>
-          <a:prstGeom prst="rect">
-            <a:avLst/>
-          </a:prstGeom>
-          <a:noFill/>
-          <a:ln/>
-        </p:spPr>
-        <p:txBody>
-          <a:bodyPr wrap="square" lIns="0" tIns="0" rIns="0" bIns="0" rtlCol="0" anchor="t"/>
-          <a:lstStyle/>
-          <a:p>
+              <a:t>Live demo: </a:t>
+            </a:r>
             <a:pPr indent="0" marL="0">
               <a:buNone/>
             </a:pPr>
             <a:r>
               <a:rPr lang="en-US" sz="1200" dirty="0">
                 <a:solidFill>
-                  <a:schemeClr val="tx1"/>
+                  <a:schemeClr val="accent5"/>
                 </a:solidFill>
               </a:rPr>
-              <a:t>Ahead of climatology in every province and terrain group and in monsoon months; weakest in Azad Kashmir</a:t>
-            </a:r>
-            <a:endParaRPr lang="en-US" sz="1200" dirty="0"/>
-          </a:p>
-        </p:txBody>
-      </p:sp>
-      <p:sp>
-        <p:nvSpPr>
-          <p:cNvPr id="13" name="finding 3"/>
-          <p:cNvSpPr/>
-          <p:nvPr/>
-        </p:nvSpPr>
-        <p:spPr>
-          <a:xfrm>
-            <a:off x="457200" y="3374136"/>
-            <a:ext cx="4937760" cy="1024128"/>
-          </a:xfrm>
-          <a:prstGeom prst="roundRect">
-            <a:avLst>
-              <a:gd name="adj" fmla="val 7143"/>
-            </a:avLst>
-          </a:prstGeom>
-          <a:solidFill>
-            <a:schemeClr val="bg2"/>
-          </a:solidFill>
-          <a:ln w="12700">
-            <a:solidFill>
-              <a:schemeClr val="bg2"/>
-            </a:solidFill>
-            <a:prstDash val="solid"/>
-          </a:ln>
-        </p:spPr>
-      </p:sp>
-      <p:sp>
-        <p:nvSpPr>
-          <p:cNvPr id="14" name="dot 3"/>
-          <p:cNvSpPr/>
-          <p:nvPr/>
-        </p:nvSpPr>
-        <p:spPr>
-          <a:xfrm>
-            <a:off x="640080" y="3557016"/>
-            <a:ext cx="329184" cy="329184"/>
-          </a:xfrm>
-          <a:prstGeom prst="ellipse">
-            <a:avLst/>
-          </a:prstGeom>
-          <a:solidFill>
-            <a:schemeClr val="accent1"/>
-          </a:solidFill>
-          <a:ln w="12700">
-            <a:solidFill>
-              <a:schemeClr val="accent1"/>
-            </a:solidFill>
-            <a:prstDash val="solid"/>
-          </a:ln>
-        </p:spPr>
-      </p:sp>
-      <p:sp>
-        <p:nvSpPr>
-          <p:cNvPr id="15" name="Text 13"/>
-          <p:cNvSpPr txBox="1"/>
-          <p:nvPr/>
-        </p:nvSpPr>
-        <p:spPr>
-          <a:xfrm>
-            <a:off x="640080" y="3557016"/>
-            <a:ext cx="329184" cy="329184"/>
-          </a:xfrm>
-          <a:prstGeom prst="rect">
-            <a:avLst/>
-          </a:prstGeom>
-          <a:noFill/>
-          <a:ln/>
-        </p:spPr>
-        <p:txBody>
-          <a:bodyPr wrap="square" lIns="0" tIns="0" rIns="0" bIns="0" rtlCol="0" anchor="ctr"/>
-          <a:lstStyle/>
-          <a:p>
-            <a:pPr algn="ctr" indent="0" marL="0">
-              <a:buNone/>
-            </a:pPr>
-            <a:r>
-              <a:rPr lang="en-US" sz="1300" b="1" dirty="0">
-                <a:solidFill>
-                  <a:schemeClr val="bg1"/>
-                </a:solidFill>
-              </a:rPr>
-              <a:t>3</a:t>
-            </a:r>
-            <a:endParaRPr lang="en-US" sz="1300" dirty="0"/>
-          </a:p>
-        </p:txBody>
-      </p:sp>
-      <p:sp>
-        <p:nvSpPr>
-          <p:cNvPr id="16" name="Text 14"/>
-          <p:cNvSpPr txBox="1"/>
-          <p:nvPr/>
-        </p:nvSpPr>
-        <p:spPr>
-          <a:xfrm>
-            <a:off x="1143000" y="3511296"/>
-            <a:ext cx="4114800" cy="292608"/>
-          </a:xfrm>
-          <a:prstGeom prst="rect">
-            <a:avLst/>
-          </a:prstGeom>
-          <a:noFill/>
-          <a:ln/>
-        </p:spPr>
-        <p:txBody>
-          <a:bodyPr wrap="square" lIns="0" tIns="0" rIns="0" bIns="0" rtlCol="0" anchor="t"/>
-          <a:lstStyle/>
-          <a:p>
+              <a:t>huggingface.co/spaces/RoshaanT1/floodlens-pakistan</a:t>
+            </a:r>
             <a:pPr indent="0" marL="0">
               <a:buNone/>
             </a:pPr>
             <a:r>
-              <a:rPr lang="en-US" sz="1500" b="1" dirty="0">
-                <a:solidFill>
-                  <a:schemeClr val="tx2"/>
+              <a:rPr lang="en-US" sz="1200" b="1" dirty="0">
+                <a:solidFill>
+                  <a:schemeClr val="tx1"/>
                 </a:solidFill>
               </a:rPr>
-              <a:t>Right when it mattered</a:t>
-            </a:r>
-            <a:endParaRPr lang="en-US" sz="1500" dirty="0"/>
-          </a:p>
-        </p:txBody>
-      </p:sp>
-      <p:sp>
-        <p:nvSpPr>
-          <p:cNvPr id="17" name="Text 15"/>
-          <p:cNvSpPr txBox="1"/>
-          <p:nvPr/>
-        </p:nvSpPr>
-        <p:spPr>
-          <a:xfrm>
-            <a:off x="1143000" y="3831336"/>
-            <a:ext cx="4114800" cy="530352"/>
-          </a:xfrm>
-          <a:prstGeom prst="rect">
-            <a:avLst/>
-          </a:prstGeom>
-          <a:noFill/>
-          <a:ln/>
-        </p:spPr>
-        <p:txBody>
-          <a:bodyPr wrap="square" lIns="0" tIns="0" rIns="0" bIns="0" rtlCol="0" anchor="t"/>
-          <a:lstStyle/>
-          <a:p>
+              <a:t>   ·   Repo: </a:t>
+            </a:r>
             <a:pPr indent="0" marL="0">
               <a:buNone/>
             </a:pPr>
             <a:r>
               <a:rPr lang="en-US" sz="1200" dirty="0">
                 <a:solidFill>
-                  <a:schemeClr val="tx1"/>
+                  <a:schemeClr val="accent5"/>
                 </a:solidFill>
               </a:rPr>
-              <a:t>Replaying Aug 2025: on 14 Aug, 8 of the 10 districts we ranked highest really had heavy rain</a:t>
-            </a:r>
-            <a:endParaRPr lang="en-US" sz="1200" dirty="0"/>
-          </a:p>
-        </p:txBody>
-      </p:sp>
-      <p:sp>
-        <p:nvSpPr>
-          <p:cNvPr id="18" name="impact"/>
-          <p:cNvSpPr/>
-          <p:nvPr/>
-        </p:nvSpPr>
-        <p:spPr>
-          <a:xfrm>
-            <a:off x="5669280" y="1051560"/>
-            <a:ext cx="3017520" cy="1691640"/>
-          </a:xfrm>
-          <a:prstGeom prst="roundRect">
-            <a:avLst>
-              <a:gd name="adj" fmla="val 4324"/>
-            </a:avLst>
-          </a:prstGeom>
-          <a:solidFill>
-            <a:schemeClr val="tx2"/>
-          </a:solidFill>
-          <a:ln w="12700">
-            <a:solidFill>
-              <a:schemeClr val="tx2"/>
-            </a:solidFill>
-            <a:prstDash val="solid"/>
-          </a:ln>
-        </p:spPr>
-      </p:sp>
-      <p:sp>
-        <p:nvSpPr>
-          <p:cNvPr id="19" name="Text 17"/>
-          <p:cNvSpPr txBox="1"/>
-          <p:nvPr/>
-        </p:nvSpPr>
-        <p:spPr>
-          <a:xfrm>
-            <a:off x="5870448" y="1216152"/>
-            <a:ext cx="2651760" cy="274320"/>
-          </a:xfrm>
-          <a:prstGeom prst="rect">
-            <a:avLst/>
-          </a:prstGeom>
-          <a:noFill/>
-          <a:ln/>
-        </p:spPr>
-        <p:txBody>
-          <a:bodyPr wrap="square" lIns="0" tIns="0" rIns="0" bIns="0" rtlCol="0" anchor="t"/>
-          <a:lstStyle/>
-          <a:p>
-            <a:pPr indent="0" marL="0">
-              <a:buNone/>
-            </a:pPr>
-            <a:r>
-              <a:rPr lang="en-US" sz="1200" b="1" spc="200" kern="0" dirty="0">
-                <a:solidFill>
-                  <a:schemeClr val="bg1"/>
-                </a:solidFill>
-              </a:rPr>
-              <a:t>IMPACT</a:t>
-            </a:r>
-            <a:endParaRPr lang="en-US" sz="1200" dirty="0"/>
-          </a:p>
-        </p:txBody>
-      </p:sp>
-      <p:sp>
-        <p:nvSpPr>
-          <p:cNvPr id="20" name="Text 18"/>
-          <p:cNvSpPr txBox="1"/>
-          <p:nvPr/>
-        </p:nvSpPr>
-        <p:spPr>
-          <a:xfrm>
-            <a:off x="5870448" y="1536192"/>
-            <a:ext cx="2651760" cy="1143000"/>
-          </a:xfrm>
-          <a:prstGeom prst="rect">
-            <a:avLst/>
-          </a:prstGeom>
-          <a:noFill/>
-          <a:ln/>
-        </p:spPr>
-        <p:txBody>
-          <a:bodyPr wrap="square" lIns="0" tIns="0" rIns="0" bIns="0" rtlCol="0" anchor="t"/>
-          <a:lstStyle/>
-          <a:p>
-            <a:pPr indent="0" marL="0">
-              <a:buNone/>
-            </a:pPr>
-            <a:r>
-              <a:rPr lang="en-US" sz="1200" dirty="0">
-                <a:solidFill>
-                  <a:schemeClr val="bg1"/>
-                </a:solidFill>
-              </a:rPr>
-              <a:t>160 district offices and their PDMAs get a free, hourly, per-district signal with the reasons and NDMA sources one click away.</a:t>
-            </a:r>
-            <a:endParaRPr lang="en-US" sz="1200" dirty="0"/>
-          </a:p>
-        </p:txBody>
-      </p:sp>
-      <p:sp>
-        <p:nvSpPr>
-          <p:cNvPr id="21" name="future work"/>
-          <p:cNvSpPr/>
-          <p:nvPr/>
-        </p:nvSpPr>
-        <p:spPr>
-          <a:xfrm>
-            <a:off x="5669280" y="2907792"/>
-            <a:ext cx="3017520" cy="1572768"/>
-          </a:xfrm>
-          <a:prstGeom prst="roundRect">
-            <a:avLst>
-              <a:gd name="adj" fmla="val 4651"/>
-            </a:avLst>
-          </a:prstGeom>
-          <a:solidFill>
-            <a:schemeClr val="bg2"/>
-          </a:solidFill>
-          <a:ln w="12700">
-            <a:solidFill>
-              <a:schemeClr val="bg2"/>
-            </a:solidFill>
-            <a:prstDash val="solid"/>
-          </a:ln>
-        </p:spPr>
-      </p:sp>
-      <p:sp>
-        <p:nvSpPr>
-          <p:cNvPr id="22" name="Text 20"/>
-          <p:cNvSpPr txBox="1"/>
-          <p:nvPr/>
-        </p:nvSpPr>
-        <p:spPr>
-          <a:xfrm>
-            <a:off x="5870448" y="3072384"/>
-            <a:ext cx="2651760" cy="274320"/>
-          </a:xfrm>
-          <a:prstGeom prst="rect">
-            <a:avLst/>
-          </a:prstGeom>
-          <a:noFill/>
-          <a:ln/>
-        </p:spPr>
-        <p:txBody>
-          <a:bodyPr wrap="square" lIns="0" tIns="0" rIns="0" bIns="0" rtlCol="0" anchor="t"/>
-          <a:lstStyle/>
-          <a:p>
-            <a:pPr indent="0" marL="0">
-              <a:buNone/>
-            </a:pPr>
-            <a:r>
-              <a:rPr lang="en-US" sz="1200" b="1" spc="200" kern="0" dirty="0">
-                <a:solidFill>
-                  <a:schemeClr val="accent2"/>
-                </a:solidFill>
-              </a:rPr>
-              <a:t>FUTURE WORK</a:t>
-            </a:r>
-            <a:endParaRPr lang="en-US" sz="1200" dirty="0"/>
-          </a:p>
-        </p:txBody>
-      </p:sp>
-      <p:sp>
-        <p:nvSpPr>
-          <p:cNvPr id="23" name="Text 21"/>
-          <p:cNvSpPr txBox="1"/>
-          <p:nvPr/>
-        </p:nvSpPr>
-        <p:spPr>
-          <a:xfrm>
-            <a:off x="5870448" y="3383280"/>
-            <a:ext cx="2697480" cy="1051560"/>
-          </a:xfrm>
-          <a:prstGeom prst="rect">
-            <a:avLst/>
-          </a:prstGeom>
-          <a:noFill/>
-          <a:ln/>
-        </p:spPr>
-        <p:txBody>
-          <a:bodyPr wrap="square" lIns="0" tIns="0" rIns="0" bIns="0" rtlCol="0" anchor="t"/>
-          <a:lstStyle/>
-          <a:p>
-            <a:pPr marL="342900" indent="-342900">
-              <a:spcAft>
-                <a:spcPts val="300"/>
-              </a:spcAft>
-              <a:buSzPct val="100000"/>
-              <a:buChar char="•"/>
-            </a:pPr>
-            <a:r>
-              <a:rPr lang="en-US" sz="1200" dirty="0">
-                <a:solidFill>
-                  <a:schemeClr val="tx1"/>
-                </a:solidFill>
-              </a:rPr>
-              <a:t>Sub-daily rain to catch cloudbursts like Buner</a:t>
-            </a:r>
-            <a:endParaRPr lang="en-US" sz="1200" dirty="0"/>
-          </a:p>
-          <a:p>
-            <a:pPr marL="342900" indent="-342900">
-              <a:spcAft>
-                <a:spcPts val="300"/>
-              </a:spcAft>
-              <a:buSzPct val="100000"/>
-              <a:buChar char="•"/>
-            </a:pPr>
-            <a:r>
-              <a:rPr lang="en-US" sz="1200" dirty="0">
-                <a:solidFill>
-                  <a:schemeClr val="tx1"/>
-                </a:solidFill>
-              </a:rPr>
-              <a:t>Flood and damage targets, not only rain</a:t>
-            </a:r>
-            <a:endParaRPr lang="en-US" sz="1200" dirty="0"/>
-          </a:p>
-          <a:p>
-            <a:pPr marL="342900" indent="-342900">
-              <a:spcAft>
-                <a:spcPts val="300"/>
-              </a:spcAft>
-              <a:buSzPct val="100000"/>
-              <a:buChar char="•"/>
-            </a:pPr>
-            <a:r>
-              <a:rPr lang="en-US" sz="1200" dirty="0">
-                <a:solidFill>
-                  <a:schemeClr val="tx1"/>
-                </a:solidFill>
-              </a:rPr>
-              <a:t>A price model that beats “no change”</a:t>
+              <a:t>github.com/RoshaanT1/floodlens-pakistan</a:t>
             </a:r>
             <a:endParaRPr lang="en-US" sz="1200" dirty="0"/>
           </a:p>
@@ -7582,7 +10623,7 @@
                   <a:schemeClr val="tx2"/>
                 </a:solidFill>
               </a:rPr>
-              <a:t>Team &amp; Credits</a:t>
+              <a:t>Results vs Baseline</a:t>
             </a:r>
             <a:endParaRPr lang="en-US" sz="2800" dirty="0"/>
           </a:p>
@@ -7597,7 +10638,7 @@
         <p:spPr>
           <a:xfrm>
             <a:off x="457200" y="914400"/>
-            <a:ext cx="5486400" cy="365760"/>
+            <a:ext cx="4937760" cy="274320"/>
           </a:xfrm>
           <a:prstGeom prst="rect">
             <a:avLst/>
@@ -7613,31 +10654,1317 @@
               <a:buNone/>
             </a:pPr>
             <a:r>
-              <a:rPr lang="en-US" sz="1800" b="1" spc="200" kern="0" dirty="0">
+              <a:rPr lang="en-US" sz="1200" b="1" dirty="0">
                 <a:solidFill>
                   <a:schemeClr val="accent2"/>
                 </a:solidFill>
               </a:rPr>
-              <a:t>TEAM SPARK H</a:t>
-            </a:r>
-            <a:endParaRPr lang="en-US" sz="1800" dirty="0"/>
-          </a:p>
-        </p:txBody>
-      </p:sp>
-      <p:sp>
-        <p:nvSpPr>
-          <p:cNvPr id="4" name="member 1"/>
+              <a:t>TEST SET Jan–Sep 2026, run once · Brier [95% CI], lower is better</a:t>
+            </a:r>
+            <a:endParaRPr lang="en-US" sz="1200" dirty="0"/>
+          </a:p>
+        </p:txBody>
+      </p:sp>
+      <p:graphicFrame>
+        <p:nvGraphicFramePr>
+          <p:cNvPr id="9" name="Table 0"/>
+          <p:cNvGraphicFramePr>
+            <a:graphicFrameLocks noGrp="1"/>
+          </p:cNvGraphicFramePr>
+          <p:nvPr>
+            <p:extLst>
+              <p:ext uri="{D42A27DB-BD31-4B8C-83A1-F6EECF244321}">
+                <p14:modId xmlns:p14="http://schemas.microsoft.com/office/powerpoint/2010/main" val="1579011935"/>
+              </p:ext>
+            </p:extLst>
+          </p:nvPr>
+        </p:nvGraphicFramePr>
+        <p:xfrm>
+          <a:off x="457200" y="1234440"/>
+          <a:ext cx="4937760" cy="914400"/>
+        </p:xfrm>
+        <a:graphic>
+          <a:graphicData uri="http://schemas.openxmlformats.org/drawingml/2006/table">
+            <a:tbl>
+              <a:tblPr/>
+              <a:tblGrid>
+                <a:gridCol w="1371600"/>
+                <a:gridCol w="1188720"/>
+                <a:gridCol w="1188720"/>
+                <a:gridCol w="1188720"/>
+              </a:tblGrid>
+              <a:tr h="292608">
+                <a:tc>
+                  <a:txBody>
+                    <a:bodyPr/>
+                    <a:lstStyle/>
+                    <a:p>
+                      <a:pPr algn="ctr" indent="0" marL="0">
+                        <a:buNone/>
+                      </a:pPr>
+                      <a:endParaRPr lang="en-US" sz="1100" dirty="0"/>
+                    </a:p>
+                  </a:txBody>
+                  <a:tcPr marL="54864" marR="54864" marT="27432" marB="27432" anchor="ctr">
+                    <a:lnL w="9525" cap="flat" cmpd="sng" algn="ctr">
+                      <a:solidFill>
+                        <a:srgbClr val="D0D5DD"/>
+                      </a:solidFill>
+                      <a:prstDash val="solid"/>
+                      <a:round/>
+                      <a:headEnd type="none" w="med" len="med"/>
+                      <a:tailEnd type="none" w="med" len="med"/>
+                    </a:lnL>
+                    <a:lnR w="9525" cap="flat" cmpd="sng" algn="ctr">
+                      <a:solidFill>
+                        <a:srgbClr val="D0D5DD"/>
+                      </a:solidFill>
+                      <a:prstDash val="solid"/>
+                      <a:round/>
+                      <a:headEnd type="none" w="med" len="med"/>
+                      <a:tailEnd type="none" w="med" len="med"/>
+                    </a:lnR>
+                    <a:lnT w="9525" cap="flat" cmpd="sng" algn="ctr">
+                      <a:solidFill>
+                        <a:srgbClr val="D0D5DD"/>
+                      </a:solidFill>
+                      <a:prstDash val="solid"/>
+                      <a:round/>
+                      <a:headEnd type="none" w="med" len="med"/>
+                      <a:tailEnd type="none" w="med" len="med"/>
+                    </a:lnT>
+                    <a:lnB w="9525" cap="flat" cmpd="sng" algn="ctr">
+                      <a:solidFill>
+                        <a:srgbClr val="D0D5DD"/>
+                      </a:solidFill>
+                      <a:prstDash val="solid"/>
+                      <a:round/>
+                      <a:headEnd type="none" w="med" len="med"/>
+                      <a:tailEnd type="none" w="med" len="med"/>
+                    </a:lnB>
+                    <a:solidFill>
+                      <a:srgbClr val="0B5D2A"/>
+                    </a:solidFill>
+                  </a:tcPr>
+                </a:tc>
+                <a:tc>
+                  <a:txBody>
+                    <a:bodyPr/>
+                    <a:lstStyle/>
+                    <a:p>
+                      <a:pPr algn="ctr" indent="0" marL="0">
+                        <a:buNone/>
+                      </a:pPr>
+                      <a:r>
+                        <a:rPr lang="en-US" sz="1100" b="1" dirty="0">
+                          <a:solidFill>
+                            <a:srgbClr val="FFFFFF"/>
+                          </a:solidFill>
+                        </a:rPr>
+                        <a:t>24 h</a:t>
+                      </a:r>
+                      <a:endParaRPr lang="en-US" sz="1100" dirty="0"/>
+                    </a:p>
+                  </a:txBody>
+                  <a:tcPr marL="54864" marR="54864" marT="27432" marB="27432" anchor="ctr">
+                    <a:lnL w="9525" cap="flat" cmpd="sng" algn="ctr">
+                      <a:solidFill>
+                        <a:srgbClr val="D0D5DD"/>
+                      </a:solidFill>
+                      <a:prstDash val="solid"/>
+                      <a:round/>
+                      <a:headEnd type="none" w="med" len="med"/>
+                      <a:tailEnd type="none" w="med" len="med"/>
+                    </a:lnL>
+                    <a:lnR w="9525" cap="flat" cmpd="sng" algn="ctr">
+                      <a:solidFill>
+                        <a:srgbClr val="D0D5DD"/>
+                      </a:solidFill>
+                      <a:prstDash val="solid"/>
+                      <a:round/>
+                      <a:headEnd type="none" w="med" len="med"/>
+                      <a:tailEnd type="none" w="med" len="med"/>
+                    </a:lnR>
+                    <a:lnT w="9525" cap="flat" cmpd="sng" algn="ctr">
+                      <a:solidFill>
+                        <a:srgbClr val="D0D5DD"/>
+                      </a:solidFill>
+                      <a:prstDash val="solid"/>
+                      <a:round/>
+                      <a:headEnd type="none" w="med" len="med"/>
+                      <a:tailEnd type="none" w="med" len="med"/>
+                    </a:lnT>
+                    <a:lnB w="9525" cap="flat" cmpd="sng" algn="ctr">
+                      <a:solidFill>
+                        <a:srgbClr val="D0D5DD"/>
+                      </a:solidFill>
+                      <a:prstDash val="solid"/>
+                      <a:round/>
+                      <a:headEnd type="none" w="med" len="med"/>
+                      <a:tailEnd type="none" w="med" len="med"/>
+                    </a:lnB>
+                    <a:solidFill>
+                      <a:srgbClr val="0B5D2A"/>
+                    </a:solidFill>
+                  </a:tcPr>
+                </a:tc>
+                <a:tc>
+                  <a:txBody>
+                    <a:bodyPr/>
+                    <a:lstStyle/>
+                    <a:p>
+                      <a:pPr algn="ctr" indent="0" marL="0">
+                        <a:buNone/>
+                      </a:pPr>
+                      <a:r>
+                        <a:rPr lang="en-US" sz="1100" b="1" dirty="0">
+                          <a:solidFill>
+                            <a:srgbClr val="FFFFFF"/>
+                          </a:solidFill>
+                        </a:rPr>
+                        <a:t>48 h</a:t>
+                      </a:r>
+                      <a:endParaRPr lang="en-US" sz="1100" dirty="0"/>
+                    </a:p>
+                  </a:txBody>
+                  <a:tcPr marL="54864" marR="54864" marT="27432" marB="27432" anchor="ctr">
+                    <a:lnL w="9525" cap="flat" cmpd="sng" algn="ctr">
+                      <a:solidFill>
+                        <a:srgbClr val="D0D5DD"/>
+                      </a:solidFill>
+                      <a:prstDash val="solid"/>
+                      <a:round/>
+                      <a:headEnd type="none" w="med" len="med"/>
+                      <a:tailEnd type="none" w="med" len="med"/>
+                    </a:lnL>
+                    <a:lnR w="9525" cap="flat" cmpd="sng" algn="ctr">
+                      <a:solidFill>
+                        <a:srgbClr val="D0D5DD"/>
+                      </a:solidFill>
+                      <a:prstDash val="solid"/>
+                      <a:round/>
+                      <a:headEnd type="none" w="med" len="med"/>
+                      <a:tailEnd type="none" w="med" len="med"/>
+                    </a:lnR>
+                    <a:lnT w="9525" cap="flat" cmpd="sng" algn="ctr">
+                      <a:solidFill>
+                        <a:srgbClr val="D0D5DD"/>
+                      </a:solidFill>
+                      <a:prstDash val="solid"/>
+                      <a:round/>
+                      <a:headEnd type="none" w="med" len="med"/>
+                      <a:tailEnd type="none" w="med" len="med"/>
+                    </a:lnT>
+                    <a:lnB w="9525" cap="flat" cmpd="sng" algn="ctr">
+                      <a:solidFill>
+                        <a:srgbClr val="D0D5DD"/>
+                      </a:solidFill>
+                      <a:prstDash val="solid"/>
+                      <a:round/>
+                      <a:headEnd type="none" w="med" len="med"/>
+                      <a:tailEnd type="none" w="med" len="med"/>
+                    </a:lnB>
+                    <a:solidFill>
+                      <a:srgbClr val="0B5D2A"/>
+                    </a:solidFill>
+                  </a:tcPr>
+                </a:tc>
+                <a:tc>
+                  <a:txBody>
+                    <a:bodyPr/>
+                    <a:lstStyle/>
+                    <a:p>
+                      <a:pPr algn="ctr" indent="0" marL="0">
+                        <a:buNone/>
+                      </a:pPr>
+                      <a:r>
+                        <a:rPr lang="en-US" sz="1100" b="1" dirty="0">
+                          <a:solidFill>
+                            <a:srgbClr val="FFFFFF"/>
+                          </a:solidFill>
+                        </a:rPr>
+                        <a:t>72 h</a:t>
+                      </a:r>
+                      <a:endParaRPr lang="en-US" sz="1100" dirty="0"/>
+                    </a:p>
+                  </a:txBody>
+                  <a:tcPr marL="54864" marR="54864" marT="27432" marB="27432" anchor="ctr">
+                    <a:lnL w="9525" cap="flat" cmpd="sng" algn="ctr">
+                      <a:solidFill>
+                        <a:srgbClr val="D0D5DD"/>
+                      </a:solidFill>
+                      <a:prstDash val="solid"/>
+                      <a:round/>
+                      <a:headEnd type="none" w="med" len="med"/>
+                      <a:tailEnd type="none" w="med" len="med"/>
+                    </a:lnL>
+                    <a:lnR w="9525" cap="flat" cmpd="sng" algn="ctr">
+                      <a:solidFill>
+                        <a:srgbClr val="D0D5DD"/>
+                      </a:solidFill>
+                      <a:prstDash val="solid"/>
+                      <a:round/>
+                      <a:headEnd type="none" w="med" len="med"/>
+                      <a:tailEnd type="none" w="med" len="med"/>
+                    </a:lnR>
+                    <a:lnT w="9525" cap="flat" cmpd="sng" algn="ctr">
+                      <a:solidFill>
+                        <a:srgbClr val="D0D5DD"/>
+                      </a:solidFill>
+                      <a:prstDash val="solid"/>
+                      <a:round/>
+                      <a:headEnd type="none" w="med" len="med"/>
+                      <a:tailEnd type="none" w="med" len="med"/>
+                    </a:lnT>
+                    <a:lnB w="9525" cap="flat" cmpd="sng" algn="ctr">
+                      <a:solidFill>
+                        <a:srgbClr val="D0D5DD"/>
+                      </a:solidFill>
+                      <a:prstDash val="solid"/>
+                      <a:round/>
+                      <a:headEnd type="none" w="med" len="med"/>
+                      <a:tailEnd type="none" w="med" len="med"/>
+                    </a:lnB>
+                    <a:solidFill>
+                      <a:srgbClr val="0B5D2A"/>
+                    </a:solidFill>
+                  </a:tcPr>
+                </a:tc>
+              </a:tr>
+              <a:tr h="502920">
+                <a:tc>
+                  <a:txBody>
+                    <a:bodyPr/>
+                    <a:lstStyle/>
+                    <a:p>
+                      <a:pPr algn="ctr" indent="0" marL="0">
+                        <a:buNone/>
+                      </a:pPr>
+                      <a:r>
+                        <a:rPr lang="en-US" sz="1100" b="1" dirty="0">
+                          <a:solidFill>
+                            <a:srgbClr val="0B5D2A"/>
+                          </a:solidFill>
+                        </a:rPr>
+                        <a:t>Model (GBM)</a:t>
+                      </a:r>
+                      <a:endParaRPr lang="en-US" sz="1100" dirty="0"/>
+                    </a:p>
+                  </a:txBody>
+                  <a:tcPr marL="54864" marR="54864" marT="27432" marB="27432" anchor="ctr">
+                    <a:lnL w="9525" cap="flat" cmpd="sng" algn="ctr">
+                      <a:solidFill>
+                        <a:srgbClr val="D0D5DD"/>
+                      </a:solidFill>
+                      <a:prstDash val="solid"/>
+                      <a:round/>
+                      <a:headEnd type="none" w="med" len="med"/>
+                      <a:tailEnd type="none" w="med" len="med"/>
+                    </a:lnL>
+                    <a:lnR w="9525" cap="flat" cmpd="sng" algn="ctr">
+                      <a:solidFill>
+                        <a:srgbClr val="D0D5DD"/>
+                      </a:solidFill>
+                      <a:prstDash val="solid"/>
+                      <a:round/>
+                      <a:headEnd type="none" w="med" len="med"/>
+                      <a:tailEnd type="none" w="med" len="med"/>
+                    </a:lnR>
+                    <a:lnT w="9525" cap="flat" cmpd="sng" algn="ctr">
+                      <a:solidFill>
+                        <a:srgbClr val="D0D5DD"/>
+                      </a:solidFill>
+                      <a:prstDash val="solid"/>
+                      <a:round/>
+                      <a:headEnd type="none" w="med" len="med"/>
+                      <a:tailEnd type="none" w="med" len="med"/>
+                    </a:lnT>
+                    <a:lnB w="9525" cap="flat" cmpd="sng" algn="ctr">
+                      <a:solidFill>
+                        <a:srgbClr val="D0D5DD"/>
+                      </a:solidFill>
+                      <a:prstDash val="solid"/>
+                      <a:round/>
+                      <a:headEnd type="none" w="med" len="med"/>
+                      <a:tailEnd type="none" w="med" len="med"/>
+                    </a:lnB>
+                  </a:tcPr>
+                </a:tc>
+                <a:tc>
+                  <a:txBody>
+                    <a:bodyPr/>
+                    <a:lstStyle/>
+                    <a:p>
+                      <a:pPr algn="ctr" indent="0" marL="0">
+                        <a:buNone/>
+                      </a:pPr>
+                      <a:r>
+                        <a:rPr lang="en-US" sz="1100" b="1" dirty="0">
+                          <a:solidFill>
+                            <a:srgbClr val="0B5D2A"/>
+                          </a:solidFill>
+                        </a:rPr>
+                        <a:t>0.0177</a:t>
+                      </a:r>
+                      <a:endParaRPr lang="en-US" sz="1100" dirty="0"/>
+                    </a:p>
+                    <a:p>
+                      <a:pPr algn="ctr" indent="0" marL="0">
+                        <a:buNone/>
+                      </a:pPr>
+                      <a:r>
+                        <a:rPr lang="en-US" sz="1100" b="1" dirty="0">
+                          <a:solidFill>
+                            <a:srgbClr val="0B5D2A"/>
+                          </a:solidFill>
+                        </a:rPr>
+                        <a:t>[0.0146, 0.0213]</a:t>
+                      </a:r>
+                      <a:endParaRPr lang="en-US" sz="1100" dirty="0"/>
+                    </a:p>
+                  </a:txBody>
+                  <a:tcPr marL="54864" marR="54864" marT="27432" marB="27432" anchor="ctr">
+                    <a:lnL w="9525" cap="flat" cmpd="sng" algn="ctr">
+                      <a:solidFill>
+                        <a:srgbClr val="D0D5DD"/>
+                      </a:solidFill>
+                      <a:prstDash val="solid"/>
+                      <a:round/>
+                      <a:headEnd type="none" w="med" len="med"/>
+                      <a:tailEnd type="none" w="med" len="med"/>
+                    </a:lnL>
+                    <a:lnR w="9525" cap="flat" cmpd="sng" algn="ctr">
+                      <a:solidFill>
+                        <a:srgbClr val="D0D5DD"/>
+                      </a:solidFill>
+                      <a:prstDash val="solid"/>
+                      <a:round/>
+                      <a:headEnd type="none" w="med" len="med"/>
+                      <a:tailEnd type="none" w="med" len="med"/>
+                    </a:lnR>
+                    <a:lnT w="9525" cap="flat" cmpd="sng" algn="ctr">
+                      <a:solidFill>
+                        <a:srgbClr val="D0D5DD"/>
+                      </a:solidFill>
+                      <a:prstDash val="solid"/>
+                      <a:round/>
+                      <a:headEnd type="none" w="med" len="med"/>
+                      <a:tailEnd type="none" w="med" len="med"/>
+                    </a:lnT>
+                    <a:lnB w="9525" cap="flat" cmpd="sng" algn="ctr">
+                      <a:solidFill>
+                        <a:srgbClr val="D0D5DD"/>
+                      </a:solidFill>
+                      <a:prstDash val="solid"/>
+                      <a:round/>
+                      <a:headEnd type="none" w="med" len="med"/>
+                      <a:tailEnd type="none" w="med" len="med"/>
+                    </a:lnB>
+                  </a:tcPr>
+                </a:tc>
+                <a:tc>
+                  <a:txBody>
+                    <a:bodyPr/>
+                    <a:lstStyle/>
+                    <a:p>
+                      <a:pPr algn="ctr" indent="0" marL="0">
+                        <a:buNone/>
+                      </a:pPr>
+                      <a:r>
+                        <a:rPr lang="en-US" sz="1100" b="1" dirty="0">
+                          <a:solidFill>
+                            <a:srgbClr val="0B5D2A"/>
+                          </a:solidFill>
+                        </a:rPr>
+                        <a:t>0.0178</a:t>
+                      </a:r>
+                      <a:endParaRPr lang="en-US" sz="1100" dirty="0"/>
+                    </a:p>
+                    <a:p>
+                      <a:pPr algn="ctr" indent="0" marL="0">
+                        <a:buNone/>
+                      </a:pPr>
+                      <a:r>
+                        <a:rPr lang="en-US" sz="1100" b="1" dirty="0">
+                          <a:solidFill>
+                            <a:srgbClr val="0B5D2A"/>
+                          </a:solidFill>
+                        </a:rPr>
+                        <a:t>[0.0147, 0.0214]</a:t>
+                      </a:r>
+                      <a:endParaRPr lang="en-US" sz="1100" dirty="0"/>
+                    </a:p>
+                  </a:txBody>
+                  <a:tcPr marL="54864" marR="54864" marT="27432" marB="27432" anchor="ctr">
+                    <a:lnL w="9525" cap="flat" cmpd="sng" algn="ctr">
+                      <a:solidFill>
+                        <a:srgbClr val="D0D5DD"/>
+                      </a:solidFill>
+                      <a:prstDash val="solid"/>
+                      <a:round/>
+                      <a:headEnd type="none" w="med" len="med"/>
+                      <a:tailEnd type="none" w="med" len="med"/>
+                    </a:lnL>
+                    <a:lnR w="9525" cap="flat" cmpd="sng" algn="ctr">
+                      <a:solidFill>
+                        <a:srgbClr val="D0D5DD"/>
+                      </a:solidFill>
+                      <a:prstDash val="solid"/>
+                      <a:round/>
+                      <a:headEnd type="none" w="med" len="med"/>
+                      <a:tailEnd type="none" w="med" len="med"/>
+                    </a:lnR>
+                    <a:lnT w="9525" cap="flat" cmpd="sng" algn="ctr">
+                      <a:solidFill>
+                        <a:srgbClr val="D0D5DD"/>
+                      </a:solidFill>
+                      <a:prstDash val="solid"/>
+                      <a:round/>
+                      <a:headEnd type="none" w="med" len="med"/>
+                      <a:tailEnd type="none" w="med" len="med"/>
+                    </a:lnT>
+                    <a:lnB w="9525" cap="flat" cmpd="sng" algn="ctr">
+                      <a:solidFill>
+                        <a:srgbClr val="D0D5DD"/>
+                      </a:solidFill>
+                      <a:prstDash val="solid"/>
+                      <a:round/>
+                      <a:headEnd type="none" w="med" len="med"/>
+                      <a:tailEnd type="none" w="med" len="med"/>
+                    </a:lnB>
+                  </a:tcPr>
+                </a:tc>
+                <a:tc>
+                  <a:txBody>
+                    <a:bodyPr/>
+                    <a:lstStyle/>
+                    <a:p>
+                      <a:pPr algn="ctr" indent="0" marL="0">
+                        <a:buNone/>
+                      </a:pPr>
+                      <a:r>
+                        <a:rPr lang="en-US" sz="1100" b="1" dirty="0">
+                          <a:solidFill>
+                            <a:srgbClr val="0B5D2A"/>
+                          </a:solidFill>
+                        </a:rPr>
+                        <a:t>0.0179</a:t>
+                      </a:r>
+                      <a:endParaRPr lang="en-US" sz="1100" dirty="0"/>
+                    </a:p>
+                    <a:p>
+                      <a:pPr algn="ctr" indent="0" marL="0">
+                        <a:buNone/>
+                      </a:pPr>
+                      <a:r>
+                        <a:rPr lang="en-US" sz="1100" b="1" dirty="0">
+                          <a:solidFill>
+                            <a:srgbClr val="0B5D2A"/>
+                          </a:solidFill>
+                        </a:rPr>
+                        <a:t>[0.0148, 0.0215]</a:t>
+                      </a:r>
+                      <a:endParaRPr lang="en-US" sz="1100" dirty="0"/>
+                    </a:p>
+                  </a:txBody>
+                  <a:tcPr marL="54864" marR="54864" marT="27432" marB="27432" anchor="ctr">
+                    <a:lnL w="9525" cap="flat" cmpd="sng" algn="ctr">
+                      <a:solidFill>
+                        <a:srgbClr val="D0D5DD"/>
+                      </a:solidFill>
+                      <a:prstDash val="solid"/>
+                      <a:round/>
+                      <a:headEnd type="none" w="med" len="med"/>
+                      <a:tailEnd type="none" w="med" len="med"/>
+                    </a:lnL>
+                    <a:lnR w="9525" cap="flat" cmpd="sng" algn="ctr">
+                      <a:solidFill>
+                        <a:srgbClr val="D0D5DD"/>
+                      </a:solidFill>
+                      <a:prstDash val="solid"/>
+                      <a:round/>
+                      <a:headEnd type="none" w="med" len="med"/>
+                      <a:tailEnd type="none" w="med" len="med"/>
+                    </a:lnR>
+                    <a:lnT w="9525" cap="flat" cmpd="sng" algn="ctr">
+                      <a:solidFill>
+                        <a:srgbClr val="D0D5DD"/>
+                      </a:solidFill>
+                      <a:prstDash val="solid"/>
+                      <a:round/>
+                      <a:headEnd type="none" w="med" len="med"/>
+                      <a:tailEnd type="none" w="med" len="med"/>
+                    </a:lnT>
+                    <a:lnB w="9525" cap="flat" cmpd="sng" algn="ctr">
+                      <a:solidFill>
+                        <a:srgbClr val="D0D5DD"/>
+                      </a:solidFill>
+                      <a:prstDash val="solid"/>
+                      <a:round/>
+                      <a:headEnd type="none" w="med" len="med"/>
+                      <a:tailEnd type="none" w="med" len="med"/>
+                    </a:lnB>
+                  </a:tcPr>
+                </a:tc>
+              </a:tr>
+              <a:tr h="502920">
+                <a:tc>
+                  <a:txBody>
+                    <a:bodyPr/>
+                    <a:lstStyle/>
+                    <a:p>
+                      <a:pPr algn="ctr" indent="0" marL="0">
+                        <a:buNone/>
+                      </a:pPr>
+                      <a:r>
+                        <a:rPr lang="en-US" sz="1100" dirty="0">
+                          <a:solidFill>
+                            <a:srgbClr val="1F2933"/>
+                          </a:solidFill>
+                        </a:rPr>
+                        <a:t>Climatology (declared)</a:t>
+                      </a:r>
+                      <a:endParaRPr lang="en-US" sz="1100" dirty="0"/>
+                    </a:p>
+                  </a:txBody>
+                  <a:tcPr marL="54864" marR="54864" marT="27432" marB="27432" anchor="ctr">
+                    <a:lnL w="9525" cap="flat" cmpd="sng" algn="ctr">
+                      <a:solidFill>
+                        <a:srgbClr val="D0D5DD"/>
+                      </a:solidFill>
+                      <a:prstDash val="solid"/>
+                      <a:round/>
+                      <a:headEnd type="none" w="med" len="med"/>
+                      <a:tailEnd type="none" w="med" len="med"/>
+                    </a:lnL>
+                    <a:lnR w="9525" cap="flat" cmpd="sng" algn="ctr">
+                      <a:solidFill>
+                        <a:srgbClr val="D0D5DD"/>
+                      </a:solidFill>
+                      <a:prstDash val="solid"/>
+                      <a:round/>
+                      <a:headEnd type="none" w="med" len="med"/>
+                      <a:tailEnd type="none" w="med" len="med"/>
+                    </a:lnR>
+                    <a:lnT w="9525" cap="flat" cmpd="sng" algn="ctr">
+                      <a:solidFill>
+                        <a:srgbClr val="D0D5DD"/>
+                      </a:solidFill>
+                      <a:prstDash val="solid"/>
+                      <a:round/>
+                      <a:headEnd type="none" w="med" len="med"/>
+                      <a:tailEnd type="none" w="med" len="med"/>
+                    </a:lnT>
+                    <a:lnB w="9525" cap="flat" cmpd="sng" algn="ctr">
+                      <a:solidFill>
+                        <a:srgbClr val="D0D5DD"/>
+                      </a:solidFill>
+                      <a:prstDash val="solid"/>
+                      <a:round/>
+                      <a:headEnd type="none" w="med" len="med"/>
+                      <a:tailEnd type="none" w="med" len="med"/>
+                    </a:lnB>
+                  </a:tcPr>
+                </a:tc>
+                <a:tc>
+                  <a:txBody>
+                    <a:bodyPr/>
+                    <a:lstStyle/>
+                    <a:p>
+                      <a:pPr algn="ctr" indent="0" marL="0">
+                        <a:buNone/>
+                      </a:pPr>
+                      <a:r>
+                        <a:rPr lang="en-US" sz="1100" dirty="0">
+                          <a:solidFill>
+                            <a:srgbClr val="1F2933"/>
+                          </a:solidFill>
+                        </a:rPr>
+                        <a:t>0.0192</a:t>
+                      </a:r>
+                      <a:endParaRPr lang="en-US" sz="1100" dirty="0"/>
+                    </a:p>
+                    <a:p>
+                      <a:pPr algn="ctr" indent="0" marL="0">
+                        <a:buNone/>
+                      </a:pPr>
+                      <a:r>
+                        <a:rPr lang="en-US" sz="1100" dirty="0">
+                          <a:solidFill>
+                            <a:srgbClr val="1F2933"/>
+                          </a:solidFill>
+                        </a:rPr>
+                        <a:t>[0.0156, 0.0231]</a:t>
+                      </a:r>
+                      <a:endParaRPr lang="en-US" sz="1100" dirty="0"/>
+                    </a:p>
+                  </a:txBody>
+                  <a:tcPr marL="54864" marR="54864" marT="27432" marB="27432" anchor="ctr">
+                    <a:lnL w="9525" cap="flat" cmpd="sng" algn="ctr">
+                      <a:solidFill>
+                        <a:srgbClr val="D0D5DD"/>
+                      </a:solidFill>
+                      <a:prstDash val="solid"/>
+                      <a:round/>
+                      <a:headEnd type="none" w="med" len="med"/>
+                      <a:tailEnd type="none" w="med" len="med"/>
+                    </a:lnL>
+                    <a:lnR w="9525" cap="flat" cmpd="sng" algn="ctr">
+                      <a:solidFill>
+                        <a:srgbClr val="D0D5DD"/>
+                      </a:solidFill>
+                      <a:prstDash val="solid"/>
+                      <a:round/>
+                      <a:headEnd type="none" w="med" len="med"/>
+                      <a:tailEnd type="none" w="med" len="med"/>
+                    </a:lnR>
+                    <a:lnT w="9525" cap="flat" cmpd="sng" algn="ctr">
+                      <a:solidFill>
+                        <a:srgbClr val="D0D5DD"/>
+                      </a:solidFill>
+                      <a:prstDash val="solid"/>
+                      <a:round/>
+                      <a:headEnd type="none" w="med" len="med"/>
+                      <a:tailEnd type="none" w="med" len="med"/>
+                    </a:lnT>
+                    <a:lnB w="9525" cap="flat" cmpd="sng" algn="ctr">
+                      <a:solidFill>
+                        <a:srgbClr val="D0D5DD"/>
+                      </a:solidFill>
+                      <a:prstDash val="solid"/>
+                      <a:round/>
+                      <a:headEnd type="none" w="med" len="med"/>
+                      <a:tailEnd type="none" w="med" len="med"/>
+                    </a:lnB>
+                  </a:tcPr>
+                </a:tc>
+                <a:tc>
+                  <a:txBody>
+                    <a:bodyPr/>
+                    <a:lstStyle/>
+                    <a:p>
+                      <a:pPr algn="ctr" indent="0" marL="0">
+                        <a:buNone/>
+                      </a:pPr>
+                      <a:r>
+                        <a:rPr lang="en-US" sz="1100" dirty="0">
+                          <a:solidFill>
+                            <a:srgbClr val="1F2933"/>
+                          </a:solidFill>
+                        </a:rPr>
+                        <a:t>0.0192</a:t>
+                      </a:r>
+                      <a:endParaRPr lang="en-US" sz="1100" dirty="0"/>
+                    </a:p>
+                  </a:txBody>
+                  <a:tcPr marL="54864" marR="54864" marT="27432" marB="27432" anchor="ctr">
+                    <a:lnL w="9525" cap="flat" cmpd="sng" algn="ctr">
+                      <a:solidFill>
+                        <a:srgbClr val="D0D5DD"/>
+                      </a:solidFill>
+                      <a:prstDash val="solid"/>
+                      <a:round/>
+                      <a:headEnd type="none" w="med" len="med"/>
+                      <a:tailEnd type="none" w="med" len="med"/>
+                    </a:lnL>
+                    <a:lnR w="9525" cap="flat" cmpd="sng" algn="ctr">
+                      <a:solidFill>
+                        <a:srgbClr val="D0D5DD"/>
+                      </a:solidFill>
+                      <a:prstDash val="solid"/>
+                      <a:round/>
+                      <a:headEnd type="none" w="med" len="med"/>
+                      <a:tailEnd type="none" w="med" len="med"/>
+                    </a:lnR>
+                    <a:lnT w="9525" cap="flat" cmpd="sng" algn="ctr">
+                      <a:solidFill>
+                        <a:srgbClr val="D0D5DD"/>
+                      </a:solidFill>
+                      <a:prstDash val="solid"/>
+                      <a:round/>
+                      <a:headEnd type="none" w="med" len="med"/>
+                      <a:tailEnd type="none" w="med" len="med"/>
+                    </a:lnT>
+                    <a:lnB w="9525" cap="flat" cmpd="sng" algn="ctr">
+                      <a:solidFill>
+                        <a:srgbClr val="D0D5DD"/>
+                      </a:solidFill>
+                      <a:prstDash val="solid"/>
+                      <a:round/>
+                      <a:headEnd type="none" w="med" len="med"/>
+                      <a:tailEnd type="none" w="med" len="med"/>
+                    </a:lnB>
+                  </a:tcPr>
+                </a:tc>
+                <a:tc>
+                  <a:txBody>
+                    <a:bodyPr/>
+                    <a:lstStyle/>
+                    <a:p>
+                      <a:pPr algn="ctr" indent="0" marL="0">
+                        <a:buNone/>
+                      </a:pPr>
+                      <a:r>
+                        <a:rPr lang="en-US" sz="1100" dirty="0">
+                          <a:solidFill>
+                            <a:srgbClr val="1F2933"/>
+                          </a:solidFill>
+                        </a:rPr>
+                        <a:t>0.0192</a:t>
+                      </a:r>
+                      <a:endParaRPr lang="en-US" sz="1100" dirty="0"/>
+                    </a:p>
+                  </a:txBody>
+                  <a:tcPr marL="54864" marR="54864" marT="27432" marB="27432" anchor="ctr">
+                    <a:lnL w="9525" cap="flat" cmpd="sng" algn="ctr">
+                      <a:solidFill>
+                        <a:srgbClr val="D0D5DD"/>
+                      </a:solidFill>
+                      <a:prstDash val="solid"/>
+                      <a:round/>
+                      <a:headEnd type="none" w="med" len="med"/>
+                      <a:tailEnd type="none" w="med" len="med"/>
+                    </a:lnL>
+                    <a:lnR w="9525" cap="flat" cmpd="sng" algn="ctr">
+                      <a:solidFill>
+                        <a:srgbClr val="D0D5DD"/>
+                      </a:solidFill>
+                      <a:prstDash val="solid"/>
+                      <a:round/>
+                      <a:headEnd type="none" w="med" len="med"/>
+                      <a:tailEnd type="none" w="med" len="med"/>
+                    </a:lnR>
+                    <a:lnT w="9525" cap="flat" cmpd="sng" algn="ctr">
+                      <a:solidFill>
+                        <a:srgbClr val="D0D5DD"/>
+                      </a:solidFill>
+                      <a:prstDash val="solid"/>
+                      <a:round/>
+                      <a:headEnd type="none" w="med" len="med"/>
+                      <a:tailEnd type="none" w="med" len="med"/>
+                    </a:lnT>
+                    <a:lnB w="9525" cap="flat" cmpd="sng" algn="ctr">
+                      <a:solidFill>
+                        <a:srgbClr val="D0D5DD"/>
+                      </a:solidFill>
+                      <a:prstDash val="solid"/>
+                      <a:round/>
+                      <a:headEnd type="none" w="med" len="med"/>
+                      <a:tailEnd type="none" w="med" len="med"/>
+                    </a:lnB>
+                  </a:tcPr>
+                </a:tc>
+              </a:tr>
+              <a:tr h="502920">
+                <a:tc>
+                  <a:txBody>
+                    <a:bodyPr/>
+                    <a:lstStyle/>
+                    <a:p>
+                      <a:pPr algn="ctr" indent="0" marL="0">
+                        <a:buNone/>
+                      </a:pPr>
+                      <a:r>
+                        <a:rPr lang="en-US" sz="1100" dirty="0">
+                          <a:solidFill>
+                            <a:srgbClr val="1F2933"/>
+                          </a:solidFill>
+                        </a:rPr>
+                        <a:t>Paired difference</a:t>
+                      </a:r>
+                      <a:endParaRPr lang="en-US" sz="1100" dirty="0"/>
+                    </a:p>
+                  </a:txBody>
+                  <a:tcPr marL="54864" marR="54864" marT="27432" marB="27432" anchor="ctr">
+                    <a:lnL w="9525" cap="flat" cmpd="sng" algn="ctr">
+                      <a:solidFill>
+                        <a:srgbClr val="D0D5DD"/>
+                      </a:solidFill>
+                      <a:prstDash val="solid"/>
+                      <a:round/>
+                      <a:headEnd type="none" w="med" len="med"/>
+                      <a:tailEnd type="none" w="med" len="med"/>
+                    </a:lnL>
+                    <a:lnR w="9525" cap="flat" cmpd="sng" algn="ctr">
+                      <a:solidFill>
+                        <a:srgbClr val="D0D5DD"/>
+                      </a:solidFill>
+                      <a:prstDash val="solid"/>
+                      <a:round/>
+                      <a:headEnd type="none" w="med" len="med"/>
+                      <a:tailEnd type="none" w="med" len="med"/>
+                    </a:lnR>
+                    <a:lnT w="9525" cap="flat" cmpd="sng" algn="ctr">
+                      <a:solidFill>
+                        <a:srgbClr val="D0D5DD"/>
+                      </a:solidFill>
+                      <a:prstDash val="solid"/>
+                      <a:round/>
+                      <a:headEnd type="none" w="med" len="med"/>
+                      <a:tailEnd type="none" w="med" len="med"/>
+                    </a:lnT>
+                    <a:lnB w="9525" cap="flat" cmpd="sng" algn="ctr">
+                      <a:solidFill>
+                        <a:srgbClr val="D0D5DD"/>
+                      </a:solidFill>
+                      <a:prstDash val="solid"/>
+                      <a:round/>
+                      <a:headEnd type="none" w="med" len="med"/>
+                      <a:tailEnd type="none" w="med" len="med"/>
+                    </a:lnB>
+                  </a:tcPr>
+                </a:tc>
+                <a:tc>
+                  <a:txBody>
+                    <a:bodyPr/>
+                    <a:lstStyle/>
+                    <a:p>
+                      <a:pPr algn="ctr" indent="0" marL="0">
+                        <a:buNone/>
+                      </a:pPr>
+                      <a:r>
+                        <a:rPr lang="en-US" sz="1100" dirty="0">
+                          <a:solidFill>
+                            <a:srgbClr val="1F2933"/>
+                          </a:solidFill>
+                        </a:rPr>
+                        <a:t>−0.0014</a:t>
+                      </a:r>
+                      <a:endParaRPr lang="en-US" sz="1100" dirty="0"/>
+                    </a:p>
+                    <a:p>
+                      <a:pPr algn="ctr" indent="0" marL="0">
+                        <a:buNone/>
+                      </a:pPr>
+                      <a:r>
+                        <a:rPr lang="en-US" sz="1100" dirty="0">
+                          <a:solidFill>
+                            <a:srgbClr val="1F2933"/>
+                          </a:solidFill>
+                        </a:rPr>
+                        <a:t>[−0.0022, −0.0008]</a:t>
+                      </a:r>
+                      <a:endParaRPr lang="en-US" sz="1100" dirty="0"/>
+                    </a:p>
+                  </a:txBody>
+                  <a:tcPr marL="54864" marR="54864" marT="27432" marB="27432" anchor="ctr">
+                    <a:lnL w="9525" cap="flat" cmpd="sng" algn="ctr">
+                      <a:solidFill>
+                        <a:srgbClr val="D0D5DD"/>
+                      </a:solidFill>
+                      <a:prstDash val="solid"/>
+                      <a:round/>
+                      <a:headEnd type="none" w="med" len="med"/>
+                      <a:tailEnd type="none" w="med" len="med"/>
+                    </a:lnL>
+                    <a:lnR w="9525" cap="flat" cmpd="sng" algn="ctr">
+                      <a:solidFill>
+                        <a:srgbClr val="D0D5DD"/>
+                      </a:solidFill>
+                      <a:prstDash val="solid"/>
+                      <a:round/>
+                      <a:headEnd type="none" w="med" len="med"/>
+                      <a:tailEnd type="none" w="med" len="med"/>
+                    </a:lnR>
+                    <a:lnT w="9525" cap="flat" cmpd="sng" algn="ctr">
+                      <a:solidFill>
+                        <a:srgbClr val="D0D5DD"/>
+                      </a:solidFill>
+                      <a:prstDash val="solid"/>
+                      <a:round/>
+                      <a:headEnd type="none" w="med" len="med"/>
+                      <a:tailEnd type="none" w="med" len="med"/>
+                    </a:lnT>
+                    <a:lnB w="9525" cap="flat" cmpd="sng" algn="ctr">
+                      <a:solidFill>
+                        <a:srgbClr val="D0D5DD"/>
+                      </a:solidFill>
+                      <a:prstDash val="solid"/>
+                      <a:round/>
+                      <a:headEnd type="none" w="med" len="med"/>
+                      <a:tailEnd type="none" w="med" len="med"/>
+                    </a:lnB>
+                  </a:tcPr>
+                </a:tc>
+                <a:tc>
+                  <a:txBody>
+                    <a:bodyPr/>
+                    <a:lstStyle/>
+                    <a:p>
+                      <a:pPr algn="ctr" indent="0" marL="0">
+                        <a:buNone/>
+                      </a:pPr>
+                      <a:r>
+                        <a:rPr lang="en-US" sz="1100" dirty="0">
+                          <a:solidFill>
+                            <a:srgbClr val="1F2933"/>
+                          </a:solidFill>
+                        </a:rPr>
+                        <a:t>−0.0013</a:t>
+                      </a:r>
+                      <a:endParaRPr lang="en-US" sz="1100" dirty="0"/>
+                    </a:p>
+                    <a:p>
+                      <a:pPr algn="ctr" indent="0" marL="0">
+                        <a:buNone/>
+                      </a:pPr>
+                      <a:r>
+                        <a:rPr lang="en-US" sz="1100" dirty="0">
+                          <a:solidFill>
+                            <a:srgbClr val="1F2933"/>
+                          </a:solidFill>
+                        </a:rPr>
+                        <a:t>[−0.0021, −0.0007]</a:t>
+                      </a:r>
+                      <a:endParaRPr lang="en-US" sz="1100" dirty="0"/>
+                    </a:p>
+                  </a:txBody>
+                  <a:tcPr marL="54864" marR="54864" marT="27432" marB="27432" anchor="ctr">
+                    <a:lnL w="9525" cap="flat" cmpd="sng" algn="ctr">
+                      <a:solidFill>
+                        <a:srgbClr val="D0D5DD"/>
+                      </a:solidFill>
+                      <a:prstDash val="solid"/>
+                      <a:round/>
+                      <a:headEnd type="none" w="med" len="med"/>
+                      <a:tailEnd type="none" w="med" len="med"/>
+                    </a:lnL>
+                    <a:lnR w="9525" cap="flat" cmpd="sng" algn="ctr">
+                      <a:solidFill>
+                        <a:srgbClr val="D0D5DD"/>
+                      </a:solidFill>
+                      <a:prstDash val="solid"/>
+                      <a:round/>
+                      <a:headEnd type="none" w="med" len="med"/>
+                      <a:tailEnd type="none" w="med" len="med"/>
+                    </a:lnR>
+                    <a:lnT w="9525" cap="flat" cmpd="sng" algn="ctr">
+                      <a:solidFill>
+                        <a:srgbClr val="D0D5DD"/>
+                      </a:solidFill>
+                      <a:prstDash val="solid"/>
+                      <a:round/>
+                      <a:headEnd type="none" w="med" len="med"/>
+                      <a:tailEnd type="none" w="med" len="med"/>
+                    </a:lnT>
+                    <a:lnB w="9525" cap="flat" cmpd="sng" algn="ctr">
+                      <a:solidFill>
+                        <a:srgbClr val="D0D5DD"/>
+                      </a:solidFill>
+                      <a:prstDash val="solid"/>
+                      <a:round/>
+                      <a:headEnd type="none" w="med" len="med"/>
+                      <a:tailEnd type="none" w="med" len="med"/>
+                    </a:lnB>
+                  </a:tcPr>
+                </a:tc>
+                <a:tc>
+                  <a:txBody>
+                    <a:bodyPr/>
+                    <a:lstStyle/>
+                    <a:p>
+                      <a:pPr algn="ctr" indent="0" marL="0">
+                        <a:buNone/>
+                      </a:pPr>
+                      <a:r>
+                        <a:rPr lang="en-US" sz="1100" dirty="0">
+                          <a:solidFill>
+                            <a:srgbClr val="1F2933"/>
+                          </a:solidFill>
+                        </a:rPr>
+                        <a:t>−0.0013</a:t>
+                      </a:r>
+                      <a:endParaRPr lang="en-US" sz="1100" dirty="0"/>
+                    </a:p>
+                    <a:p>
+                      <a:pPr algn="ctr" indent="0" marL="0">
+                        <a:buNone/>
+                      </a:pPr>
+                      <a:r>
+                        <a:rPr lang="en-US" sz="1100" dirty="0">
+                          <a:solidFill>
+                            <a:srgbClr val="1F2933"/>
+                          </a:solidFill>
+                        </a:rPr>
+                        <a:t>[−0.0019, −0.0007]</a:t>
+                      </a:r>
+                      <a:endParaRPr lang="en-US" sz="1100" dirty="0"/>
+                    </a:p>
+                  </a:txBody>
+                  <a:tcPr marL="54864" marR="54864" marT="27432" marB="27432" anchor="ctr">
+                    <a:lnL w="9525" cap="flat" cmpd="sng" algn="ctr">
+                      <a:solidFill>
+                        <a:srgbClr val="D0D5DD"/>
+                      </a:solidFill>
+                      <a:prstDash val="solid"/>
+                      <a:round/>
+                      <a:headEnd type="none" w="med" len="med"/>
+                      <a:tailEnd type="none" w="med" len="med"/>
+                    </a:lnL>
+                    <a:lnR w="9525" cap="flat" cmpd="sng" algn="ctr">
+                      <a:solidFill>
+                        <a:srgbClr val="D0D5DD"/>
+                      </a:solidFill>
+                      <a:prstDash val="solid"/>
+                      <a:round/>
+                      <a:headEnd type="none" w="med" len="med"/>
+                      <a:tailEnd type="none" w="med" len="med"/>
+                    </a:lnR>
+                    <a:lnT w="9525" cap="flat" cmpd="sng" algn="ctr">
+                      <a:solidFill>
+                        <a:srgbClr val="D0D5DD"/>
+                      </a:solidFill>
+                      <a:prstDash val="solid"/>
+                      <a:round/>
+                      <a:headEnd type="none" w="med" len="med"/>
+                      <a:tailEnd type="none" w="med" len="med"/>
+                    </a:lnT>
+                    <a:lnB w="9525" cap="flat" cmpd="sng" algn="ctr">
+                      <a:solidFill>
+                        <a:srgbClr val="D0D5DD"/>
+                      </a:solidFill>
+                      <a:prstDash val="solid"/>
+                      <a:round/>
+                      <a:headEnd type="none" w="med" len="med"/>
+                      <a:tailEnd type="none" w="med" len="med"/>
+                    </a:lnB>
+                  </a:tcPr>
+                </a:tc>
+              </a:tr>
+            </a:tbl>
+          </a:graphicData>
+        </a:graphic>
+      </p:graphicFrame>
+      <p:sp>
+        <p:nvSpPr>
+          <p:cNvPr id="5" name="Text 2"/>
+          <p:cNvSpPr txBox="1"/>
+          <p:nvPr/>
+        </p:nvSpPr>
+        <p:spPr>
+          <a:xfrm>
+            <a:off x="457200" y="3200400"/>
+            <a:ext cx="4937760" cy="914400"/>
+          </a:xfrm>
+          <a:prstGeom prst="rect">
+            <a:avLst/>
+          </a:prstGeom>
+          <a:noFill/>
+          <a:ln/>
+        </p:spPr>
+        <p:txBody>
+          <a:bodyPr wrap="square" lIns="0" tIns="0" rIns="0" bIns="0" rtlCol="0" anchor="t"/>
+          <a:lstStyle/>
+          <a:p>
+            <a:pPr indent="0" marL="0">
+              <a:spcAft>
+                <a:spcPts val="400"/>
+              </a:spcAft>
+              <a:buNone/>
+            </a:pPr>
+            <a:r>
+              <a:rPr lang="en-US" sz="1150" dirty="0">
+                <a:solidFill>
+                  <a:schemeClr val="tx1"/>
+                </a:solidFill>
+              </a:rPr>
+              <a:t>Monsoon months: 0.0237 vs 0.0251 · Validation (model choice): GBM 0.0233, logistic 0.0238, climatology 0.0249</a:t>
+            </a:r>
+            <a:endParaRPr lang="en-US" sz="1150" dirty="0"/>
+          </a:p>
+          <a:p>
+            <a:pPr indent="0" marL="0">
+              <a:spcAft>
+                <a:spcPts val="400"/>
+              </a:spcAft>
+              <a:buNone/>
+            </a:pPr>
+            <a:r>
+              <a:rPr lang="en-US" sz="1150" dirty="0">
+                <a:solidFill>
+                  <a:schemeClr val="tx1"/>
+                </a:solidFill>
+              </a:rPr>
+              <a:t>Time-based splits (train ≤ Jun 2025, validate Jul–Dec 2025), leakage tests on every feature, test locked in code</a:t>
+            </a:r>
+            <a:endParaRPr lang="en-US" sz="1150" dirty="0"/>
+          </a:p>
+        </p:txBody>
+      </p:sp>
+      <p:graphicFrame>
+        <p:nvGraphicFramePr>
+          <p:cNvPr id="6" name="Chart 0" descr=""/>
+          <p:cNvGraphicFramePr/>
+          <p:nvPr/>
+        </p:nvGraphicFramePr>
+        <p:xfrm>
+          <a:off x="5577840" y="914400"/>
+          <a:ext cx="3108960" cy="3246120"/>
+        </p:xfrm>
+        <a:graphic xmlns:a="http://schemas.openxmlformats.org/drawingml/2006/main">
+          <a:graphicData uri="http://schemas.openxmlformats.org/drawingml/2006/chart">
+            <c:chart xmlns:c="http://schemas.openxmlformats.org/drawingml/2006/chart" r:id="rId1"/>
+          </a:graphicData>
+        </a:graphic>
+      </p:graphicFrame>
+      <p:sp>
+        <p:nvSpPr>
+          <p:cNvPr id="7" name="Text 3"/>
+          <p:cNvSpPr txBox="1"/>
+          <p:nvPr/>
+        </p:nvSpPr>
+        <p:spPr>
+          <a:xfrm>
+            <a:off x="5577840" y="4160520"/>
+            <a:ext cx="3108960" cy="502920"/>
+          </a:xfrm>
+          <a:prstGeom prst="rect">
+            <a:avLst/>
+          </a:prstGeom>
+          <a:noFill/>
+          <a:ln/>
+        </p:spPr>
+        <p:txBody>
+          <a:bodyPr wrap="square" lIns="0" tIns="0" rIns="0" bIns="0" rtlCol="0" anchor="t"/>
+          <a:lstStyle/>
+          <a:p>
+            <a:pPr indent="0" marL="0">
+              <a:buNone/>
+            </a:pPr>
+            <a:r>
+              <a:rPr lang="en-US" sz="1100" dirty="0">
+                <a:solidFill>
+                  <a:schemeClr val="accent6"/>
+                </a:solidFill>
+              </a:rPr>
+              <a:t>Weakest: Azad Kashmir (+1.5%). Model B (prices) did not beat “no change” (MAE 1.667 vs 1.665): rejected and shown as baseline.</a:t>
+            </a:r>
+            <a:endParaRPr lang="en-US" sz="1100" dirty="0"/>
+          </a:p>
+        </p:txBody>
+      </p:sp>
+      <p:sp>
+        <p:nvSpPr>
+          <p:cNvPr id="25" name="Slide Number Placeholder 0"/>
+          <p:cNvSpPr>
+            <a:spLocks noGrp="1"/>
+          </p:cNvSpPr>
+          <p:nvPr>
+            <p:ph type="sldNum" sz="quarter" idx="4294967295"/>
+          </p:nvPr>
+        </p:nvSpPr>
+        <p:spPr>
+          <a:xfrm>
+            <a:off x="8321040" y="4754880"/>
+            <a:ext cx="365760" cy="228600"/>
+          </a:xfrm>
+          <a:prstGeom prst="rect">
+            <a:avLst/>
+          </a:prstGeom>
+          <a:extLst>
+            <a:ext uri="{C572A759-6A51-4108-AA02-DFA0A04FC94B}">
+              <ma14:wrappingTextBoxFlag xmlns:ma14="http://schemas.microsoft.com/office/mac/drawingml/2011/main" val="0"/>
+            </a:ext>
+          </a:extLst>
+        </p:spPr>
+        <p:txBody>
+          <a:bodyPr/>
+          <a:lstStyle>
+            <a:lvl1pPr>
+              <a:defRPr sz="900">
+                <a:solidFill>
+                  <a:schemeClr val="accent6"/>
+                </a:solidFill>
+              </a:defRPr>
+            </a:lvl1pPr>
+          </a:lstStyle>
+          <a:p>
+            <a:pPr algn="r"/>
+            <a:fld id="{F7021451-1387-4CA6-816F-3879F97B5CBC}" type="slidenum">
+              <a:rPr b="0" lang="en-US"/>
+              <a:t>8</a:t>
+            </a:fld>
+            <a:endParaRPr lang="en-US"/>
+          </a:p>
+        </p:txBody>
+      </p:sp>
+    </p:spTree>
+  </p:cSld>
+  <p:clrMapOvr>
+    <a:masterClrMapping/>
+  </p:clrMapOvr>
+</p:sld>
+</file>
+
+<file path=ppt/slides/slide9.xml><?xml version="1.0" encoding="utf-8"?>
+<p:sld xmlns:a="http://schemas.openxmlformats.org/drawingml/2006/main" xmlns:r="http://schemas.openxmlformats.org/officeDocument/2006/relationships" xmlns:p="http://schemas.openxmlformats.org/presentationml/2006/main">
+  <p:cSld name="Slide 9">
+    <p:spTree>
+      <p:nvGrpSpPr>
+        <p:cNvPr id="1" name=""/>
+        <p:cNvGrpSpPr/>
+        <p:nvPr/>
+      </p:nvGrpSpPr>
+      <p:grpSpPr>
+        <a:xfrm>
+          <a:off x="0" y="0"/>
+          <a:ext cx="0" cy="0"/>
+          <a:chOff x="0" y="0"/>
+          <a:chExt cx="0" cy="0"/>
+        </a:xfrm>
+      </p:grpSpPr>
+      <p:sp>
+        <p:nvSpPr>
+          <p:cNvPr id="2" name="Text 1"/>
           <p:cNvSpPr/>
+          <p:nvPr>
+            <p:ph idx="101" type="title" hasCustomPrompt="1"/>
+          </p:nvPr>
+        </p:nvSpPr>
+        <p:spPr>
+          <a:xfrm>
+            <a:off x="457200" y="274320"/>
+            <a:ext cx="8229600" cy="548640"/>
+          </a:xfrm>
+          <a:prstGeom prst="rect">
+            <a:avLst/>
+          </a:prstGeom>
+          <a:noFill/>
+          <a:ln/>
+        </p:spPr>
+        <p:txBody>
+          <a:bodyPr wrap="square" lIns="0" tIns="0" rIns="0" bIns="0" rtlCol="0" anchor="ctr"/>
+          <a:lstStyle/>
+          <a:p>
+            <a:pPr algn="l" indent="0" marL="0">
+              <a:buNone/>
+            </a:pPr>
+            <a:r>
+              <a:rPr lang="en-US" sz="2800" b="1" dirty="0">
+                <a:solidFill>
+                  <a:schemeClr val="tx2"/>
+                </a:solidFill>
+              </a:rPr>
+              <a:t>Responsible AI &amp; Pakistan Impact</a:t>
+            </a:r>
+            <a:endParaRPr lang="en-US" sz="2800" dirty="0"/>
+          </a:p>
+        </p:txBody>
+      </p:sp>
+      <p:sp>
+        <p:nvSpPr>
+          <p:cNvPr id="3" name="resp 1"/>
+          <p:cNvSpPr/>
           <p:nvPr/>
         </p:nvSpPr>
         <p:spPr>
           <a:xfrm>
             <a:off x="457200" y="914400"/>
-            <a:ext cx="2560320" cy="2880360"/>
+            <a:ext cx="4389120" cy="777240"/>
           </a:xfrm>
           <a:prstGeom prst="roundRect">
             <a:avLst>
-              <a:gd name="adj" fmla="val 2857"/>
+              <a:gd name="adj" fmla="val 9412"/>
             </a:avLst>
           </a:prstGeom>
           <a:solidFill>
@@ -7653,39 +11980,14 @@
       </p:sp>
       <p:sp>
         <p:nvSpPr>
-          <p:cNvPr id="5" name="avatar 1"/>
-          <p:cNvSpPr/>
-          <p:nvPr/>
-        </p:nvSpPr>
-        <p:spPr>
-          <a:xfrm>
-            <a:off x="1463040" y="1051560"/>
-            <a:ext cx="548640" cy="548640"/>
-          </a:xfrm>
-          <a:prstGeom prst="ellipse">
-            <a:avLst/>
-          </a:prstGeom>
-          <a:solidFill>
-            <a:schemeClr val="accent1"/>
-          </a:solidFill>
-          <a:ln w="12700">
-            <a:solidFill>
-              <a:schemeClr val="accent1"/>
-            </a:solidFill>
-            <a:prstDash val="solid"/>
-          </a:ln>
-        </p:spPr>
-      </p:sp>
-      <p:sp>
-        <p:nvSpPr>
-          <p:cNvPr id="6" name="Text 4"/>
+          <p:cNvPr id="4" name="Text 2"/>
           <p:cNvSpPr txBox="1"/>
           <p:nvPr/>
         </p:nvSpPr>
         <p:spPr>
           <a:xfrm>
-            <a:off x="1463040" y="1051560"/>
-            <a:ext cx="548640" cy="548640"/>
+            <a:off x="640080" y="1005840"/>
+            <a:ext cx="4023360" cy="274320"/>
           </a:xfrm>
           <a:prstGeom prst="rect">
             <a:avLst/>
@@ -7694,34 +11996,34 @@
           <a:ln/>
         </p:spPr>
         <p:txBody>
-          <a:bodyPr wrap="square" lIns="0" tIns="0" rIns="0" bIns="0" rtlCol="0" anchor="ctr"/>
-          <a:lstStyle/>
-          <a:p>
-            <a:pPr algn="ctr" indent="0" marL="0">
+          <a:bodyPr wrap="square" lIns="0" tIns="0" rIns="0" bIns="0" rtlCol="0" anchor="t"/>
+          <a:lstStyle/>
+          <a:p>
+            <a:pPr indent="0" marL="0">
               <a:buNone/>
             </a:pPr>
             <a:r>
-              <a:rPr lang="en-US" sz="1600" b="1" dirty="0">
-                <a:solidFill>
-                  <a:schemeClr val="bg1"/>
+              <a:rPr lang="en-US" sz="1400" b="1" dirty="0">
+                <a:solidFill>
+                  <a:schemeClr val="tx2"/>
                 </a:solidFill>
               </a:rPr>
-              <a:t>RT</a:t>
-            </a:r>
-            <a:endParaRPr lang="en-US" sz="1600" dirty="0"/>
-          </a:p>
-        </p:txBody>
-      </p:sp>
-      <p:sp>
-        <p:nvSpPr>
-          <p:cNvPr id="7" name="Text 5"/>
+              <a:t>No invented numbers</a:t>
+            </a:r>
+            <a:endParaRPr lang="en-US" sz="1400" dirty="0"/>
+          </a:p>
+        </p:txBody>
+      </p:sp>
+      <p:sp>
+        <p:nvSpPr>
+          <p:cNvPr id="5" name="Text 3"/>
           <p:cNvSpPr txBox="1"/>
           <p:nvPr/>
         </p:nvSpPr>
         <p:spPr>
           <a:xfrm>
-            <a:off x="548640" y="1691640"/>
-            <a:ext cx="2377440" cy="292608"/>
+            <a:off x="640080" y="1298448"/>
+            <a:ext cx="4023360" cy="365760"/>
           </a:xfrm>
           <a:prstGeom prst="rect">
             <a:avLst/>
@@ -7733,147 +12035,35 @@
           <a:bodyPr wrap="square" lIns="0" tIns="0" rIns="0" bIns="0" rtlCol="0" anchor="t"/>
           <a:lstStyle/>
           <a:p>
-            <a:pPr algn="ctr" indent="0" marL="0">
+            <a:pPr indent="0" marL="0">
               <a:buNone/>
             </a:pPr>
             <a:r>
-              <a:rPr lang="en-US" sz="1600" b="1" dirty="0">
-                <a:solidFill>
-                  <a:schemeClr val="tx2"/>
+              <a:rPr lang="en-US" sz="1100" dirty="0">
+                <a:solidFill>
+                  <a:schemeClr val="tx1"/>
                 </a:solidFill>
               </a:rPr>
-              <a:t>Roshaan Tahir</a:t>
-            </a:r>
-            <a:endParaRPr lang="en-US" sz="1600" dirty="0"/>
-          </a:p>
-        </p:txBody>
-      </p:sp>
-      <p:sp>
-        <p:nvSpPr>
-          <p:cNvPr id="8" name="Text 6"/>
-          <p:cNvSpPr txBox="1"/>
-          <p:nvPr/>
-        </p:nvSpPr>
-        <p:spPr>
-          <a:xfrm>
-            <a:off x="548640" y="1984248"/>
-            <a:ext cx="2377440" cy="256032"/>
-          </a:xfrm>
-          <a:prstGeom prst="rect">
-            <a:avLst/>
-          </a:prstGeom>
-          <a:noFill/>
-          <a:ln/>
-        </p:spPr>
-        <p:txBody>
-          <a:bodyPr wrap="square" lIns="0" tIns="0" rIns="0" bIns="0" rtlCol="0" anchor="t"/>
-          <a:lstStyle/>
-          <a:p>
-            <a:pPr algn="ctr" indent="0" marL="0">
-              <a:buNone/>
-            </a:pPr>
-            <a:r>
-              <a:rPr lang="en-US" sz="1200" b="1" dirty="0">
-                <a:solidFill>
-                  <a:schemeClr val="accent2"/>
-                </a:solidFill>
-              </a:rPr>
-              <a:t>Forecast data, models &amp; dashboard</a:t>
-            </a:r>
-            <a:endParaRPr lang="en-US" sz="1200" dirty="0"/>
-          </a:p>
-        </p:txBody>
-      </p:sp>
-      <p:sp>
-        <p:nvSpPr>
-          <p:cNvPr id="9" name="Text 7"/>
-          <p:cNvSpPr txBox="1"/>
-          <p:nvPr/>
-        </p:nvSpPr>
-        <p:spPr>
-          <a:xfrm>
-            <a:off x="640080" y="2331720"/>
-            <a:ext cx="2240280" cy="1371600"/>
-          </a:xfrm>
-          <a:prstGeom prst="rect">
-            <a:avLst/>
-          </a:prstGeom>
-          <a:noFill/>
-          <a:ln/>
-        </p:spPr>
-        <p:txBody>
-          <a:bodyPr wrap="square" lIns="0" tIns="0" rIns="0" bIns="0" rtlCol="0" anchor="t"/>
-          <a:lstStyle/>
-          <a:p>
-            <a:pPr marL="342900" indent="-342900">
-              <a:spcAft>
-                <a:spcPts val="400"/>
-              </a:spcAft>
-              <a:buSzPct val="100000"/>
-              <a:buChar char="•"/>
-            </a:pPr>
-            <a:r>
-              <a:rPr lang="en-US" sz="1200" dirty="0">
-                <a:solidFill>
-                  <a:schemeClr val="tx1"/>
-                </a:solidFill>
-              </a:rPr>
-              <a:t>Open-Meteo forecast pipeline</a:t>
-            </a:r>
-            <a:endParaRPr lang="en-US" sz="1200" dirty="0"/>
-          </a:p>
-          <a:p>
-            <a:pPr marL="342900" indent="-342900">
-              <a:spcAft>
-                <a:spcPts val="400"/>
-              </a:spcAft>
-              <a:buSzPct val="100000"/>
-              <a:buChar char="•"/>
-            </a:pPr>
-            <a:r>
-              <a:rPr lang="en-US" sz="1200" dirty="0">
-                <a:solidFill>
-                  <a:schemeClr val="tx1"/>
-                </a:solidFill>
-              </a:rPr>
-              <a:t>Model A training and calibration</a:t>
-            </a:r>
-            <a:endParaRPr lang="en-US" sz="1200" dirty="0"/>
-          </a:p>
-          <a:p>
-            <a:pPr marL="342900" indent="-342900">
-              <a:spcAft>
-                <a:spcPts val="400"/>
-              </a:spcAft>
-              <a:buSzPct val="100000"/>
-              <a:buChar char="•"/>
-            </a:pPr>
-            <a:r>
-              <a:rPr lang="en-US" sz="1200" dirty="0">
-                <a:solidFill>
-                  <a:schemeClr val="tx1"/>
-                </a:solidFill>
-              </a:rPr>
-              <a:t>Insight Agent and live dashboard</a:t>
-            </a:r>
-            <a:endParaRPr lang="en-US" sz="1200" dirty="0"/>
-          </a:p>
-        </p:txBody>
-      </p:sp>
-      <p:sp>
-        <p:nvSpPr>
-          <p:cNvPr id="10" name="member 2"/>
+              <a:t>Every number is inserted by code from a gold table and carries its row id</a:t>
+            </a:r>
+            <a:endParaRPr lang="en-US" sz="1100" dirty="0"/>
+          </a:p>
+        </p:txBody>
+      </p:sp>
+      <p:sp>
+        <p:nvSpPr>
+          <p:cNvPr id="6" name="resp 2"/>
           <p:cNvSpPr/>
           <p:nvPr/>
         </p:nvSpPr>
         <p:spPr>
           <a:xfrm>
-            <a:off x="3291840" y="914400"/>
-            <a:ext cx="2560320" cy="2880360"/>
+            <a:off x="457200" y="1810512"/>
+            <a:ext cx="4389120" cy="777240"/>
           </a:xfrm>
           <a:prstGeom prst="roundRect">
             <a:avLst>
-              <a:gd name="adj" fmla="val 2857"/>
+              <a:gd name="adj" fmla="val 9412"/>
             </a:avLst>
           </a:prstGeom>
           <a:solidFill>
@@ -7889,39 +12079,14 @@
       </p:sp>
       <p:sp>
         <p:nvSpPr>
-          <p:cNvPr id="11" name="avatar 2"/>
-          <p:cNvSpPr/>
-          <p:nvPr/>
-        </p:nvSpPr>
-        <p:spPr>
-          <a:xfrm>
-            <a:off x="4297680" y="1051560"/>
-            <a:ext cx="548640" cy="548640"/>
-          </a:xfrm>
-          <a:prstGeom prst="ellipse">
-            <a:avLst/>
-          </a:prstGeom>
-          <a:solidFill>
-            <a:schemeClr val="accent1"/>
-          </a:solidFill>
-          <a:ln w="12700">
-            <a:solidFill>
-              <a:schemeClr val="accent1"/>
-            </a:solidFill>
-            <a:prstDash val="solid"/>
-          </a:ln>
-        </p:spPr>
-      </p:sp>
-      <p:sp>
-        <p:nvSpPr>
-          <p:cNvPr id="12" name="Text 10"/>
+          <p:cNvPr id="7" name="Text 5"/>
           <p:cNvSpPr txBox="1"/>
           <p:nvPr/>
         </p:nvSpPr>
         <p:spPr>
           <a:xfrm>
-            <a:off x="4297680" y="1051560"/>
-            <a:ext cx="548640" cy="548640"/>
+            <a:off x="640080" y="1901952"/>
+            <a:ext cx="4023360" cy="274320"/>
           </a:xfrm>
           <a:prstGeom prst="rect">
             <a:avLst/>
@@ -7930,34 +12095,34 @@
           <a:ln/>
         </p:spPr>
         <p:txBody>
-          <a:bodyPr wrap="square" lIns="0" tIns="0" rIns="0" bIns="0" rtlCol="0" anchor="ctr"/>
-          <a:lstStyle/>
-          <a:p>
-            <a:pPr algn="ctr" indent="0" marL="0">
+          <a:bodyPr wrap="square" lIns="0" tIns="0" rIns="0" bIns="0" rtlCol="0" anchor="t"/>
+          <a:lstStyle/>
+          <a:p>
+            <a:pPr indent="0" marL="0">
               <a:buNone/>
             </a:pPr>
             <a:r>
-              <a:rPr lang="en-US" sz="1600" b="1" dirty="0">
-                <a:solidFill>
-                  <a:schemeClr val="bg1"/>
+              <a:rPr lang="en-US" sz="1400" b="1" dirty="0">
+                <a:solidFill>
+                  <a:schemeClr val="tx2"/>
                 </a:solidFill>
               </a:rPr>
-              <a:t>HK</a:t>
-            </a:r>
-            <a:endParaRPr lang="en-US" sz="1600" dirty="0"/>
-          </a:p>
-        </p:txBody>
-      </p:sp>
-      <p:sp>
-        <p:nvSpPr>
-          <p:cNvPr id="13" name="Text 11"/>
+              <a:t>Every claim cited</a:t>
+            </a:r>
+            <a:endParaRPr lang="en-US" sz="1400" dirty="0"/>
+          </a:p>
+        </p:txBody>
+      </p:sp>
+      <p:sp>
+        <p:nvSpPr>
+          <p:cNvPr id="8" name="Text 6"/>
           <p:cNvSpPr txBox="1"/>
           <p:nvPr/>
         </p:nvSpPr>
         <p:spPr>
           <a:xfrm>
-            <a:off x="3383280" y="1691640"/>
-            <a:ext cx="2377440" cy="292608"/>
+            <a:off x="640080" y="2194560"/>
+            <a:ext cx="4023360" cy="365760"/>
           </a:xfrm>
           <a:prstGeom prst="rect">
             <a:avLst/>
@@ -7969,147 +12134,35 @@
           <a:bodyPr wrap="square" lIns="0" tIns="0" rIns="0" bIns="0" rtlCol="0" anchor="t"/>
           <a:lstStyle/>
           <a:p>
-            <a:pPr algn="ctr" indent="0" marL="0">
+            <a:pPr indent="0" marL="0">
               <a:buNone/>
             </a:pPr>
             <a:r>
-              <a:rPr lang="en-US" sz="1600" b="1" dirty="0">
-                <a:solidFill>
-                  <a:schemeClr val="tx2"/>
+              <a:rPr lang="en-US" sz="1100" dirty="0">
+                <a:solidFill>
+                  <a:schemeClr val="tx1"/>
                 </a:solidFill>
               </a:rPr>
-              <a:t>Hammad Khan</a:t>
-            </a:r>
-            <a:endParaRPr lang="en-US" sz="1600" dirty="0"/>
-          </a:p>
-        </p:txBody>
-      </p:sp>
-      <p:sp>
-        <p:nvSpPr>
-          <p:cNvPr id="14" name="Text 12"/>
-          <p:cNvSpPr txBox="1"/>
-          <p:nvPr/>
-        </p:nvSpPr>
-        <p:spPr>
-          <a:xfrm>
-            <a:off x="3383280" y="1984248"/>
-            <a:ext cx="2377440" cy="256032"/>
-          </a:xfrm>
-          <a:prstGeom prst="rect">
-            <a:avLst/>
-          </a:prstGeom>
-          <a:noFill/>
-          <a:ln/>
-        </p:spPr>
-        <p:txBody>
-          <a:bodyPr wrap="square" lIns="0" tIns="0" rIns="0" bIns="0" rtlCol="0" anchor="t"/>
-          <a:lstStyle/>
-          <a:p>
-            <a:pPr algn="ctr" indent="0" marL="0">
-              <a:buNone/>
-            </a:pPr>
-            <a:r>
-              <a:rPr lang="en-US" sz="1200" b="1" dirty="0">
-                <a:solidFill>
-                  <a:schemeClr val="accent2"/>
-                </a:solidFill>
-              </a:rPr>
-              <a:t>Satellite rain &amp; ground truth</a:t>
-            </a:r>
-            <a:endParaRPr lang="en-US" sz="1200" dirty="0"/>
-          </a:p>
-        </p:txBody>
-      </p:sp>
-      <p:sp>
-        <p:nvSpPr>
-          <p:cNvPr id="15" name="Text 13"/>
-          <p:cNvSpPr txBox="1"/>
-          <p:nvPr/>
-        </p:nvSpPr>
-        <p:spPr>
-          <a:xfrm>
-            <a:off x="3474720" y="2331720"/>
-            <a:ext cx="2240280" cy="1371600"/>
-          </a:xfrm>
-          <a:prstGeom prst="rect">
-            <a:avLst/>
-          </a:prstGeom>
-          <a:noFill/>
-          <a:ln/>
-        </p:spPr>
-        <p:txBody>
-          <a:bodyPr wrap="square" lIns="0" tIns="0" rIns="0" bIns="0" rtlCol="0" anchor="t"/>
-          <a:lstStyle/>
-          <a:p>
-            <a:pPr marL="342900" indent="-342900">
-              <a:spcAft>
-                <a:spcPts val="400"/>
-              </a:spcAft>
-              <a:buSzPct val="100000"/>
-              <a:buChar char="•"/>
-            </a:pPr>
-            <a:r>
-              <a:rPr lang="en-US" sz="1200" dirty="0">
-                <a:solidFill>
-                  <a:schemeClr val="tx1"/>
-                </a:solidFill>
-              </a:rPr>
-              <a:t>NASA IMERG satellite rain fetcher</a:t>
-            </a:r>
-            <a:endParaRPr lang="en-US" sz="1200" dirty="0"/>
-          </a:p>
-          <a:p>
-            <a:pPr marL="342900" indent="-342900">
-              <a:spcAft>
-                <a:spcPts val="400"/>
-              </a:spcAft>
-              <a:buSzPct val="100000"/>
-              <a:buChar char="•"/>
-            </a:pPr>
-            <a:r>
-              <a:rPr lang="en-US" sz="1200" dirty="0">
-                <a:solidFill>
-                  <a:schemeClr val="tx1"/>
-                </a:solidFill>
-              </a:rPr>
-              <a:t>District rain, 95th-pct thresholds, labels</a:t>
-            </a:r>
-            <a:endParaRPr lang="en-US" sz="1200" dirty="0"/>
-          </a:p>
-          <a:p>
-            <a:pPr marL="342900" indent="-342900">
-              <a:spcAft>
-                <a:spcPts val="400"/>
-              </a:spcAft>
-              <a:buSzPct val="100000"/>
-              <a:buChar char="•"/>
-            </a:pPr>
-            <a:r>
-              <a:rPr lang="en-US" sz="1200" dirty="0">
-                <a:solidFill>
-                  <a:schemeClr val="tx1"/>
-                </a:solidFill>
-              </a:rPr>
-              <a:t>Data quality checks + 26 tests</a:t>
-            </a:r>
-            <a:endParaRPr lang="en-US" sz="1200" dirty="0"/>
-          </a:p>
-        </p:txBody>
-      </p:sp>
-      <p:sp>
-        <p:nvSpPr>
-          <p:cNvPr id="16" name="member 3"/>
+              <a:t>NDMA quotes carry document, page and section id; no support → “I don't know”</a:t>
+            </a:r>
+            <a:endParaRPr lang="en-US" sz="1100" dirty="0"/>
+          </a:p>
+        </p:txBody>
+      </p:sp>
+      <p:sp>
+        <p:nvSpPr>
+          <p:cNvPr id="9" name="resp 3"/>
           <p:cNvSpPr/>
           <p:nvPr/>
         </p:nvSpPr>
         <p:spPr>
           <a:xfrm>
-            <a:off x="6126480" y="914400"/>
-            <a:ext cx="2560320" cy="2880360"/>
+            <a:off x="457200" y="2706624"/>
+            <a:ext cx="4389120" cy="777240"/>
           </a:xfrm>
           <a:prstGeom prst="roundRect">
             <a:avLst>
-              <a:gd name="adj" fmla="val 2857"/>
+              <a:gd name="adj" fmla="val 9412"/>
             </a:avLst>
           </a:prstGeom>
           <a:solidFill>
@@ -8125,24 +12178,98 @@
       </p:sp>
       <p:sp>
         <p:nvSpPr>
-          <p:cNvPr id="17" name="avatar 3"/>
+          <p:cNvPr id="10" name="Text 8"/>
+          <p:cNvSpPr txBox="1"/>
+          <p:nvPr/>
+        </p:nvSpPr>
+        <p:spPr>
+          <a:xfrm>
+            <a:off x="640080" y="2798064"/>
+            <a:ext cx="4023360" cy="274320"/>
+          </a:xfrm>
+          <a:prstGeom prst="rect">
+            <a:avLst/>
+          </a:prstGeom>
+          <a:noFill/>
+          <a:ln/>
+        </p:spPr>
+        <p:txBody>
+          <a:bodyPr wrap="square" lIns="0" tIns="0" rIns="0" bIns="0" rtlCol="0" anchor="t"/>
+          <a:lstStyle/>
+          <a:p>
+            <a:pPr indent="0" marL="0">
+              <a:buNone/>
+            </a:pPr>
+            <a:r>
+              <a:rPr lang="en-US" sz="1400" b="1" dirty="0">
+                <a:solidFill>
+                  <a:schemeClr val="tx2"/>
+                </a:solidFill>
+              </a:rPr>
+              <a:t>Safe by default</a:t>
+            </a:r>
+            <a:endParaRPr lang="en-US" sz="1400" dirty="0"/>
+          </a:p>
+        </p:txBody>
+      </p:sp>
+      <p:sp>
+        <p:nvSpPr>
+          <p:cNvPr id="11" name="Text 9"/>
+          <p:cNvSpPr txBox="1"/>
+          <p:nvPr/>
+        </p:nvSpPr>
+        <p:spPr>
+          <a:xfrm>
+            <a:off x="640080" y="3090672"/>
+            <a:ext cx="4023360" cy="365760"/>
+          </a:xfrm>
+          <a:prstGeom prst="rect">
+            <a:avLst/>
+          </a:prstGeom>
+          <a:noFill/>
+          <a:ln/>
+        </p:spPr>
+        <p:txBody>
+          <a:bodyPr wrap="square" lIns="0" tIns="0" rIns="0" bIns="0" rtlCol="0" anchor="t"/>
+          <a:lstStyle/>
+          <a:p>
+            <a:pPr indent="0" marL="0">
+              <a:buNone/>
+            </a:pPr>
+            <a:r>
+              <a:rPr lang="en-US" sz="1100" dirty="0">
+                <a:solidFill>
+                  <a:schemeClr val="tx1"/>
+                </a:solidFill>
+              </a:rPr>
+              <a:t>Emergency questions go to Rescue 1122 and NDMA/PDMA first; never an official warning</a:t>
+            </a:r>
+            <a:endParaRPr lang="en-US" sz="1100" dirty="0"/>
+          </a:p>
+        </p:txBody>
+      </p:sp>
+      <p:sp>
+        <p:nvSpPr>
+          <p:cNvPr id="12" name="resp 4"/>
           <p:cNvSpPr/>
           <p:nvPr/>
         </p:nvSpPr>
         <p:spPr>
           <a:xfrm>
-            <a:off x="7132320" y="1051560"/>
-            <a:ext cx="548640" cy="548640"/>
-          </a:xfrm>
-          <a:prstGeom prst="ellipse">
-            <a:avLst/>
+            <a:off x="457200" y="3602736"/>
+            <a:ext cx="4389120" cy="777240"/>
+          </a:xfrm>
+          <a:prstGeom prst="roundRect">
+            <a:avLst>
+              <a:gd name="adj" fmla="val 9412"/>
+            </a:avLst>
           </a:prstGeom>
           <a:solidFill>
-            <a:schemeClr val="accent1"/>
+            <a:schemeClr val="bg2"/>
           </a:solidFill>
           <a:ln w="12700">
             <a:solidFill>
-              <a:schemeClr val="accent1"/>
+              <a:schemeClr val="bg2"/>
             </a:solidFill>
             <a:prstDash val="solid"/>
           </a:ln>
@@ -8150,14 +12277,14 @@
       </p:sp>
       <p:sp>
         <p:nvSpPr>
-          <p:cNvPr id="18" name="Text 16"/>
+          <p:cNvPr id="13" name="Text 11"/>
           <p:cNvSpPr txBox="1"/>
           <p:nvPr/>
         </p:nvSpPr>
         <p:spPr>
           <a:xfrm>
-            <a:off x="7132320" y="1051560"/>
-            <a:ext cx="548640" cy="548640"/>
+            <a:off x="640080" y="3694176"/>
+            <a:ext cx="4023360" cy="274320"/>
           </a:xfrm>
           <a:prstGeom prst="rect">
             <a:avLst/>
@@ -8166,34 +12293,34 @@
           <a:ln/>
         </p:spPr>
         <p:txBody>
-          <a:bodyPr wrap="square" lIns="0" tIns="0" rIns="0" bIns="0" rtlCol="0" anchor="ctr"/>
-          <a:lstStyle/>
-          <a:p>
-            <a:pPr algn="ctr" indent="0" marL="0">
+          <a:bodyPr wrap="square" lIns="0" tIns="0" rIns="0" bIns="0" rtlCol="0" anchor="t"/>
+          <a:lstStyle/>
+          <a:p>
+            <a:pPr indent="0" marL="0">
               <a:buNone/>
             </a:pPr>
             <a:r>
-              <a:rPr lang="en-US" sz="1600" b="1" dirty="0">
-                <a:solidFill>
-                  <a:schemeClr val="bg1"/>
+              <a:rPr lang="en-US" sz="1400" b="1" dirty="0">
+                <a:solidFill>
+                  <a:schemeClr val="tx2"/>
                 </a:solidFill>
               </a:rPr>
-              <a:t>MH</a:t>
-            </a:r>
-            <a:endParaRPr lang="en-US" sz="1600" dirty="0"/>
-          </a:p>
-        </p:txBody>
-      </p:sp>
-      <p:sp>
-        <p:nvSpPr>
-          <p:cNvPr id="19" name="Text 17"/>
+              <a:t>Usable in Pakistan</a:t>
+            </a:r>
+            <a:endParaRPr lang="en-US" sz="1400" dirty="0"/>
+          </a:p>
+        </p:txBody>
+      </p:sp>
+      <p:sp>
+        <p:nvSpPr>
+          <p:cNvPr id="14" name="Text 12"/>
           <p:cNvSpPr txBox="1"/>
           <p:nvPr/>
         </p:nvSpPr>
         <p:spPr>
           <a:xfrm>
-            <a:off x="6217920" y="1691640"/>
-            <a:ext cx="2377440" cy="292608"/>
+            <a:off x="640080" y="3986784"/>
+            <a:ext cx="4023360" cy="365760"/>
           </a:xfrm>
           <a:prstGeom prst="rect">
             <a:avLst/>
@@ -8205,31 +12332,58 @@
           <a:bodyPr wrap="square" lIns="0" tIns="0" rIns="0" bIns="0" rtlCol="0" anchor="t"/>
           <a:lstStyle/>
           <a:p>
-            <a:pPr algn="ctr" indent="0" marL="0">
+            <a:pPr indent="0" marL="0">
               <a:buNone/>
             </a:pPr>
             <a:r>
-              <a:rPr lang="en-US" sz="1600" b="1" dirty="0">
-                <a:solidFill>
-                  <a:schemeClr val="tx2"/>
+              <a:rPr lang="en-US" sz="1100" dirty="0">
+                <a:solidFill>
+                  <a:schemeClr val="tx1"/>
                 </a:solidFill>
               </a:rPr>
-              <a:t>Muhammad Huzaifa</a:t>
-            </a:r>
-            <a:endParaRPr lang="en-US" sz="1600" dirty="0"/>
-          </a:p>
-        </p:txBody>
-      </p:sp>
-      <p:sp>
-        <p:nvSpPr>
-          <p:cNvPr id="20" name="Text 18"/>
+              <a:t>Urdu answers, 160 OCHA districts, PBS prices for 17 cities, NDMA advisories on the map</a:t>
+            </a:r>
+            <a:endParaRPr lang="en-US" sz="1100" dirty="0"/>
+          </a:p>
+        </p:txBody>
+      </p:sp>
+      <p:sp>
+        <p:nvSpPr>
+          <p:cNvPr id="15" name="local validation"/>
+          <p:cNvSpPr/>
+          <p:nvPr/>
+        </p:nvSpPr>
+        <p:spPr>
+          <a:xfrm>
+            <a:off x="5120640" y="914400"/>
+            <a:ext cx="3566160" cy="1874520"/>
+          </a:xfrm>
+          <a:prstGeom prst="roundRect">
+            <a:avLst>
+              <a:gd name="adj" fmla="val 3902"/>
+            </a:avLst>
+          </a:prstGeom>
+          <a:solidFill>
+            <a:schemeClr val="bg2"/>
+          </a:solidFill>
+          <a:ln w="12700">
+            <a:solidFill>
+              <a:schemeClr val="bg2"/>
+            </a:solidFill>
+            <a:prstDash val="solid"/>
+          </a:ln>
+        </p:spPr>
+      </p:sp>
+      <p:sp>
+        <p:nvSpPr>
+          <p:cNvPr id="16" name="Text 14"/>
           <p:cNvSpPr txBox="1"/>
           <p:nvPr/>
         </p:nvSpPr>
         <p:spPr>
           <a:xfrm>
-            <a:off x="6217920" y="1984248"/>
-            <a:ext cx="2377440" cy="256032"/>
+            <a:off x="5303520" y="1024128"/>
+            <a:ext cx="3200400" cy="274320"/>
           </a:xfrm>
           <a:prstGeom prst="rect">
             <a:avLst/>
@@ -8241,7 +12395,7 @@
           <a:bodyPr wrap="square" lIns="0" tIns="0" rIns="0" bIns="0" rtlCol="0" anchor="t"/>
           <a:lstStyle/>
           <a:p>
-            <a:pPr algn="ctr" indent="0" marL="0">
+            <a:pPr indent="0" marL="0">
               <a:buNone/>
             </a:pPr>
             <a:r>
@@ -8250,7 +12404,7 @@
                   <a:schemeClr val="accent2"/>
                 </a:solidFill>
               </a:rPr>
-              <a:t>Deployment &amp; delivery</a:t>
+              <a:t>LOCAL VALIDATION (NDMA)</a:t>
             </a:r>
             <a:endParaRPr lang="en-US" sz="1200" dirty="0"/>
           </a:p>
@@ -8258,14 +12412,14 @@
       </p:sp>
       <p:sp>
         <p:nvSpPr>
-          <p:cNvPr id="21" name="Text 19"/>
+          <p:cNvPr id="17" name="Text 15"/>
           <p:cNvSpPr txBox="1"/>
           <p:nvPr/>
         </p:nvSpPr>
         <p:spPr>
           <a:xfrm>
-            <a:off x="6309360" y="2331720"/>
-            <a:ext cx="2240280" cy="1371600"/>
+            <a:off x="5303520" y="1325880"/>
+            <a:ext cx="3246120" cy="1417320"/>
           </a:xfrm>
           <a:prstGeom prst="rect">
             <a:avLst/>
@@ -8279,69 +12433,78 @@
           <a:p>
             <a:pPr marL="342900" indent="-342900">
               <a:spcAft>
-                <a:spcPts val="400"/>
+                <a:spcPts val="300"/>
               </a:spcAft>
               <a:buSzPct val="100000"/>
               <a:buChar char="•"/>
             </a:pPr>
             <a:r>
-              <a:rPr lang="en-US" sz="1200" dirty="0">
+              <a:rPr lang="en-US" sz="1100" dirty="0">
                 <a:solidFill>
                   <a:schemeClr val="tx1"/>
                 </a:solidFill>
               </a:rPr>
-              <a:t>Hugging Face Space (Docker server)</a:t>
-            </a:r>
-            <a:endParaRPr lang="en-US" sz="1200" dirty="0"/>
+              <a:t>Replay of Aug 2025: on 14 Aug, 8 of our top-10 districts had heavy rain (34 districts did)</a:t>
+            </a:r>
+            <a:endParaRPr lang="en-US" sz="1100" dirty="0"/>
           </a:p>
           <a:p>
             <a:pPr marL="342900" indent="-342900">
               <a:spcAft>
-                <a:spcPts val="400"/>
+                <a:spcPts val="300"/>
               </a:spcAft>
               <a:buSzPct val="100000"/>
               <a:buChar char="•"/>
             </a:pPr>
             <a:r>
-              <a:rPr lang="en-US" sz="1200" dirty="0">
+              <a:rPr lang="en-US" sz="1100" dirty="0">
                 <a:solidFill>
                   <a:schemeClr val="tx1"/>
                 </a:solidFill>
               </a:rPr>
-              <a:t>Build-and-assemble deploy script</a:t>
-            </a:r>
-            <a:endParaRPr lang="en-US" sz="1200" dirty="0"/>
-          </a:p>
-          <a:p>
-            <a:pPr marL="342900" indent="-342900">
-              <a:spcAft>
-                <a:spcPts val="400"/>
-              </a:spcAft>
-              <a:buSzPct val="100000"/>
-              <a:buChar char="•"/>
-            </a:pPr>
-            <a:r>
-              <a:rPr lang="en-US" sz="1200" dirty="0">
-                <a:solidFill>
-                  <a:schemeClr val="tx1"/>
-                </a:solidFill>
-              </a:rPr>
-              <a:t>Deploy checklist and AI-use records</a:t>
-            </a:r>
-            <a:endParaRPr lang="en-US" sz="1200" dirty="0"/>
-          </a:p>
-        </p:txBody>
-      </p:sp>
-      <p:sp>
-        <p:nvSpPr>
-          <p:cNvPr id="22" name="Text 20"/>
+              <a:t>NDMA's 87 sitreps name 125 districts; our fixed 0.5 alert rule flagged only 1, so we rank risk instead</a:t>
+            </a:r>
+            <a:endParaRPr lang="en-US" sz="1100" dirty="0"/>
+          </a:p>
+        </p:txBody>
+      </p:sp>
+      <p:sp>
+        <p:nvSpPr>
+          <p:cNvPr id="18" name="limits"/>
+          <p:cNvSpPr/>
+          <p:nvPr/>
+        </p:nvSpPr>
+        <p:spPr>
+          <a:xfrm>
+            <a:off x="5120640" y="2926080"/>
+            <a:ext cx="3566160" cy="1554480"/>
+          </a:xfrm>
+          <a:prstGeom prst="roundRect">
+            <a:avLst>
+              <a:gd name="adj" fmla="val 4706"/>
+            </a:avLst>
+          </a:prstGeom>
+          <a:solidFill>
+            <a:schemeClr val="tx2"/>
+          </a:solidFill>
+          <a:ln w="12700">
+            <a:solidFill>
+              <a:schemeClr val="tx2"/>
+            </a:solidFill>
+            <a:prstDash val="solid"/>
+          </a:ln>
+        </p:spPr>
+      </p:sp>
+      <p:sp>
+        <p:nvSpPr>
+          <p:cNvPr id="19" name="Text 17"/>
           <p:cNvSpPr txBox="1"/>
           <p:nvPr/>
         </p:nvSpPr>
         <p:spPr>
           <a:xfrm>
-            <a:off x="457200" y="3931920"/>
-            <a:ext cx="8229600" cy="274320"/>
+            <a:off x="5303520" y="3035808"/>
+            <a:ext cx="3200400" cy="274320"/>
           </a:xfrm>
           <a:prstGeom prst="rect">
             <a:avLst/>
@@ -8357,72 +12520,50 @@
               <a:buNone/>
             </a:pPr>
             <a:r>
-              <a:rPr lang="en-US" sz="1100" b="1" dirty="0">
-                <a:solidFill>
-                  <a:schemeClr val="tx1"/>
+              <a:rPr lang="en-US" sz="1200" b="1" dirty="0">
+                <a:solidFill>
+                  <a:schemeClr val="bg1"/>
                 </a:solidFill>
               </a:rPr>
-              <a:t>Contact: </a:t>
-            </a:r>
+              <a:t>HONEST LIMITS</a:t>
+            </a:r>
+            <a:endParaRPr lang="en-US" sz="1200" dirty="0"/>
+          </a:p>
+        </p:txBody>
+      </p:sp>
+      <p:sp>
+        <p:nvSpPr>
+          <p:cNvPr id="20" name="Text 18"/>
+          <p:cNvSpPr txBox="1"/>
+          <p:nvPr/>
+        </p:nvSpPr>
+        <p:spPr>
+          <a:xfrm>
+            <a:off x="5303520" y="3337560"/>
+            <a:ext cx="3246120" cy="1097280"/>
+          </a:xfrm>
+          <a:prstGeom prst="rect">
+            <a:avLst/>
+          </a:prstGeom>
+          <a:noFill/>
+          <a:ln/>
+        </p:spPr>
+        <p:txBody>
+          <a:bodyPr wrap="square" lIns="0" tIns="0" rIns="0" bIns="0" rtlCol="0" anchor="t"/>
+          <a:lstStyle/>
+          <a:p>
             <a:pPr indent="0" marL="0">
               <a:buNone/>
             </a:pPr>
             <a:r>
               <a:rPr lang="en-US" sz="1100" dirty="0">
                 <a:solidFill>
-                  <a:schemeClr val="accent5"/>
+                  <a:schemeClr val="bg1"/>
                 </a:solidFill>
               </a:rPr>
-              <a:t>github.com/RoshaanT1/floodlens-pakistan</a:t>
-            </a:r>
-            <a:pPr indent="0" marL="0">
-              <a:buNone/>
-            </a:pPr>
-            <a:r>
-              <a:rPr lang="en-US" sz="1100" dirty="0">
-                <a:solidFill>
-                  <a:schemeClr val="tx1"/>
-                </a:solidFill>
-              </a:rPr>
-              <a:t>   ·   Data: Open-Meteo, NASA, OCHA, PBS, NDMA</a:t>
+              <a:t>Buner, 15 Aug 2025: a flash flood killed 100+, but the satellite's wettest pixel (43 mm) stayed under Buner's 57.5 mm threshold, so the label says “no heavy rain”. Daily satellite rain misses cloudbursts.</a:t>
             </a:r>
             <a:endParaRPr lang="en-US" sz="1100" dirty="0"/>
-          </a:p>
-        </p:txBody>
-      </p:sp>
-      <p:sp>
-        <p:nvSpPr>
-          <p:cNvPr id="23" name="Text 21"/>
-          <p:cNvSpPr txBox="1"/>
-          <p:nvPr/>
-        </p:nvSpPr>
-        <p:spPr>
-          <a:xfrm>
-            <a:off x="457200" y="4224528"/>
-            <a:ext cx="5486400" cy="411480"/>
-          </a:xfrm>
-          <a:prstGeom prst="rect">
-            <a:avLst/>
-          </a:prstGeom>
-          <a:noFill/>
-          <a:ln/>
-        </p:spPr>
-        <p:txBody>
-          <a:bodyPr wrap="square" lIns="0" tIns="0" rIns="0" bIns="0" rtlCol="0" anchor="t"/>
-          <a:lstStyle/>
-          <a:p>
-            <a:pPr indent="0" marL="0">
-              <a:buNone/>
-            </a:pPr>
-            <a:r>
-              <a:rPr lang="en-US" sz="2400" b="1" dirty="0">
-                <a:solidFill>
-                  <a:schemeClr val="tx2"/>
-                </a:solidFill>
-              </a:rPr>
-              <a:t>Thank you!</a:t>
-            </a:r>
-            <a:endParaRPr lang="en-US" sz="2400" dirty="0"/>
           </a:p>
         </p:txBody>
       </p:sp>
@@ -8465,7 +12606,7 @@
             <a:pPr algn="r"/>
             <a:fld id="{F7021451-1387-4CA6-816F-3879F97B5CBC}" type="slidenum">
               <a:rPr b="0" lang="en-US"/>
-              <a:t>8</a:t>
+              <a:t>9</a:t>
             </a:fld>
             <a:endParaRPr lang="en-US"/>
           </a:p>

--- a/FloodLens_SparkH.pptx
+++ b/FloodLens_SparkH.pptx
@@ -117,53 +117,53 @@
   <p:extLst>
     <p:ext uri="{521415D9-36F7-43E2-AB2F-B90AF26B5E84}">
       <p14:sectionLst xmlns:p14="http://schemas.microsoft.com/office/powerpoint/2010/main">
-        <p14:section name="Cover" id="{64ef36ff-087d-b00f-1d64-66c18c3a5d94}">
+        <p14:section name="Cover" id="{4f53f8fb-de3b-6832-ed67-1040e04f5ccc}">
           <p14:sldIdLst>
             <p14:sldId id="256"/>
           </p14:sldIdLst>
         </p14:section>
-        <p14:section name="Problem" id="{721bde0a-dfc5-6ba3-6bee-0ee48c060d39}">
+        <p14:section name="Problem" id="{0b81bee6-ffe2-7a1d-a33f-d9a70db8bf4f}">
           <p14:sldIdLst>
             <p14:sldId id="257"/>
           </p14:sldIdLst>
         </p14:section>
-        <p14:section name="Data" id="{d4ee5a34-0727-2177-9990-15a1f861dd70}">
+        <p14:section name="Data" id="{bb0732cf-6273-1a66-19e3-c95e4626f039}">
           <p14:sldIdLst>
             <p14:sldId id="258"/>
           </p14:sldIdLst>
         </p14:section>
-        <p14:section name="Pipeline" id="{9b53a0bf-8061-2988-6c37-25650d17cfe9}">
+        <p14:section name="Pipeline" id="{6258888d-52e6-371f-55c1-18d682d52bfa}">
           <p14:sldIdLst>
             <p14:sldId id="259"/>
             <p14:sldId id="260"/>
           </p14:sldIdLst>
         </p14:section>
-        <p14:section name="Agents" id="{ebc3aa7f-fbc4-ddc4-3ade-60aaea9e74a9}">
+        <p14:section name="Agents" id="{ceee7f77-c2e2-c949-4ca4-4126838b00ca}">
           <p14:sldIdLst>
             <p14:sldId id="261"/>
           </p14:sldIdLst>
         </p14:section>
-        <p14:section name="Dashboard" id="{6be4c50c-9d3b-36e1-aaeb-5a327345e395}">
+        <p14:section name="Dashboard" id="{38159228-aef1-cee7-66d4-89c4b4009208}">
           <p14:sldIdLst>
             <p14:sldId id="262"/>
           </p14:sldIdLst>
         </p14:section>
-        <p14:section name="Results" id="{8ab8d926-3443-cf18-cedd-8ffccba44f7f}">
+        <p14:section name="Results" id="{84b3b2fb-b9c6-535e-fd66-9337ca798a8c}">
           <p14:sldIdLst>
             <p14:sldId id="263"/>
           </p14:sldIdLst>
         </p14:section>
-        <p14:section name="Impact" id="{1caf43d1-91b9-be80-5f4e-e68196726319}">
+        <p14:section name="Impact" id="{440afda9-af99-c5e8-a7f5-158d99a26fe9}">
           <p14:sldIdLst>
             <p14:sldId id="264"/>
           </p14:sldIdLst>
         </p14:section>
-        <p14:section name="Conclusion" id="{cbb3e246-414a-c16a-f97b-99a92173ec07}">
+        <p14:section name="Conclusion" id="{41a180aa-6f62-1bd3-cf23-14fb9706d693}">
           <p14:sldIdLst>
             <p14:sldId id="265"/>
           </p14:sldIdLst>
         </p14:section>
-        <p14:section name="Team" id="{75ee3073-d013-a9df-974b-0789ef413038}">
+        <p14:section name="Team" id="{ef3dbe1d-c683-257d-12fd-8ccb195cbe2d}">
           <p14:sldIdLst>
             <p14:sldId id="266"/>
           </p14:sldIdLst>
@@ -3763,7 +3763,7 @@
                   <a:schemeClr val="accent2"/>
                 </a:solidFill>
               </a:rPr>
-              <a:t>Forecast data, models &amp; dashboard</a:t>
+              <a:t>Team Lead · Lead Architect</a:t>
             </a:r>
             <a:endParaRPr lang="en-US" sz="1200" dirty="0"/>
           </a:p>
@@ -3963,7 +3963,7 @@
                   <a:schemeClr val="tx2"/>
                 </a:solidFill>
               </a:rPr>
-              <a:t>Hammad Khan</a:t>
+              <a:t>M Hammad Khan</a:t>
             </a:r>
             <a:endParaRPr lang="en-US" sz="1600" dirty="0"/>
           </a:p>
@@ -3999,7 +3999,7 @@
                   <a:schemeClr val="accent2"/>
                 </a:solidFill>
               </a:rPr>
-              <a:t>Satellite rain &amp; ground truth</a:t>
+              <a:t>Lead Backend</a:t>
             </a:r>
             <a:endParaRPr lang="en-US" sz="1200" dirty="0"/>
           </a:p>
@@ -4199,7 +4199,7 @@
                   <a:schemeClr val="tx2"/>
                 </a:solidFill>
               </a:rPr>
-              <a:t>Muhammad Huzaifa</a:t>
+              <a:t>M Huzaifa</a:t>
             </a:r>
             <a:endParaRPr lang="en-US" sz="1600" dirty="0"/>
           </a:p>
@@ -4235,7 +4235,7 @@
                   <a:schemeClr val="accent2"/>
                 </a:solidFill>
               </a:rPr>
-              <a:t>Deployment &amp; delivery</a:t>
+              <a:t>Lead Data Sources</a:t>
             </a:r>
             <a:endParaRPr lang="en-US" sz="1200" dirty="0"/>
           </a:p>

--- a/FloodLens_SparkH.pptx
+++ b/FloodLens_SparkH.pptx
@@ -122,62 +122,62 @@
   <p:extLst>
     <p:ext uri="{521415D9-36F7-43E2-AB2F-B90AF26B5E84}">
       <p14:sectionLst xmlns:p14="http://schemas.microsoft.com/office/powerpoint/2010/main">
-        <p14:section name="Cover" id="{aa3a18de-b0e6-abf7-56b1-4c87834c5c1b}">
+        <p14:section name="Cover" id="{01d8a12b-5fdc-5f7e-f479-655b8f198891}">
           <p14:sldIdLst>
             <p14:sldId id="256"/>
           </p14:sldIdLst>
         </p14:section>
-        <p14:section name="Problem" id="{01d67aa0-3baf-f43e-4bcf-0ec3a9613cac}">
+        <p14:section name="Problem" id="{4435f565-ee12-2c56-f489-87cfdc1a7f92}">
           <p14:sldIdLst>
             <p14:sldId id="257"/>
           </p14:sldIdLst>
         </p14:section>
-        <p14:section name="Data" id="{2b9cf8cc-0b1c-c9db-1522-86ab1e744aaf}">
+        <p14:section name="Data" id="{0ddf81f0-6451-9d82-f651-1f96d35eea40}">
           <p14:sldIdLst>
             <p14:sldId id="258"/>
             <p14:sldId id="259"/>
           </p14:sldIdLst>
         </p14:section>
-        <p14:section name="Pipeline" id="{972a8fa9-bec6-90ef-34cf-924f5cc97cdd}">
+        <p14:section name="Pipeline" id="{5e19b6fe-5c53-4065-f9e7-7e041cf9eeb5}">
           <p14:sldIdLst>
             <p14:sldId id="260"/>
             <p14:sldId id="261"/>
           </p14:sldIdLst>
         </p14:section>
-        <p14:section name="Agents" id="{44e6fc26-c592-8def-12b9-866eb8ba2f8a}">
+        <p14:section name="Agents" id="{d35d06c9-e755-f248-357f-36eeacd62a4f}">
           <p14:sldIdLst>
             <p14:sldId id="262"/>
             <p14:sldId id="263"/>
           </p14:sldIdLst>
         </p14:section>
-        <p14:section name="Dashboard" id="{a3d9a08d-939d-2568-5dd7-fa16f99f8de8}">
+        <p14:section name="Dashboard" id="{01f564f4-a434-4b02-3727-2cfc7399faa6}">
           <p14:sldIdLst>
             <p14:sldId id="264"/>
           </p14:sldIdLst>
         </p14:section>
-        <p14:section name="Results" id="{1f404bd9-23d6-6f56-2c4f-88986e61da05}">
+        <p14:section name="Results" id="{8cb3d5c0-7282-ef76-4425-71909fbc401c}">
           <p14:sldIdLst>
             <p14:sldId id="265"/>
             <p14:sldId id="266"/>
           </p14:sldIdLst>
         </p14:section>
-        <p14:section name="Impact" id="{ec2be030-561f-085c-99b3-7c6a4e3d99dc}">
+        <p14:section name="Impact" id="{756f26b1-0478-7b85-c306-cd4d3ea177a0}">
           <p14:sldIdLst>
             <p14:sldId id="267"/>
           </p14:sldIdLst>
         </p14:section>
-        <p14:section name="Business" id="{67dc6840-a0d9-ce21-b8e9-36fa38afb262}">
+        <p14:section name="Business" id="{b770771c-e939-94c8-d43a-99a494fe1851}">
           <p14:sldIdLst>
             <p14:sldId id="268"/>
             <p14:sldId id="269"/>
           </p14:sldIdLst>
         </p14:section>
-        <p14:section name="Conclusion" id="{539dbb43-5fc8-95ea-5ea6-ee4f4fa10710}">
+        <p14:section name="Conclusion" id="{bfd9a963-1a14-a8e5-f5ba-c9390f6fe738}">
           <p14:sldIdLst>
             <p14:sldId id="270"/>
           </p14:sldIdLst>
         </p14:section>
-        <p14:section name="Team" id="{257b5502-5d56-2a52-808a-a46ec0ede223}">
+        <p14:section name="Team" id="{2c8c96b2-68c6-ce1e-c765-8672f43640a4}">
           <p14:sldIdLst>
             <p14:sldId id="271"/>
           </p14:sldIdLst>
@@ -3445,7 +3445,7 @@
                   <a:schemeClr val="tx1"/>
                 </a:solidFill>
               </a:rPr>
-              <a:t>Platt scaling fitted on the validation period (cross-fitted by week), so a 20% warning means rain like this about 1 time in 5.</a:t>
+              <a:t>Platt scaling fitted on the validation period, never on test, so a 20% warning should mean heavy rain about 1 time in 5.</a:t>
             </a:r>
             <a:endParaRPr lang="en-US" sz="1200" dirty="0"/>
           </a:p>
@@ -5909,7 +5909,7 @@
                             <a:srgbClr val="FFFFFF"/>
                           </a:solidFill>
                         </a:rPr>
-                        <a:t>Provincial alerts &amp; weather apps</a:t>
+                        <a:t>Today: advisories &amp; weather apps</a:t>
                       </a:r>
                       <a:endParaRPr lang="en-US" sz="1300" dirty="0"/>
                     </a:p>
@@ -6091,7 +6091,7 @@
                             <a:srgbClr val="1F2933"/>
                           </a:solidFill>
                         </a:rPr>
-                        <a:t>Often reported once flooding has started</a:t>
+                        <a:t>Advisories issued as events approach</a:t>
                       </a:r>
                       <a:endParaRPr lang="en-US" sz="1300" dirty="0"/>
                     </a:p>
@@ -6149,7 +6149,7 @@
                             <a:srgbClr val="0B5D2A"/>
                           </a:solidFill>
                         </a:rPr>
-                        <a:t>24–72 h ahead, refreshed hourly</a:t>
+                        <a:t>Probabilities 24–72 h ahead, refreshed hourly</a:t>
                       </a:r>
                       <a:endParaRPr lang="en-US" sz="1300" dirty="0"/>
                     </a:p>
@@ -6270,7 +6270,7 @@
                             <a:srgbClr val="1F2933"/>
                           </a:solidFill>
                         </a:rPr>
-                        <a:t>Province or division (“rain in Sindh”)</a:t>
+                        <a:t>Areas listed in words</a:t>
                       </a:r>
                       <a:endParaRPr lang="en-US" sz="1300" dirty="0"/>
                     </a:p>
@@ -6449,7 +6449,7 @@
                             <a:srgbClr val="1F2933"/>
                           </a:solidFill>
                         </a:rPr>
-                        <a:t>Raw forecasts, no stated skill</a:t>
+                        <a:t>No published skill score</a:t>
                       </a:r>
                       <a:endParaRPr lang="en-US" sz="1300" dirty="0"/>
                     </a:p>
@@ -6628,7 +6628,7 @@
                             <a:srgbClr val="1F2933"/>
                           </a:solidFill>
                         </a:rPr>
-                        <a:t>Claims without sources</a:t>
+                        <a:t>Separate PDFs to read and compare</a:t>
                       </a:r>
                       <a:endParaRPr lang="en-US" sz="1300" dirty="0"/>
                     </a:p>
@@ -9871,7 +9871,7 @@
                   <a:schemeClr val="tx1"/>
                 </a:solidFill>
               </a:rPr>
-              <a:t>Alerts are provincial (“heavy rain across KP”); no calibrated per-district chance of rain that is unusual for that district</a:t>
+              <a:t>Advisories list areas in words; none gives each district a calibrated chance of rain that is unusual for it</a:t>
             </a:r>
             <a:endParaRPr lang="en-US" sz="1200" dirty="0"/>
           </a:p>
@@ -10031,7 +10031,7 @@
                   <a:schemeClr val="tx1"/>
                 </a:solidFill>
               </a:rPr>
-              <a:t>Floods cut supply routes and spike staple prices; disaster response and market watch work in silos</a:t>
+              <a:t>Floods can disrupt supply routes and move staple prices; rain alerts and price data sit in separate places</a:t>
             </a:r>
             <a:endParaRPr lang="en-US" sz="1200" dirty="0"/>
           </a:p>
@@ -11403,7 +11403,7 @@
                   <a:schemeClr val="tx1"/>
                 </a:solidFill>
               </a:rPr>
-              <a:t>Previous Runs API: ECMWF, NOAA and DWD forecasts exactly as issued 1, 2 and 3 days ahead</a:t>
+              <a:t>Previous Runs API: weather-model forecasts exactly as issued 1, 2 and 3 days ahead</a:t>
             </a:r>
             <a:endParaRPr lang="en-US" sz="1350" dirty="0"/>
           </a:p>
@@ -11421,7 +11421,7 @@
                   <a:schemeClr val="tx1"/>
                 </a:solidFill>
               </a:rPr>
-              <a:t>Rain sum, max hourly rain, humidity, pressure, cloud cover, wind gusts</a:t>
+              <a:t>Rain sum, max hourly rain, humidity, pressure, cloud cover, wind speed</a:t>
             </a:r>
             <a:endParaRPr lang="en-US" sz="1350" dirty="0"/>
           </a:p>
@@ -11560,7 +11560,7 @@
                   <a:schemeClr val="tx1"/>
                 </a:solidFill>
               </a:rPr>
-              <a:t>Why not gauges? Pakistan's gauges are sparse in the remote, flood-prone districts; satellites cover all 160</a:t>
+              <a:t>Why not gauges? Rain gauges are sparse in many remote districts; satellites cover all 160 evenly</a:t>
             </a:r>
             <a:endParaRPr lang="en-US" sz="1350" dirty="0"/>
           </a:p>

--- a/FloodLens_SparkH.pptx
+++ b/FloodLens_SparkH.pptx
@@ -122,62 +122,62 @@
   <p:extLst>
     <p:ext uri="{521415D9-36F7-43E2-AB2F-B90AF26B5E84}">
       <p14:sectionLst xmlns:p14="http://schemas.microsoft.com/office/powerpoint/2010/main">
-        <p14:section name="Cover" id="{01d8a12b-5fdc-5f7e-f479-655b8f198891}">
+        <p14:section name="Cover" id="{fa24fe71-777c-dacb-f5e4-f67d83feac7e}">
           <p14:sldIdLst>
             <p14:sldId id="256"/>
           </p14:sldIdLst>
         </p14:section>
-        <p14:section name="Problem" id="{4435f565-ee12-2c56-f489-87cfdc1a7f92}">
+        <p14:section name="Problem" id="{7a439515-f095-f631-2696-b9e28d36dcfb}">
           <p14:sldIdLst>
             <p14:sldId id="257"/>
           </p14:sldIdLst>
         </p14:section>
-        <p14:section name="Data" id="{0ddf81f0-6451-9d82-f651-1f96d35eea40}">
+        <p14:section name="Data" id="{d6347614-b07a-7bc2-f3a0-8bd9fa1a08e5}">
           <p14:sldIdLst>
             <p14:sldId id="258"/>
             <p14:sldId id="259"/>
           </p14:sldIdLst>
         </p14:section>
-        <p14:section name="Pipeline" id="{5e19b6fe-5c53-4065-f9e7-7e041cf9eeb5}">
+        <p14:section name="Pipeline" id="{7dfccdba-76a2-557f-3aff-41c615e7a6a8}">
           <p14:sldIdLst>
             <p14:sldId id="260"/>
             <p14:sldId id="261"/>
           </p14:sldIdLst>
         </p14:section>
-        <p14:section name="Agents" id="{d35d06c9-e755-f248-357f-36eeacd62a4f}">
+        <p14:section name="Agents" id="{408a5390-9c59-e75d-9f1a-d8bcd6117719}">
           <p14:sldIdLst>
             <p14:sldId id="262"/>
             <p14:sldId id="263"/>
           </p14:sldIdLst>
         </p14:section>
-        <p14:section name="Dashboard" id="{01f564f4-a434-4b02-3727-2cfc7399faa6}">
+        <p14:section name="Dashboard" id="{3479e009-7c2e-abca-2204-ad0616143e4d}">
           <p14:sldIdLst>
             <p14:sldId id="264"/>
           </p14:sldIdLst>
         </p14:section>
-        <p14:section name="Results" id="{8cb3d5c0-7282-ef76-4425-71909fbc401c}">
+        <p14:section name="Results" id="{e1313b1c-82c6-0bb7-479d-2547e1a9e0b9}">
           <p14:sldIdLst>
             <p14:sldId id="265"/>
             <p14:sldId id="266"/>
           </p14:sldIdLst>
         </p14:section>
-        <p14:section name="Impact" id="{756f26b1-0478-7b85-c306-cd4d3ea177a0}">
+        <p14:section name="Impact" id="{2bd37b05-0865-2ef1-d373-bf58c3dbea5b}">
           <p14:sldIdLst>
             <p14:sldId id="267"/>
           </p14:sldIdLst>
         </p14:section>
-        <p14:section name="Business" id="{b770771c-e939-94c8-d43a-99a494fe1851}">
+        <p14:section name="Business" id="{3d02030f-3475-d4ff-829b-f1e2e1c58531}">
           <p14:sldIdLst>
             <p14:sldId id="268"/>
             <p14:sldId id="269"/>
           </p14:sldIdLst>
         </p14:section>
-        <p14:section name="Conclusion" id="{bfd9a963-1a14-a8e5-f5ba-c9390f6fe738}">
+        <p14:section name="Conclusion" id="{2f893800-0697-0a85-88e2-815cb840c9b1}">
           <p14:sldIdLst>
             <p14:sldId id="270"/>
           </p14:sldIdLst>
         </p14:section>
-        <p14:section name="Team" id="{2c8c96b2-68c6-ce1e-c765-8672f43640a4}">
+        <p14:section name="Team" id="{bcc90c47-d07f-5746-40bd-d982beabfdb2}">
           <p14:sldIdLst>
             <p14:sldId id="271"/>
           </p14:sldIdLst>
@@ -3654,7 +3654,7 @@
                   <a:schemeClr val="bg1"/>
                 </a:solidFill>
               </a:rPr>
-              <a:t>train to 30 Jun 2025 · validate Jul–Dec 2025 · test Jan–Sep 2026, run once with the frozen model. Baseline declared in advance: district-by-month climatology.</a:t>
+              <a:t>train to 30 Jun 2025 · validate Jul–Dec 2025 · test 1 Jan–16 Oct 2026, run once with the frozen model. Baseline declared in advance: district-by-month climatology.</a:t>
             </a:r>
             <a:endParaRPr lang="en-US" sz="1300" dirty="0"/>
           </a:p>
@@ -3798,7 +3798,7 @@
                   <a:schemeClr val="accent2"/>
                 </a:solidFill>
               </a:rPr>
-              <a:t>TEST SET Jan–Sep 2026, run once · Brier [95% CI], lower is better</a:t>
+              <a:t>TEST SET 1 Jan–16 Oct 2026, run once · Brier [95% CI], lower is better</a:t>
             </a:r>
             <a:endParaRPr lang="en-US" sz="1200" dirty="0"/>
           </a:p>
